--- a/03-build/pptx/C5_U4_alumno.pptx
+++ b/03-build/pptx/C5_U4_alumno.pptx
@@ -4475,7 +4475,7 @@
                 </a:solidFill>
                 <a:latin typeface="Inter"/>
               </a:rPr>
-              <a:t>§5 · ESCUCHAR</a:t>
+              <a:t>§4 · ESCUCHAR</a:t>
             </a:r>
           </a:p>
         </p:txBody>
@@ -4520,7 +4520,7 @@
                 </a:solidFill>
                 <a:latin typeface="Bricolage Grotesque"/>
               </a:rPr>
-              <a:t>5</a:t>
+              <a:t>4</a:t>
             </a:r>
           </a:p>
         </p:txBody>
@@ -29354,7 +29354,7 @@
                 </a:solidFill>
                 <a:latin typeface="Bricolage Grotesque"/>
               </a:rPr>
-              <a:t>§5</a:t>
+              <a:t>§4</a:t>
             </a:r>
           </a:p>
         </p:txBody>
@@ -47319,7 +47319,7 @@
                 </a:solidFill>
                 <a:latin typeface="Inter"/>
               </a:rPr>
-              <a:t>§5 · LEER · COMPRENSIÓN</a:t>
+              <a:t>§4 · LEER · COMPRENSIÓN</a:t>
             </a:r>
           </a:p>
         </p:txBody>
@@ -47364,7 +47364,7 @@
                 </a:solidFill>
                 <a:latin typeface="Bricolage Grotesque"/>
               </a:rPr>
-              <a:t>5</a:t>
+              <a:t>4</a:t>
             </a:r>
           </a:p>
         </p:txBody>

--- a/03-build/pptx/C5_U4_alumno.pptx
+++ b/03-build/pptx/C5_U4_alumno.pptx
@@ -4640,7 +4640,6 @@
               <a:srgbClr val="E4E3DE"/>
             </a:solidFill>
           </a:ln>
-          <a:effectLst/>
           <a:effectLst>
             <a:outerShdw blurRad="90000" dist="38000" dir="5400000" rotWithShape="0">
               <a:srgbClr val="20242E">
@@ -4964,7 +4963,6 @@
               <a:srgbClr val="E4E3DE"/>
             </a:solidFill>
           </a:ln>
-          <a:effectLst/>
           <a:effectLst>
             <a:outerShdw blurRad="90000" dist="38000" dir="5400000" rotWithShape="0">
               <a:srgbClr val="20242E">
@@ -5288,7 +5286,6 @@
               <a:srgbClr val="E4E3DE"/>
             </a:solidFill>
           </a:ln>
-          <a:effectLst/>
           <a:effectLst>
             <a:outerShdw blurRad="90000" dist="38000" dir="5400000" rotWithShape="0">
               <a:srgbClr val="20242E">
@@ -5612,7 +5609,6 @@
               <a:srgbClr val="E4E3DE"/>
             </a:solidFill>
           </a:ln>
-          <a:effectLst/>
           <a:effectLst>
             <a:outerShdw blurRad="90000" dist="38000" dir="5400000" rotWithShape="0">
               <a:srgbClr val="20242E">
@@ -7393,7 +7389,6 @@
           <a:ln>
             <a:noFill/>
           </a:ln>
-          <a:effectLst/>
           <a:effectLst>
             <a:outerShdw blurRad="90000" dist="38000" dir="5400000" rotWithShape="0">
               <a:srgbClr val="20242E">
@@ -7491,7 +7486,6 @@
           <a:ln>
             <a:noFill/>
           </a:ln>
-          <a:effectLst/>
           <a:effectLst>
             <a:outerShdw blurRad="90000" dist="38000" dir="5400000" rotWithShape="0">
               <a:srgbClr val="20242E">
@@ -12672,7 +12666,6 @@
               <a:srgbClr val="E4E3DE"/>
             </a:solidFill>
           </a:ln>
-          <a:effectLst/>
           <a:effectLst>
             <a:outerShdw blurRad="90000" dist="38000" dir="5400000" rotWithShape="0">
               <a:srgbClr val="20242E">
@@ -13351,7 +13344,6 @@
               <a:srgbClr val="1E9E74"/>
             </a:solidFill>
           </a:ln>
-          <a:effectLst/>
           <a:effectLst>
             <a:outerShdw blurRad="90000" dist="38000" dir="5400000" rotWithShape="0">
               <a:srgbClr val="20242E">
@@ -20314,7 +20306,6 @@
               <a:srgbClr val="1E9E74"/>
             </a:solidFill>
           </a:ln>
-          <a:effectLst/>
           <a:effectLst>
             <a:outerShdw blurRad="90000" dist="38000" dir="5400000" rotWithShape="0">
               <a:srgbClr val="20242E">
@@ -20548,7 +20539,6 @@
               <a:srgbClr val="1E9E74"/>
             </a:solidFill>
           </a:ln>
-          <a:effectLst/>
           <a:effectLst>
             <a:outerShdw blurRad="90000" dist="38000" dir="5400000" rotWithShape="0">
               <a:srgbClr val="20242E">
@@ -20782,7 +20772,6 @@
               <a:srgbClr val="1E9E74"/>
             </a:solidFill>
           </a:ln>
-          <a:effectLst/>
           <a:effectLst>
             <a:outerShdw blurRad="90000" dist="38000" dir="5400000" rotWithShape="0">
               <a:srgbClr val="20242E">
@@ -22188,7 +22177,6 @@
               <a:srgbClr val="1E9E74"/>
             </a:solidFill>
           </a:ln>
-          <a:effectLst/>
           <a:effectLst>
             <a:outerShdw blurRad="90000" dist="38000" dir="5400000" rotWithShape="0">
               <a:srgbClr val="20242E">
@@ -22387,7 +22375,6 @@
               <a:srgbClr val="1E9E74"/>
             </a:solidFill>
           </a:ln>
-          <a:effectLst/>
           <a:effectLst>
             <a:outerShdw blurRad="90000" dist="38000" dir="5400000" rotWithShape="0">
               <a:srgbClr val="20242E">
@@ -22586,7 +22573,6 @@
               <a:srgbClr val="1E9E74"/>
             </a:solidFill>
           </a:ln>
-          <a:effectLst/>
           <a:effectLst>
             <a:outerShdw blurRad="90000" dist="38000" dir="5400000" rotWithShape="0">
               <a:srgbClr val="20242E">
@@ -22785,7 +22771,6 @@
               <a:srgbClr val="1E9E74"/>
             </a:solidFill>
           </a:ln>
-          <a:effectLst/>
           <a:effectLst>
             <a:outerShdw blurRad="90000" dist="38000" dir="5400000" rotWithShape="0">
               <a:srgbClr val="20242E">
@@ -22984,7 +22969,6 @@
               <a:srgbClr val="1E9E74"/>
             </a:solidFill>
           </a:ln>
-          <a:effectLst/>
           <a:effectLst>
             <a:outerShdw blurRad="90000" dist="38000" dir="5400000" rotWithShape="0">
               <a:srgbClr val="20242E">
@@ -23183,7 +23167,6 @@
               <a:srgbClr val="1E9E74"/>
             </a:solidFill>
           </a:ln>
-          <a:effectLst/>
           <a:effectLst>
             <a:outerShdw blurRad="90000" dist="38000" dir="5400000" rotWithShape="0">
               <a:srgbClr val="20242E">
@@ -23434,7 +23417,6 @@
           <a:ln>
             <a:noFill/>
           </a:ln>
-          <a:effectLst/>
           <a:effectLst>
             <a:outerShdw blurRad="90000" dist="38000" dir="5400000" rotWithShape="0">
               <a:srgbClr val="20242E">
@@ -23554,7 +23536,6 @@
           <a:ln>
             <a:noFill/>
           </a:ln>
-          <a:effectLst/>
           <a:effectLst>
             <a:outerShdw blurRad="90000" dist="38000" dir="5400000" rotWithShape="0">
               <a:srgbClr val="20242E">
@@ -23674,7 +23655,6 @@
           <a:ln>
             <a:noFill/>
           </a:ln>
-          <a:effectLst/>
           <a:effectLst>
             <a:outerShdw blurRad="90000" dist="38000" dir="5400000" rotWithShape="0">
               <a:srgbClr val="20242E">
@@ -23794,7 +23774,6 @@
           <a:ln>
             <a:noFill/>
           </a:ln>
-          <a:effectLst/>
           <a:effectLst>
             <a:outerShdw blurRad="90000" dist="38000" dir="5400000" rotWithShape="0">
               <a:srgbClr val="20242E">
@@ -28837,7 +28816,6 @@
               <a:srgbClr val="1E9E74"/>
             </a:solidFill>
           </a:ln>
-          <a:effectLst/>
           <a:effectLst>
             <a:outerShdw blurRad="90000" dist="38000" dir="5400000" rotWithShape="0">
               <a:srgbClr val="20242E">
@@ -29140,7 +29118,6 @@
               <a:srgbClr val="1E9E74"/>
             </a:solidFill>
           </a:ln>
-          <a:effectLst/>
           <a:effectLst>
             <a:outerShdw blurRad="90000" dist="38000" dir="5400000" rotWithShape="0">
               <a:srgbClr val="20242E">
@@ -29443,7 +29420,6 @@
               <a:srgbClr val="1E9E74"/>
             </a:solidFill>
           </a:ln>
-          <a:effectLst/>
           <a:effectLst>
             <a:outerShdw blurRad="90000" dist="38000" dir="5400000" rotWithShape="0">
               <a:srgbClr val="20242E">
@@ -29746,7 +29722,6 @@
               <a:srgbClr val="1E9E74"/>
             </a:solidFill>
           </a:ln>
-          <a:effectLst/>
           <a:effectLst>
             <a:outerShdw blurRad="90000" dist="38000" dir="5400000" rotWithShape="0">
               <a:srgbClr val="20242E">
@@ -30049,7 +30024,6 @@
               <a:srgbClr val="157355"/>
             </a:solidFill>
           </a:ln>
-          <a:effectLst/>
           <a:effectLst>
             <a:outerShdw blurRad="90000" dist="38000" dir="5400000" rotWithShape="0">
               <a:srgbClr val="20242E">
@@ -30352,7 +30326,6 @@
               <a:srgbClr val="157355"/>
             </a:solidFill>
           </a:ln>
-          <a:effectLst/>
           <a:effectLst>
             <a:outerShdw blurRad="90000" dist="38000" dir="5400000" rotWithShape="0">
               <a:srgbClr val="20242E">
@@ -30655,7 +30628,6 @@
               <a:srgbClr val="157355"/>
             </a:solidFill>
           </a:ln>
-          <a:effectLst/>
           <a:effectLst>
             <a:outerShdw blurRad="90000" dist="38000" dir="5400000" rotWithShape="0">
               <a:srgbClr val="20242E">
@@ -30958,7 +30930,6 @@
               <a:srgbClr val="B7860B"/>
             </a:solidFill>
           </a:ln>
-          <a:effectLst/>
           <a:effectLst>
             <a:outerShdw blurRad="90000" dist="38000" dir="5400000" rotWithShape="0">
               <a:srgbClr val="20242E">
@@ -31261,7 +31232,6 @@
               <a:srgbClr val="157355"/>
             </a:solidFill>
           </a:ln>
-          <a:effectLst/>
           <a:effectLst>
             <a:outerShdw blurRad="90000" dist="38000" dir="5400000" rotWithShape="0">
               <a:srgbClr val="20242E">
@@ -34629,7 +34599,6 @@
           <a:ln>
             <a:noFill/>
           </a:ln>
-          <a:effectLst/>
           <a:effectLst>
             <a:outerShdw blurRad="90000" dist="38000" dir="5400000" rotWithShape="0">
               <a:srgbClr val="20242E">
@@ -40218,7 +40187,6 @@
           <a:ln>
             <a:noFill/>
           </a:ln>
-          <a:effectLst/>
           <a:effectLst>
             <a:outerShdw blurRad="90000" dist="38000" dir="5400000" rotWithShape="0">
               <a:srgbClr val="20242E">
@@ -44511,7 +44479,6 @@
               <a:srgbClr val="1E9E74"/>
             </a:solidFill>
           </a:ln>
-          <a:effectLst/>
           <a:effectLst>
             <a:outerShdw blurRad="90000" dist="38000" dir="5400000" rotWithShape="0">
               <a:srgbClr val="20242E">
@@ -44656,7 +44623,6 @@
               <a:srgbClr val="1E9E74"/>
             </a:solidFill>
           </a:ln>
-          <a:effectLst/>
           <a:effectLst>
             <a:outerShdw blurRad="90000" dist="38000" dir="5400000" rotWithShape="0">
               <a:srgbClr val="20242E">
@@ -44801,7 +44767,6 @@
               <a:srgbClr val="1E9E74"/>
             </a:solidFill>
           </a:ln>
-          <a:effectLst/>
           <a:effectLst>
             <a:outerShdw blurRad="90000" dist="38000" dir="5400000" rotWithShape="0">
               <a:srgbClr val="20242E">
@@ -44946,7 +44911,6 @@
               <a:srgbClr val="1E9E74"/>
             </a:solidFill>
           </a:ln>
-          <a:effectLst/>
           <a:effectLst>
             <a:outerShdw blurRad="90000" dist="38000" dir="5400000" rotWithShape="0">
               <a:srgbClr val="20242E">
@@ -45091,7 +45055,6 @@
               <a:srgbClr val="1E9E74"/>
             </a:solidFill>
           </a:ln>
-          <a:effectLst/>
           <a:effectLst>
             <a:outerShdw blurRad="90000" dist="38000" dir="5400000" rotWithShape="0">
               <a:srgbClr val="20242E">
@@ -45236,7 +45199,6 @@
               <a:srgbClr val="1E9E74"/>
             </a:solidFill>
           </a:ln>
-          <a:effectLst/>
           <a:effectLst>
             <a:outerShdw blurRad="90000" dist="38000" dir="5400000" rotWithShape="0">
               <a:srgbClr val="20242E">
@@ -46775,7 +46737,6 @@
               <a:srgbClr val="1E9E74"/>
             </a:solidFill>
           </a:ln>
-          <a:effectLst/>
           <a:effectLst>
             <a:outerShdw blurRad="90000" dist="38000" dir="5400000" rotWithShape="0">
               <a:srgbClr val="20242E">
@@ -46930,7 +46891,6 @@
               <a:srgbClr val="B7860B"/>
             </a:solidFill>
           </a:ln>
-          <a:effectLst/>
           <a:effectLst>
             <a:outerShdw blurRad="90000" dist="38000" dir="5400000" rotWithShape="0">
               <a:srgbClr val="20242E">
@@ -47085,7 +47045,6 @@
               <a:srgbClr val="1E9E74"/>
             </a:solidFill>
           </a:ln>
-          <a:effectLst/>
           <a:effectLst>
             <a:outerShdw blurRad="90000" dist="38000" dir="5400000" rotWithShape="0">
               <a:srgbClr val="20242E">
@@ -47240,7 +47199,6 @@
               <a:srgbClr val="B7860B"/>
             </a:solidFill>
           </a:ln>
-          <a:effectLst/>
           <a:effectLst>
             <a:outerShdw blurRad="90000" dist="38000" dir="5400000" rotWithShape="0">
               <a:srgbClr val="20242E">
@@ -50846,7 +50804,6 @@
               <a:srgbClr val="1E9E74"/>
             </a:solidFill>
           </a:ln>
-          <a:effectLst/>
           <a:effectLst>
             <a:outerShdw blurRad="90000" dist="38000" dir="5400000" rotWithShape="0">
               <a:srgbClr val="20242E">

--- a/03-build/pptx/C5_U4_alumno.pptx
+++ b/03-build/pptx/C5_U4_alumno.pptx
@@ -13,6 +13,9 @@
     <p:sldId id="261" r:id="rId12"/>
     <p:sldId id="262" r:id="rId13"/>
     <p:sldId id="263" r:id="rId14"/>
+    <p:sldId id="277" r:id="rId28"/>
+    <p:sldId id="278" r:id="rId29"/>
+    <p:sldId id="279" r:id="rId30"/>
     <p:sldId id="264" r:id="rId15"/>
     <p:sldId id="265" r:id="rId16"/>
     <p:sldId id="266" r:id="rId17"/>
@@ -125,6 +128,255 @@
     </a:lvl9pPr>
   </p:defaultTextStyle>
 </p:presentation>
+</file>
+
+<file path=ppt/notesSlides/notesSlide1.xml><?xml version="1.0" encoding="utf-8"?>
+<p:notes xmlns:a="http://schemas.openxmlformats.org/drawingml/2006/main" xmlns:p="http://schemas.openxmlformats.org/presentationml/2006/main" xmlns:r="http://schemas.openxmlformats.org/officeDocument/2006/relationships">
+  <p:cSld>
+    <p:spTree>
+      <p:nvGrpSpPr>
+        <p:cNvPr id="1" name=""/>
+        <p:cNvGrpSpPr/>
+        <p:nvPr/>
+      </p:nvGrpSpPr>
+      <p:grpSpPr>
+        <a:xfrm>
+          <a:off x="0" y="0"/>
+          <a:ext cx="0" cy="0"/>
+          <a:chOff x="0" y="0"/>
+          <a:chExt cx="0" cy="0"/>
+        </a:xfrm>
+      </p:grpSpPr>
+      <p:sp>
+        <p:nvSpPr>
+          <p:cNvPr id="2" name="Slide Image Placeholder 1"/>
+          <p:cNvSpPr>
+            <a:spLocks noGrp="1"/>
+          </p:cNvSpPr>
+          <p:nvPr>
+            <p:ph type="sldImg" idx="2"/>
+          </p:nvPr>
+        </p:nvSpPr>
+        <p:spPr/>
+      </p:sp>
+      <p:sp>
+        <p:nvSpPr>
+          <p:cNvPr id="3" name="Notes Placeholder 2"/>
+          <p:cNvSpPr>
+            <a:spLocks noGrp="1"/>
+          </p:cNvSpPr>
+          <p:nvPr>
+            <p:ph type="body" idx="3" sz="quarter"/>
+          </p:nvPr>
+        </p:nvSpPr>
+        <p:spPr/>
+        <p:txBody>
+          <a:bodyPr/>
+          <a:lstStyle/>
+          <a:p>
+            <a:r>
+              <a:t>RETO 1 · El termómetro de la clase — 🔬 onderzoek &amp; data</a:t>
+            </a:r>
+          </a:p>
+          <a:p>
+            <a:r>
+              <a:t>OPDRACHT: Ga op de lijn staan naargelang wat je vindt. Daarna tellen we en trekken we een conclusie.</a:t>
+            </a:r>
+          </a:p>
+          <a:p>
+            <a:r>
+              <a:t>DE REGEL: Je mag niet in het midden blijven hangen: kies een van de vier plaatsen. En wie gevraagd wordt, verantwoordt zijn plek met «porque».</a:t>
+            </a:r>
+          </a:p>
+          <a:p>
+            <a:r>
+              <a:t>VERLOOP: El/la profe dice una cosa. Todos se colocan. | Dos alumnos explican su sitio con «porque». | Contamos y anotamos el número. | Al final: tres conclusiones con «a … le gusta».</a:t>
+            </a:r>
+          </a:p>
+          <a:p>
+            <a:r>
+              <a:t>SLEUTEL: De conclusies zijn de eigenlijke opbrengst: «a doce personas les gusta la playa» vraagt les plus meervoud, en dat is precies wat leerlingen vergeten.  ||  «Hablar en público» geeft meestal de breedste spreiding en dus het interessantste gesprek.  ||  Tel echt en schrijf het getal op het bord: zonder cijfer wordt het een meningenronde.</a:t>
+            </a:r>
+          </a:p>
+          <a:p>
+            <a:r>
+              <a:t>NOTA: Werkt alleen als de klas fysiek kan bewegen. Lukt dat niet, laat de leerlingen dan met vier vingers stemmen — maar tel nog steeds.</a:t>
+            </a:r>
+          </a:p>
+        </p:txBody>
+      </p:sp>
+    </p:spTree>
+  </p:cSld>
+  <p:clrMapOvr>
+    <a:masterClrMapping/>
+  </p:clrMapOvr>
+</p:notes>
+</file>
+
+<file path=ppt/notesSlides/notesSlide2.xml><?xml version="1.0" encoding="utf-8"?>
+<p:notes xmlns:a="http://schemas.openxmlformats.org/drawingml/2006/main" xmlns:p="http://schemas.openxmlformats.org/presentationml/2006/main" xmlns:r="http://schemas.openxmlformats.org/officeDocument/2006/relationships">
+  <p:cSld>
+    <p:spTree>
+      <p:nvGrpSpPr>
+        <p:cNvPr id="1" name=""/>
+        <p:cNvGrpSpPr/>
+        <p:nvPr/>
+      </p:nvGrpSpPr>
+      <p:grpSpPr>
+        <a:xfrm>
+          <a:off x="0" y="0"/>
+          <a:ext cx="0" cy="0"/>
+          <a:chOff x="0" y="0"/>
+          <a:chExt cx="0" cy="0"/>
+        </a:xfrm>
+      </p:grpSpPr>
+      <p:sp>
+        <p:nvSpPr>
+          <p:cNvPr id="2" name="Slide Image Placeholder 1"/>
+          <p:cNvSpPr>
+            <a:spLocks noGrp="1"/>
+          </p:cNvSpPr>
+          <p:nvPr>
+            <p:ph type="sldImg" idx="2"/>
+          </p:nvPr>
+        </p:nvSpPr>
+        <p:spPr/>
+      </p:sp>
+      <p:sp>
+        <p:nvSpPr>
+          <p:cNvPr id="3" name="Notes Placeholder 2"/>
+          <p:cNvSpPr>
+            <a:spLocks noGrp="1"/>
+          </p:cNvSpPr>
+          <p:nvPr>
+            <p:ph type="body" idx="3" sz="quarter"/>
+          </p:nvPr>
+        </p:nvSpPr>
+        <p:spPr/>
+        <p:txBody>
+          <a:bodyPr/>
+          <a:lstStyle/>
+          <a:p>
+            <a:r>
+              <a:t>RETO 3 · Radio Valencia: la llamada — 📻 mediaformat</a:t>
+            </a:r>
+          </a:p>
+          <a:p>
+            <a:r>
+              <a:t>OPDRACHT: Bel de radio, groet, vraag je nummer aan en licht toe. De presentator reageert.</a:t>
+            </a:r>
+          </a:p>
+          <a:p>
+            <a:r>
+              <a:t>DE REGEL: De presentator reageert altijd met también, tampoco, a mí sí of a mí no — en nooit twee keer dezelfde in één uitzending.</a:t>
+            </a:r>
+          </a:p>
+          <a:p>
+            <a:r>
+              <a:t>VERLOOP: El/la profe es el presentador. Empieza la emisión. | Llamas: saludo, canción, razón. | El presentador reacciona y pasa al siguiente. | Cambio de presentador cada cuatro llamadas.</a:t>
+            </a:r>
+          </a:p>
+          <a:p>
+            <a:r>
+              <a:t>SLEUTEL: De regel «nooit twee keer dezelfde reactie» dwingt de presentator door alle vier de vormen. Dat is de didactische winst, niet het bellen.  ||  Bij «a mí tampoco» moet de beller iets negatiefs gezegd hebben — anders klopt de reactie niet en corrigeert de klas.  ||  Laat leerlingen presentator zijn: die rol oefent meer dan de belrol.</a:t>
+            </a:r>
+          </a:p>
+          <a:p>
+            <a:r>
+              <a:t>NOTA: Een echte jingle en een microfoon (of een pen als microfoon) tillen dit op. Zonder radio-inkleding wordt het een gewone beurtronde.</a:t>
+            </a:r>
+          </a:p>
+        </p:txBody>
+      </p:sp>
+    </p:spTree>
+  </p:cSld>
+  <p:clrMapOvr>
+    <a:masterClrMapping/>
+  </p:clrMapOvr>
+</p:notes>
+</file>
+
+<file path=ppt/notesSlides/notesSlide3.xml><?xml version="1.0" encoding="utf-8"?>
+<p:notes xmlns:a="http://schemas.openxmlformats.org/drawingml/2006/main" xmlns:p="http://schemas.openxmlformats.org/presentationml/2006/main" xmlns:r="http://schemas.openxmlformats.org/officeDocument/2006/relationships">
+  <p:cSld>
+    <p:spTree>
+      <p:nvGrpSpPr>
+        <p:cNvPr id="1" name=""/>
+        <p:cNvGrpSpPr/>
+        <p:nvPr/>
+      </p:nvGrpSpPr>
+      <p:grpSpPr>
+        <a:xfrm>
+          <a:off x="0" y="0"/>
+          <a:ext cx="0" cy="0"/>
+          <a:chOff x="0" y="0"/>
+          <a:chExt cx="0" cy="0"/>
+        </a:xfrm>
+      </p:grpSpPr>
+      <p:sp>
+        <p:nvSpPr>
+          <p:cNvPr id="2" name="Slide Image Placeholder 1"/>
+          <p:cNvSpPr>
+            <a:spLocks noGrp="1"/>
+          </p:cNvSpPr>
+          <p:nvPr>
+            <p:ph type="sldImg" idx="2"/>
+          </p:nvPr>
+        </p:nvSpPr>
+        <p:spPr/>
+      </p:sp>
+      <p:sp>
+        <p:nvSpPr>
+          <p:cNvPr id="3" name="Notes Placeholder 2"/>
+          <p:cNvSpPr>
+            <a:spLocks noGrp="1"/>
+          </p:cNvSpPr>
+          <p:nvPr>
+            <p:ph type="body" idx="3" sz="quarter"/>
+          </p:nvPr>
+        </p:nvSpPr>
+        <p:spPr/>
+        <p:txBody>
+          <a:bodyPr/>
+          <a:lstStyle/>
+          <a:p>
+            <a:r>
+              <a:t>RETO 8 · Cadena rota — 🔓 puzzel &amp; escape</a:t>
+            </a:r>
+          </a:p>
+          <a:p>
+            <a:r>
+              <a:t>OPDRACHT: Reageer op je buur en voeg een eigen gusto toe. Zonder reacties te herhalen.</a:t>
+            </a:r>
+          </a:p>
+          <a:p>
+            <a:r>
+              <a:t>DE REGEL: Een reactie die al gebruikt is, breekt de ketting — ook als ze klopt. De klas moet dus bijhouden wat al voorbijkwam.</a:t>
+            </a:r>
+          </a:p>
+          <a:p>
+            <a:r>
+              <a:t>VERLOOP: El primero dice un gusto. | El siguiente reacciona y añade el suyo. | ¿Reacción repetida? Se rompe: vuelta a empezar. | Meta: dar la vuelta entera a la clase.</a:t>
+            </a:r>
+          </a:p>
+          <a:p>
+            <a:r>
+              <a:t>SLEUTEL: Acht reacties betekent dat de ketting minstens acht leerlingen ver kan komen. Daarna moet de klas ze hergebruiken — dan pas mag herhalen.  ||  De klassieke breuk: «a mí también» na een ontkenning. Dat moet «a mí tampoco» zijn.  ||  Noteer de gebruikte reacties zichtbaar; zonder dat spoor is de regel niet te handhaven.</a:t>
+            </a:r>
+          </a:p>
+          <a:p>
+            <a:r>
+              <a:t>NOTA: Speel maximaal drie rondes. Daarna wordt het onthouden belangrijker dan het spreken, en dat is niet het doel.</a:t>
+            </a:r>
+          </a:p>
+        </p:txBody>
+      </p:sp>
+    </p:spTree>
+  </p:cSld>
+  <p:clrMapOvr>
+    <a:masterClrMapping/>
+  </p:clrMapOvr>
+</p:notes>
 </file>
 
 <file path=ppt/slideLayouts/slideLayout1.xml><?xml version="1.0" encoding="utf-8"?>
@@ -36190,6 +36442,6253 @@
 </p:sld>
 </file>
 
+<file path=ppt/slides/slide22.xml><?xml version="1.0" encoding="utf-8"?>
+<p:sld xmlns:a="http://schemas.openxmlformats.org/drawingml/2006/main" xmlns:p="http://schemas.openxmlformats.org/presentationml/2006/main" xmlns:r="http://schemas.openxmlformats.org/officeDocument/2006/relationships">
+  <p:cSld>
+    <p:spTree>
+      <p:nvGrpSpPr>
+        <p:cNvPr id="1" name=""/>
+        <p:cNvGrpSpPr/>
+        <p:nvPr/>
+      </p:nvGrpSpPr>
+      <p:grpSpPr/>
+      <p:sp>
+        <p:nvSpPr>
+          <p:cNvPr id="2" name="Fondo"/>
+          <p:cNvSpPr/>
+          <p:nvPr/>
+        </p:nvSpPr>
+        <p:spPr>
+          <a:xfrm>
+            <a:off x="0" y="0"/>
+            <a:ext cx="12191695" cy="6858000"/>
+          </a:xfrm>
+          <a:prstGeom prst="rect">
+            <a:avLst/>
+          </a:prstGeom>
+          <a:solidFill>
+            <a:srgbClr val="FCFBF8"/>
+          </a:solidFill>
+          <a:ln>
+            <a:noFill/>
+          </a:ln>
+          <a:effectLst/>
+        </p:spPr>
+        <p:style>
+          <a:lnRef idx="1">
+            <a:schemeClr val="accent1"/>
+          </a:lnRef>
+          <a:fillRef idx="3">
+            <a:schemeClr val="accent1"/>
+          </a:fillRef>
+          <a:effectRef idx="2">
+            <a:schemeClr val="accent1"/>
+          </a:effectRef>
+          <a:fontRef idx="minor">
+            <a:schemeClr val="lt1"/>
+          </a:fontRef>
+        </p:style>
+        <p:txBody>
+          <a:bodyPr rtlCol="0" anchor="ctr"/>
+          <a:lstStyle/>
+          <a:p/>
+        </p:txBody>
+      </p:sp>
+      <p:sp>
+        <p:nvSpPr>
+          <p:cNvPr id="3" name="Cabecera"/>
+          <p:cNvSpPr/>
+          <p:nvPr/>
+        </p:nvSpPr>
+        <p:spPr>
+          <a:xfrm>
+            <a:off x="0" y="0"/>
+            <a:ext cx="12191695" cy="1078992"/>
+          </a:xfrm>
+          <a:prstGeom prst="rect">
+            <a:avLst/>
+          </a:prstGeom>
+          <a:solidFill>
+            <a:srgbClr val="1E9E74"/>
+          </a:solidFill>
+          <a:ln>
+            <a:noFill/>
+          </a:ln>
+          <a:effectLst/>
+        </p:spPr>
+        <p:style>
+          <a:lnRef idx="1">
+            <a:schemeClr val="accent1"/>
+          </a:lnRef>
+          <a:fillRef idx="3">
+            <a:schemeClr val="accent1"/>
+          </a:fillRef>
+          <a:effectRef idx="2">
+            <a:schemeClr val="accent1"/>
+          </a:effectRef>
+          <a:fontRef idx="minor">
+            <a:schemeClr val="lt1"/>
+          </a:fontRef>
+        </p:style>
+        <p:txBody>
+          <a:bodyPr rtlCol="0" anchor="ctr"/>
+          <a:lstStyle/>
+          <a:p/>
+        </p:txBody>
+      </p:sp>
+      <p:sp>
+        <p:nvSpPr>
+          <p:cNvPr id="4" name="Chip"/>
+          <p:cNvSpPr/>
+          <p:nvPr/>
+        </p:nvSpPr>
+        <p:spPr>
+          <a:xfrm>
+            <a:off x="457200" y="182880"/>
+            <a:ext cx="3017520" cy="292608"/>
+          </a:xfrm>
+          <a:prstGeom prst="roundRect">
+            <a:avLst>
+              <a:gd name="adj" fmla="val 50000"/>
+            </a:avLst>
+          </a:prstGeom>
+          <a:solidFill>
+            <a:srgbClr val="FFFFFF"/>
+          </a:solidFill>
+          <a:ln>
+            <a:noFill/>
+          </a:ln>
+          <a:effectLst/>
+        </p:spPr>
+        <p:style>
+          <a:lnRef idx="1">
+            <a:schemeClr val="accent1"/>
+          </a:lnRef>
+          <a:fillRef idx="3">
+            <a:schemeClr val="accent1"/>
+          </a:fillRef>
+          <a:effectRef idx="2">
+            <a:schemeClr val="accent1"/>
+          </a:effectRef>
+          <a:fontRef idx="minor">
+            <a:schemeClr val="lt1"/>
+          </a:fontRef>
+        </p:style>
+        <p:txBody>
+          <a:bodyPr rtlCol="0" anchor="ctr"/>
+          <a:lstStyle/>
+          <a:p/>
+        </p:txBody>
+      </p:sp>
+      <p:sp>
+        <p:nvSpPr>
+          <p:cNvPr id="5" name="ChipTxt"/>
+          <p:cNvSpPr txBox="1"/>
+          <p:nvPr/>
+        </p:nvSpPr>
+        <p:spPr>
+          <a:xfrm>
+            <a:off x="457200" y="173736"/>
+            <a:ext cx="3017520" cy="310896"/>
+          </a:xfrm>
+          <a:prstGeom prst="rect">
+            <a:avLst/>
+          </a:prstGeom>
+          <a:noFill/>
+        </p:spPr>
+        <p:txBody>
+          <a:bodyPr wrap="square" anchor="ctr" lIns="45720" rIns="45720" tIns="27432" bIns="27432">
+            <a:normAutofit/>
+          </a:bodyPr>
+          <a:lstStyle/>
+          <a:p>
+            <a:pPr algn="ctr"/>
+            <a:r>
+              <a:rPr sz="950" b="1">
+                <a:solidFill>
+                  <a:srgbClr val="157355"/>
+                </a:solidFill>
+                <a:latin typeface="Inter"/>
+              </a:rPr>
+              <a:t>RETO 1 · ONDERZOEK &amp; DATA</a:t>
+            </a:r>
+          </a:p>
+        </p:txBody>
+      </p:sp>
+      <p:sp>
+        <p:nvSpPr>
+          <p:cNvPr id="6" name="Titulo"/>
+          <p:cNvSpPr txBox="1"/>
+          <p:nvPr/>
+        </p:nvSpPr>
+        <p:spPr>
+          <a:xfrm>
+            <a:off x="457200" y="502920"/>
+            <a:ext cx="8412480" cy="475488"/>
+          </a:xfrm>
+          <a:prstGeom prst="rect">
+            <a:avLst/>
+          </a:prstGeom>
+          <a:noFill/>
+        </p:spPr>
+        <p:txBody>
+          <a:bodyPr wrap="square" anchor="t" lIns="45720" rIns="45720" tIns="27432" bIns="27432">
+            <a:normAutofit/>
+          </a:bodyPr>
+          <a:lstStyle/>
+          <a:p>
+            <a:pPr algn="l"/>
+            <a:r>
+              <a:rPr sz="2700" b="1">
+                <a:solidFill>
+                  <a:srgbClr val="FFFFFF"/>
+                </a:solidFill>
+                <a:latin typeface="Bricolage Grotesque"/>
+              </a:rPr>
+              <a:t>El termómetro de la clase</a:t>
+            </a:r>
+          </a:p>
+        </p:txBody>
+      </p:sp>
+      <p:sp>
+        <p:nvSpPr>
+          <p:cNvPr id="7" name="Badges"/>
+          <p:cNvSpPr txBox="1"/>
+          <p:nvPr/>
+        </p:nvSpPr>
+        <p:spPr>
+          <a:xfrm>
+            <a:off x="9052560" y="256032"/>
+            <a:ext cx="2651760" cy="640080"/>
+          </a:xfrm>
+          <a:prstGeom prst="rect">
+            <a:avLst/>
+          </a:prstGeom>
+          <a:noFill/>
+        </p:spPr>
+        <p:txBody>
+          <a:bodyPr wrap="square" anchor="t" lIns="45720" rIns="45720" tIns="27432" bIns="27432">
+            <a:normAutofit/>
+          </a:bodyPr>
+          <a:lstStyle/>
+          <a:p>
+            <a:pPr algn="r"/>
+            <a:r>
+              <a:rPr sz="1000">
+                <a:solidFill>
+                  <a:srgbClr val="E4F4EE"/>
+                </a:solidFill>
+                <a:latin typeface="Inter"/>
+              </a:rPr>
+              <a:t>🏫 Toda la clase · de pie</a:t>
+            </a:r>
+          </a:p>
+          <a:p>
+            <a:pPr algn="r"/>
+            <a:r>
+              <a:rPr sz="1000">
+                <a:solidFill>
+                  <a:srgbClr val="E4F4EE"/>
+                </a:solidFill>
+                <a:latin typeface="Inter"/>
+              </a:rPr>
+              <a:t>± 15 min · ★★☆</a:t>
+            </a:r>
+          </a:p>
+        </p:txBody>
+      </p:sp>
+      <p:sp>
+        <p:nvSpPr>
+          <p:cNvPr id="8" name="Gancho"/>
+          <p:cNvSpPr txBox="1"/>
+          <p:nvPr/>
+        </p:nvSpPr>
+        <p:spPr>
+          <a:xfrm>
+            <a:off x="457200" y="1225296"/>
+            <a:ext cx="11274552" cy="566928"/>
+          </a:xfrm>
+          <a:prstGeom prst="rect">
+            <a:avLst/>
+          </a:prstGeom>
+          <a:noFill/>
+        </p:spPr>
+        <p:txBody>
+          <a:bodyPr wrap="square" anchor="t" lIns="45720" rIns="45720" tIns="27432" bIns="27432">
+            <a:normAutofit/>
+          </a:bodyPr>
+          <a:lstStyle/>
+          <a:p>
+            <a:pPr algn="l"/>
+            <a:r>
+              <a:rPr sz="1600" b="1">
+                <a:solidFill>
+                  <a:srgbClr val="157355"/>
+                </a:solidFill>
+                <a:latin typeface="Bricolage Grotesque"/>
+              </a:rPr>
+              <a:t>De pie. La clase es una escala: de «odio» a «me encanta».</a:t>
+            </a:r>
+          </a:p>
+          <a:p>
+            <a:pPr algn="l"/>
+            <a:r>
+              <a:rPr sz="1100" i="1">
+                <a:solidFill>
+                  <a:srgbClr val="6A6E78"/>
+                </a:solidFill>
+                <a:latin typeface="Inter"/>
+              </a:rPr>
+              <a:t>Rechtstaan. De klas is een schaal: van «odio» tot «me encanta».</a:t>
+            </a:r>
+          </a:p>
+        </p:txBody>
+      </p:sp>
+      <p:sp>
+        <p:nvSpPr>
+          <p:cNvPr id="9" name="ReglaCaja"/>
+          <p:cNvSpPr/>
+          <p:nvPr/>
+        </p:nvSpPr>
+        <p:spPr>
+          <a:xfrm>
+            <a:off x="457200" y="1847088"/>
+            <a:ext cx="11274552" cy="658368"/>
+          </a:xfrm>
+          <a:prstGeom prst="roundRect">
+            <a:avLst>
+              <a:gd name="adj" fmla="val 5000"/>
+            </a:avLst>
+          </a:prstGeom>
+          <a:solidFill>
+            <a:srgbClr val="FBF3D6"/>
+          </a:solidFill>
+          <a:ln>
+            <a:noFill/>
+          </a:ln>
+          <a:effectLst/>
+        </p:spPr>
+        <p:style>
+          <a:lnRef idx="1">
+            <a:schemeClr val="accent1"/>
+          </a:lnRef>
+          <a:fillRef idx="3">
+            <a:schemeClr val="accent1"/>
+          </a:fillRef>
+          <a:effectRef idx="2">
+            <a:schemeClr val="accent1"/>
+          </a:effectRef>
+          <a:fontRef idx="minor">
+            <a:schemeClr val="lt1"/>
+          </a:fontRef>
+        </p:style>
+        <p:txBody>
+          <a:bodyPr rtlCol="0" anchor="ctr"/>
+          <a:lstStyle/>
+          <a:p/>
+        </p:txBody>
+      </p:sp>
+      <p:sp>
+        <p:nvSpPr>
+          <p:cNvPr id="10" name="ReglaTxt"/>
+          <p:cNvSpPr txBox="1"/>
+          <p:nvPr/>
+        </p:nvSpPr>
+        <p:spPr>
+          <a:xfrm>
+            <a:off x="603504" y="1883664"/>
+            <a:ext cx="10972800" cy="585216"/>
+          </a:xfrm>
+          <a:prstGeom prst="rect">
+            <a:avLst/>
+          </a:prstGeom>
+          <a:noFill/>
+        </p:spPr>
+        <p:txBody>
+          <a:bodyPr wrap="square" anchor="t" lIns="45720" rIns="45720" tIns="27432" bIns="27432">
+            <a:normAutofit/>
+          </a:bodyPr>
+          <a:lstStyle/>
+          <a:p>
+            <a:pPr algn="l"/>
+            <a:r>
+              <a:rPr sz="850" b="1">
+                <a:solidFill>
+                  <a:srgbClr val="B7860B"/>
+                </a:solidFill>
+                <a:latin typeface="Inter"/>
+              </a:rPr>
+              <a:t>LA REGLA DEL RETO</a:t>
+            </a:r>
+          </a:p>
+          <a:p>
+            <a:pPr algn="l"/>
+            <a:r>
+              <a:rPr sz="1100">
+                <a:solidFill>
+                  <a:srgbClr val="20242E"/>
+                </a:solidFill>
+                <a:latin typeface="Inter"/>
+              </a:rPr>
+              <a:t>Je mag niet in het midden blijven hangen: kies een van de vier plaatsen. En wie gevraagd wordt, verantwoordt zijn plek met «porque».</a:t>
+            </a:r>
+          </a:p>
+        </p:txBody>
+      </p:sp>
+      <p:sp>
+        <p:nvSpPr>
+          <p:cNvPr id="11" name="Tarjeta 0"/>
+          <p:cNvSpPr/>
+          <p:nvPr/>
+        </p:nvSpPr>
+        <p:spPr>
+          <a:xfrm>
+            <a:off x="457200" y="2670048"/>
+            <a:ext cx="2708910" cy="898398"/>
+          </a:xfrm>
+          <a:prstGeom prst="roundRect">
+            <a:avLst>
+              <a:gd name="adj" fmla="val 6000"/>
+            </a:avLst>
+          </a:prstGeom>
+          <a:solidFill>
+            <a:srgbClr val="FFFFFF"/>
+          </a:solidFill>
+          <a:ln w="12700">
+            <a:solidFill>
+              <a:srgbClr val="E4E3DE"/>
+            </a:solidFill>
+          </a:ln>
+          <a:effectLst/>
+        </p:spPr>
+        <p:style>
+          <a:lnRef idx="1">
+            <a:schemeClr val="accent1"/>
+          </a:lnRef>
+          <a:fillRef idx="3">
+            <a:schemeClr val="accent1"/>
+          </a:fillRef>
+          <a:effectRef idx="2">
+            <a:schemeClr val="accent1"/>
+          </a:effectRef>
+          <a:fontRef idx="minor">
+            <a:schemeClr val="lt1"/>
+          </a:fontRef>
+        </p:style>
+        <p:txBody>
+          <a:bodyPr rtlCol="0" anchor="ctr"/>
+          <a:lstStyle/>
+          <a:p/>
+        </p:txBody>
+      </p:sp>
+      <p:sp>
+        <p:nvSpPr>
+          <p:cNvPr id="12" name="TarjetaTxt 0"/>
+          <p:cNvSpPr txBox="1"/>
+          <p:nvPr/>
+        </p:nvSpPr>
+        <p:spPr>
+          <a:xfrm>
+            <a:off x="548640" y="2724912"/>
+            <a:ext cx="2526030" cy="788670"/>
+          </a:xfrm>
+          <a:prstGeom prst="rect">
+            <a:avLst/>
+          </a:prstGeom>
+          <a:noFill/>
+        </p:spPr>
+        <p:txBody>
+          <a:bodyPr wrap="square" anchor="t" lIns="45720" rIns="45720" tIns="27432" bIns="27432">
+            <a:normAutofit/>
+          </a:bodyPr>
+          <a:lstStyle/>
+          <a:p>
+            <a:pPr algn="l"/>
+            <a:r>
+              <a:rPr sz="1100" b="1">
+                <a:solidFill>
+                  <a:srgbClr val="157355"/>
+                </a:solidFill>
+                <a:latin typeface="Bricolage Grotesque"/>
+              </a:rPr>
+              <a:t>Escala</a:t>
+            </a:r>
+          </a:p>
+          <a:p>
+            <a:pPr algn="l"/>
+            <a:r>
+              <a:rPr sz="1000">
+                <a:solidFill>
+                  <a:srgbClr val="20242E"/>
+                </a:solidFill>
+                <a:latin typeface="Inter"/>
+              </a:rPr>
+              <a:t>odio → no me gusta → me gusta → me encanta</a:t>
+            </a:r>
+          </a:p>
+        </p:txBody>
+      </p:sp>
+      <p:sp>
+        <p:nvSpPr>
+          <p:cNvPr id="13" name="Tarjeta 1"/>
+          <p:cNvSpPr/>
+          <p:nvPr/>
+        </p:nvSpPr>
+        <p:spPr>
+          <a:xfrm>
+            <a:off x="3312414" y="2670048"/>
+            <a:ext cx="2708910" cy="898398"/>
+          </a:xfrm>
+          <a:prstGeom prst="roundRect">
+            <a:avLst>
+              <a:gd name="adj" fmla="val 6000"/>
+            </a:avLst>
+          </a:prstGeom>
+          <a:solidFill>
+            <a:srgbClr val="FFFFFF"/>
+          </a:solidFill>
+          <a:ln w="12700">
+            <a:solidFill>
+              <a:srgbClr val="E4E3DE"/>
+            </a:solidFill>
+          </a:ln>
+          <a:effectLst/>
+        </p:spPr>
+        <p:style>
+          <a:lnRef idx="1">
+            <a:schemeClr val="accent1"/>
+          </a:lnRef>
+          <a:fillRef idx="3">
+            <a:schemeClr val="accent1"/>
+          </a:fillRef>
+          <a:effectRef idx="2">
+            <a:schemeClr val="accent1"/>
+          </a:effectRef>
+          <a:fontRef idx="minor">
+            <a:schemeClr val="lt1"/>
+          </a:fontRef>
+        </p:style>
+        <p:txBody>
+          <a:bodyPr rtlCol="0" anchor="ctr"/>
+          <a:lstStyle/>
+          <a:p/>
+        </p:txBody>
+      </p:sp>
+      <p:sp>
+        <p:nvSpPr>
+          <p:cNvPr id="14" name="TarjetaTxt 1"/>
+          <p:cNvSpPr txBox="1"/>
+          <p:nvPr/>
+        </p:nvSpPr>
+        <p:spPr>
+          <a:xfrm>
+            <a:off x="3403854" y="2724912"/>
+            <a:ext cx="2526030" cy="788670"/>
+          </a:xfrm>
+          <a:prstGeom prst="rect">
+            <a:avLst/>
+          </a:prstGeom>
+          <a:noFill/>
+        </p:spPr>
+        <p:txBody>
+          <a:bodyPr wrap="square" anchor="t" lIns="45720" rIns="45720" tIns="27432" bIns="27432">
+            <a:normAutofit/>
+          </a:bodyPr>
+          <a:lstStyle/>
+          <a:p>
+            <a:pPr algn="l"/>
+            <a:r>
+              <a:rPr sz="1100" b="1">
+                <a:solidFill>
+                  <a:srgbClr val="157355"/>
+                </a:solidFill>
+                <a:latin typeface="Bricolage Grotesque"/>
+              </a:rPr>
+              <a:t>tema</a:t>
+            </a:r>
+          </a:p>
+          <a:p>
+            <a:pPr algn="l"/>
+            <a:r>
+              <a:rPr sz="1000">
+                <a:solidFill>
+                  <a:srgbClr val="20242E"/>
+                </a:solidFill>
+                <a:latin typeface="Inter"/>
+              </a:rPr>
+              <a:t>madrugar</a:t>
+            </a:r>
+          </a:p>
+        </p:txBody>
+      </p:sp>
+      <p:sp>
+        <p:nvSpPr>
+          <p:cNvPr id="15" name="Tarjeta 2"/>
+          <p:cNvSpPr/>
+          <p:nvPr/>
+        </p:nvSpPr>
+        <p:spPr>
+          <a:xfrm>
+            <a:off x="6167628" y="2670048"/>
+            <a:ext cx="2708910" cy="898398"/>
+          </a:xfrm>
+          <a:prstGeom prst="roundRect">
+            <a:avLst>
+              <a:gd name="adj" fmla="val 6000"/>
+            </a:avLst>
+          </a:prstGeom>
+          <a:solidFill>
+            <a:srgbClr val="FFFFFF"/>
+          </a:solidFill>
+          <a:ln w="12700">
+            <a:solidFill>
+              <a:srgbClr val="E4E3DE"/>
+            </a:solidFill>
+          </a:ln>
+          <a:effectLst/>
+        </p:spPr>
+        <p:style>
+          <a:lnRef idx="1">
+            <a:schemeClr val="accent1"/>
+          </a:lnRef>
+          <a:fillRef idx="3">
+            <a:schemeClr val="accent1"/>
+          </a:fillRef>
+          <a:effectRef idx="2">
+            <a:schemeClr val="accent1"/>
+          </a:effectRef>
+          <a:fontRef idx="minor">
+            <a:schemeClr val="lt1"/>
+          </a:fontRef>
+        </p:style>
+        <p:txBody>
+          <a:bodyPr rtlCol="0" anchor="ctr"/>
+          <a:lstStyle/>
+          <a:p/>
+        </p:txBody>
+      </p:sp>
+      <p:sp>
+        <p:nvSpPr>
+          <p:cNvPr id="16" name="TarjetaTxt 2"/>
+          <p:cNvSpPr txBox="1"/>
+          <p:nvPr/>
+        </p:nvSpPr>
+        <p:spPr>
+          <a:xfrm>
+            <a:off x="6259068" y="2724912"/>
+            <a:ext cx="2526030" cy="788670"/>
+          </a:xfrm>
+          <a:prstGeom prst="rect">
+            <a:avLst/>
+          </a:prstGeom>
+          <a:noFill/>
+        </p:spPr>
+        <p:txBody>
+          <a:bodyPr wrap="square" anchor="t" lIns="45720" rIns="45720" tIns="27432" bIns="27432">
+            <a:normAutofit/>
+          </a:bodyPr>
+          <a:lstStyle/>
+          <a:p>
+            <a:pPr algn="l"/>
+            <a:r>
+              <a:rPr sz="1100" b="1">
+                <a:solidFill>
+                  <a:srgbClr val="157355"/>
+                </a:solidFill>
+                <a:latin typeface="Bricolage Grotesque"/>
+              </a:rPr>
+              <a:t>tema</a:t>
+            </a:r>
+          </a:p>
+          <a:p>
+            <a:pPr algn="l"/>
+            <a:r>
+              <a:rPr sz="1000">
+                <a:solidFill>
+                  <a:srgbClr val="20242E"/>
+                </a:solidFill>
+                <a:latin typeface="Inter"/>
+              </a:rPr>
+              <a:t>la playa</a:t>
+            </a:r>
+          </a:p>
+        </p:txBody>
+      </p:sp>
+      <p:sp>
+        <p:nvSpPr>
+          <p:cNvPr id="17" name="Tarjeta 3"/>
+          <p:cNvSpPr/>
+          <p:nvPr/>
+        </p:nvSpPr>
+        <p:spPr>
+          <a:xfrm>
+            <a:off x="9022842" y="2670048"/>
+            <a:ext cx="2708910" cy="898398"/>
+          </a:xfrm>
+          <a:prstGeom prst="roundRect">
+            <a:avLst>
+              <a:gd name="adj" fmla="val 6000"/>
+            </a:avLst>
+          </a:prstGeom>
+          <a:solidFill>
+            <a:srgbClr val="FFFFFF"/>
+          </a:solidFill>
+          <a:ln w="12700">
+            <a:solidFill>
+              <a:srgbClr val="E4E3DE"/>
+            </a:solidFill>
+          </a:ln>
+          <a:effectLst/>
+        </p:spPr>
+        <p:style>
+          <a:lnRef idx="1">
+            <a:schemeClr val="accent1"/>
+          </a:lnRef>
+          <a:fillRef idx="3">
+            <a:schemeClr val="accent1"/>
+          </a:fillRef>
+          <a:effectRef idx="2">
+            <a:schemeClr val="accent1"/>
+          </a:effectRef>
+          <a:fontRef idx="minor">
+            <a:schemeClr val="lt1"/>
+          </a:fontRef>
+        </p:style>
+        <p:txBody>
+          <a:bodyPr rtlCol="0" anchor="ctr"/>
+          <a:lstStyle/>
+          <a:p/>
+        </p:txBody>
+      </p:sp>
+      <p:sp>
+        <p:nvSpPr>
+          <p:cNvPr id="18" name="TarjetaTxt 3"/>
+          <p:cNvSpPr txBox="1"/>
+          <p:nvPr/>
+        </p:nvSpPr>
+        <p:spPr>
+          <a:xfrm>
+            <a:off x="9114282" y="2724912"/>
+            <a:ext cx="2526030" cy="788670"/>
+          </a:xfrm>
+          <a:prstGeom prst="rect">
+            <a:avLst/>
+          </a:prstGeom>
+          <a:noFill/>
+        </p:spPr>
+        <p:txBody>
+          <a:bodyPr wrap="square" anchor="t" lIns="45720" rIns="45720" tIns="27432" bIns="27432">
+            <a:normAutofit/>
+          </a:bodyPr>
+          <a:lstStyle/>
+          <a:p>
+            <a:pPr algn="l"/>
+            <a:r>
+              <a:rPr sz="1100" b="1">
+                <a:solidFill>
+                  <a:srgbClr val="157355"/>
+                </a:solidFill>
+                <a:latin typeface="Bricolage Grotesque"/>
+              </a:rPr>
+              <a:t>tema</a:t>
+            </a:r>
+          </a:p>
+          <a:p>
+            <a:pPr algn="l"/>
+            <a:r>
+              <a:rPr sz="1000">
+                <a:solidFill>
+                  <a:srgbClr val="20242E"/>
+                </a:solidFill>
+                <a:latin typeface="Inter"/>
+              </a:rPr>
+              <a:t>el reguetón</a:t>
+            </a:r>
+          </a:p>
+        </p:txBody>
+      </p:sp>
+      <p:sp>
+        <p:nvSpPr>
+          <p:cNvPr id="19" name="Tarjeta 4"/>
+          <p:cNvSpPr/>
+          <p:nvPr/>
+        </p:nvSpPr>
+        <p:spPr>
+          <a:xfrm>
+            <a:off x="457200" y="3696462"/>
+            <a:ext cx="2708910" cy="898398"/>
+          </a:xfrm>
+          <a:prstGeom prst="roundRect">
+            <a:avLst>
+              <a:gd name="adj" fmla="val 6000"/>
+            </a:avLst>
+          </a:prstGeom>
+          <a:solidFill>
+            <a:srgbClr val="FFFFFF"/>
+          </a:solidFill>
+          <a:ln w="12700">
+            <a:solidFill>
+              <a:srgbClr val="E4E3DE"/>
+            </a:solidFill>
+          </a:ln>
+          <a:effectLst/>
+        </p:spPr>
+        <p:style>
+          <a:lnRef idx="1">
+            <a:schemeClr val="accent1"/>
+          </a:lnRef>
+          <a:fillRef idx="3">
+            <a:schemeClr val="accent1"/>
+          </a:fillRef>
+          <a:effectRef idx="2">
+            <a:schemeClr val="accent1"/>
+          </a:effectRef>
+          <a:fontRef idx="minor">
+            <a:schemeClr val="lt1"/>
+          </a:fontRef>
+        </p:style>
+        <p:txBody>
+          <a:bodyPr rtlCol="0" anchor="ctr"/>
+          <a:lstStyle/>
+          <a:p/>
+        </p:txBody>
+      </p:sp>
+      <p:sp>
+        <p:nvSpPr>
+          <p:cNvPr id="20" name="TarjetaTxt 4"/>
+          <p:cNvSpPr txBox="1"/>
+          <p:nvPr/>
+        </p:nvSpPr>
+        <p:spPr>
+          <a:xfrm>
+            <a:off x="548640" y="3751326"/>
+            <a:ext cx="2526030" cy="788670"/>
+          </a:xfrm>
+          <a:prstGeom prst="rect">
+            <a:avLst/>
+          </a:prstGeom>
+          <a:noFill/>
+        </p:spPr>
+        <p:txBody>
+          <a:bodyPr wrap="square" anchor="t" lIns="45720" rIns="45720" tIns="27432" bIns="27432">
+            <a:normAutofit/>
+          </a:bodyPr>
+          <a:lstStyle/>
+          <a:p>
+            <a:pPr algn="l"/>
+            <a:r>
+              <a:rPr sz="1100" b="1">
+                <a:solidFill>
+                  <a:srgbClr val="157355"/>
+                </a:solidFill>
+                <a:latin typeface="Bricolage Grotesque"/>
+              </a:rPr>
+              <a:t>tema</a:t>
+            </a:r>
+          </a:p>
+          <a:p>
+            <a:pPr algn="l"/>
+            <a:r>
+              <a:rPr sz="1000">
+                <a:solidFill>
+                  <a:srgbClr val="20242E"/>
+                </a:solidFill>
+                <a:latin typeface="Inter"/>
+              </a:rPr>
+              <a:t>cocinar</a:t>
+            </a:r>
+          </a:p>
+        </p:txBody>
+      </p:sp>
+      <p:sp>
+        <p:nvSpPr>
+          <p:cNvPr id="21" name="Tarjeta 5"/>
+          <p:cNvSpPr/>
+          <p:nvPr/>
+        </p:nvSpPr>
+        <p:spPr>
+          <a:xfrm>
+            <a:off x="3312414" y="3696462"/>
+            <a:ext cx="2708910" cy="898398"/>
+          </a:xfrm>
+          <a:prstGeom prst="roundRect">
+            <a:avLst>
+              <a:gd name="adj" fmla="val 6000"/>
+            </a:avLst>
+          </a:prstGeom>
+          <a:solidFill>
+            <a:srgbClr val="FFFFFF"/>
+          </a:solidFill>
+          <a:ln w="12700">
+            <a:solidFill>
+              <a:srgbClr val="E4E3DE"/>
+            </a:solidFill>
+          </a:ln>
+          <a:effectLst/>
+        </p:spPr>
+        <p:style>
+          <a:lnRef idx="1">
+            <a:schemeClr val="accent1"/>
+          </a:lnRef>
+          <a:fillRef idx="3">
+            <a:schemeClr val="accent1"/>
+          </a:fillRef>
+          <a:effectRef idx="2">
+            <a:schemeClr val="accent1"/>
+          </a:effectRef>
+          <a:fontRef idx="minor">
+            <a:schemeClr val="lt1"/>
+          </a:fontRef>
+        </p:style>
+        <p:txBody>
+          <a:bodyPr rtlCol="0" anchor="ctr"/>
+          <a:lstStyle/>
+          <a:p/>
+        </p:txBody>
+      </p:sp>
+      <p:sp>
+        <p:nvSpPr>
+          <p:cNvPr id="22" name="TarjetaTxt 5"/>
+          <p:cNvSpPr txBox="1"/>
+          <p:nvPr/>
+        </p:nvSpPr>
+        <p:spPr>
+          <a:xfrm>
+            <a:off x="3403854" y="3751326"/>
+            <a:ext cx="2526030" cy="788670"/>
+          </a:xfrm>
+          <a:prstGeom prst="rect">
+            <a:avLst/>
+          </a:prstGeom>
+          <a:noFill/>
+        </p:spPr>
+        <p:txBody>
+          <a:bodyPr wrap="square" anchor="t" lIns="45720" rIns="45720" tIns="27432" bIns="27432">
+            <a:normAutofit/>
+          </a:bodyPr>
+          <a:lstStyle/>
+          <a:p>
+            <a:pPr algn="l"/>
+            <a:r>
+              <a:rPr sz="1100" b="1">
+                <a:solidFill>
+                  <a:srgbClr val="157355"/>
+                </a:solidFill>
+                <a:latin typeface="Bricolage Grotesque"/>
+              </a:rPr>
+              <a:t>tema</a:t>
+            </a:r>
+          </a:p>
+          <a:p>
+            <a:pPr algn="l"/>
+            <a:r>
+              <a:rPr sz="1000">
+                <a:solidFill>
+                  <a:srgbClr val="20242E"/>
+                </a:solidFill>
+                <a:latin typeface="Inter"/>
+              </a:rPr>
+              <a:t>los lunes</a:t>
+            </a:r>
+          </a:p>
+        </p:txBody>
+      </p:sp>
+      <p:sp>
+        <p:nvSpPr>
+          <p:cNvPr id="23" name="Tarjeta 6"/>
+          <p:cNvSpPr/>
+          <p:nvPr/>
+        </p:nvSpPr>
+        <p:spPr>
+          <a:xfrm>
+            <a:off x="6167628" y="3696462"/>
+            <a:ext cx="2708910" cy="898398"/>
+          </a:xfrm>
+          <a:prstGeom prst="roundRect">
+            <a:avLst>
+              <a:gd name="adj" fmla="val 6000"/>
+            </a:avLst>
+          </a:prstGeom>
+          <a:solidFill>
+            <a:srgbClr val="FFFFFF"/>
+          </a:solidFill>
+          <a:ln w="12700">
+            <a:solidFill>
+              <a:srgbClr val="E4E3DE"/>
+            </a:solidFill>
+          </a:ln>
+          <a:effectLst/>
+        </p:spPr>
+        <p:style>
+          <a:lnRef idx="1">
+            <a:schemeClr val="accent1"/>
+          </a:lnRef>
+          <a:fillRef idx="3">
+            <a:schemeClr val="accent1"/>
+          </a:fillRef>
+          <a:effectRef idx="2">
+            <a:schemeClr val="accent1"/>
+          </a:effectRef>
+          <a:fontRef idx="minor">
+            <a:schemeClr val="lt1"/>
+          </a:fontRef>
+        </p:style>
+        <p:txBody>
+          <a:bodyPr rtlCol="0" anchor="ctr"/>
+          <a:lstStyle/>
+          <a:p/>
+        </p:txBody>
+      </p:sp>
+      <p:sp>
+        <p:nvSpPr>
+          <p:cNvPr id="24" name="TarjetaTxt 6"/>
+          <p:cNvSpPr txBox="1"/>
+          <p:nvPr/>
+        </p:nvSpPr>
+        <p:spPr>
+          <a:xfrm>
+            <a:off x="6259068" y="3751326"/>
+            <a:ext cx="2526030" cy="788670"/>
+          </a:xfrm>
+          <a:prstGeom prst="rect">
+            <a:avLst/>
+          </a:prstGeom>
+          <a:noFill/>
+        </p:spPr>
+        <p:txBody>
+          <a:bodyPr wrap="square" anchor="t" lIns="45720" rIns="45720" tIns="27432" bIns="27432">
+            <a:normAutofit/>
+          </a:bodyPr>
+          <a:lstStyle/>
+          <a:p>
+            <a:pPr algn="l"/>
+            <a:r>
+              <a:rPr sz="1100" b="1">
+                <a:solidFill>
+                  <a:srgbClr val="157355"/>
+                </a:solidFill>
+                <a:latin typeface="Bricolage Grotesque"/>
+              </a:rPr>
+              <a:t>tema</a:t>
+            </a:r>
+          </a:p>
+          <a:p>
+            <a:pPr algn="l"/>
+            <a:r>
+              <a:rPr sz="1000">
+                <a:solidFill>
+                  <a:srgbClr val="20242E"/>
+                </a:solidFill>
+                <a:latin typeface="Inter"/>
+              </a:rPr>
+              <a:t>los viajes en tren</a:t>
+            </a:r>
+          </a:p>
+        </p:txBody>
+      </p:sp>
+      <p:sp>
+        <p:nvSpPr>
+          <p:cNvPr id="25" name="Tarjeta 7"/>
+          <p:cNvSpPr/>
+          <p:nvPr/>
+        </p:nvSpPr>
+        <p:spPr>
+          <a:xfrm>
+            <a:off x="9022842" y="3696462"/>
+            <a:ext cx="2708910" cy="898398"/>
+          </a:xfrm>
+          <a:prstGeom prst="roundRect">
+            <a:avLst>
+              <a:gd name="adj" fmla="val 6000"/>
+            </a:avLst>
+          </a:prstGeom>
+          <a:solidFill>
+            <a:srgbClr val="FFFFFF"/>
+          </a:solidFill>
+          <a:ln w="12700">
+            <a:solidFill>
+              <a:srgbClr val="E4E3DE"/>
+            </a:solidFill>
+          </a:ln>
+          <a:effectLst/>
+        </p:spPr>
+        <p:style>
+          <a:lnRef idx="1">
+            <a:schemeClr val="accent1"/>
+          </a:lnRef>
+          <a:fillRef idx="3">
+            <a:schemeClr val="accent1"/>
+          </a:fillRef>
+          <a:effectRef idx="2">
+            <a:schemeClr val="accent1"/>
+          </a:effectRef>
+          <a:fontRef idx="minor">
+            <a:schemeClr val="lt1"/>
+          </a:fontRef>
+        </p:style>
+        <p:txBody>
+          <a:bodyPr rtlCol="0" anchor="ctr"/>
+          <a:lstStyle/>
+          <a:p/>
+        </p:txBody>
+      </p:sp>
+      <p:sp>
+        <p:nvSpPr>
+          <p:cNvPr id="26" name="TarjetaTxt 7"/>
+          <p:cNvSpPr txBox="1"/>
+          <p:nvPr/>
+        </p:nvSpPr>
+        <p:spPr>
+          <a:xfrm>
+            <a:off x="9114282" y="3751326"/>
+            <a:ext cx="2526030" cy="788670"/>
+          </a:xfrm>
+          <a:prstGeom prst="rect">
+            <a:avLst/>
+          </a:prstGeom>
+          <a:noFill/>
+        </p:spPr>
+        <p:txBody>
+          <a:bodyPr wrap="square" anchor="t" lIns="45720" rIns="45720" tIns="27432" bIns="27432">
+            <a:normAutofit/>
+          </a:bodyPr>
+          <a:lstStyle/>
+          <a:p>
+            <a:pPr algn="l"/>
+            <a:r>
+              <a:rPr sz="1100" b="1">
+                <a:solidFill>
+                  <a:srgbClr val="157355"/>
+                </a:solidFill>
+                <a:latin typeface="Bricolage Grotesque"/>
+              </a:rPr>
+              <a:t>tema</a:t>
+            </a:r>
+          </a:p>
+          <a:p>
+            <a:pPr algn="l"/>
+            <a:r>
+              <a:rPr sz="1000">
+                <a:solidFill>
+                  <a:srgbClr val="20242E"/>
+                </a:solidFill>
+                <a:latin typeface="Inter"/>
+              </a:rPr>
+              <a:t>hablar en público</a:t>
+            </a:r>
+          </a:p>
+        </p:txBody>
+      </p:sp>
+      <p:sp>
+        <p:nvSpPr>
+          <p:cNvPr id="27" name="Tarjeta 8"/>
+          <p:cNvSpPr/>
+          <p:nvPr/>
+        </p:nvSpPr>
+        <p:spPr>
+          <a:xfrm>
+            <a:off x="457200" y="4722876"/>
+            <a:ext cx="2708910" cy="898398"/>
+          </a:xfrm>
+          <a:prstGeom prst="roundRect">
+            <a:avLst>
+              <a:gd name="adj" fmla="val 6000"/>
+            </a:avLst>
+          </a:prstGeom>
+          <a:solidFill>
+            <a:srgbClr val="FFFFFF"/>
+          </a:solidFill>
+          <a:ln w="12700">
+            <a:solidFill>
+              <a:srgbClr val="E4E3DE"/>
+            </a:solidFill>
+          </a:ln>
+          <a:effectLst/>
+        </p:spPr>
+        <p:style>
+          <a:lnRef idx="1">
+            <a:schemeClr val="accent1"/>
+          </a:lnRef>
+          <a:fillRef idx="3">
+            <a:schemeClr val="accent1"/>
+          </a:fillRef>
+          <a:effectRef idx="2">
+            <a:schemeClr val="accent1"/>
+          </a:effectRef>
+          <a:fontRef idx="minor">
+            <a:schemeClr val="lt1"/>
+          </a:fontRef>
+        </p:style>
+        <p:txBody>
+          <a:bodyPr rtlCol="0" anchor="ctr"/>
+          <a:lstStyle/>
+          <a:p/>
+        </p:txBody>
+      </p:sp>
+      <p:sp>
+        <p:nvSpPr>
+          <p:cNvPr id="28" name="TarjetaTxt 8"/>
+          <p:cNvSpPr txBox="1"/>
+          <p:nvPr/>
+        </p:nvSpPr>
+        <p:spPr>
+          <a:xfrm>
+            <a:off x="548640" y="4777740"/>
+            <a:ext cx="2526030" cy="788670"/>
+          </a:xfrm>
+          <a:prstGeom prst="rect">
+            <a:avLst/>
+          </a:prstGeom>
+          <a:noFill/>
+        </p:spPr>
+        <p:txBody>
+          <a:bodyPr wrap="square" anchor="t" lIns="45720" rIns="45720" tIns="27432" bIns="27432">
+            <a:normAutofit/>
+          </a:bodyPr>
+          <a:lstStyle/>
+          <a:p>
+            <a:pPr algn="l"/>
+            <a:r>
+              <a:rPr sz="1100" b="1">
+                <a:solidFill>
+                  <a:srgbClr val="157355"/>
+                </a:solidFill>
+                <a:latin typeface="Bricolage Grotesque"/>
+              </a:rPr>
+              <a:t>tema</a:t>
+            </a:r>
+          </a:p>
+          <a:p>
+            <a:pPr algn="l"/>
+            <a:r>
+              <a:rPr sz="1000">
+                <a:solidFill>
+                  <a:srgbClr val="20242E"/>
+                </a:solidFill>
+                <a:latin typeface="Inter"/>
+              </a:rPr>
+              <a:t>el chocolate negro</a:t>
+            </a:r>
+          </a:p>
+        </p:txBody>
+      </p:sp>
+      <p:sp>
+        <p:nvSpPr>
+          <p:cNvPr id="29" name="Tarjeta 9"/>
+          <p:cNvSpPr/>
+          <p:nvPr/>
+        </p:nvSpPr>
+        <p:spPr>
+          <a:xfrm>
+            <a:off x="3312414" y="4722876"/>
+            <a:ext cx="2708910" cy="898398"/>
+          </a:xfrm>
+          <a:prstGeom prst="roundRect">
+            <a:avLst>
+              <a:gd name="adj" fmla="val 6000"/>
+            </a:avLst>
+          </a:prstGeom>
+          <a:solidFill>
+            <a:srgbClr val="FFFFFF"/>
+          </a:solidFill>
+          <a:ln w="12700">
+            <a:solidFill>
+              <a:srgbClr val="E4E3DE"/>
+            </a:solidFill>
+          </a:ln>
+          <a:effectLst/>
+        </p:spPr>
+        <p:style>
+          <a:lnRef idx="1">
+            <a:schemeClr val="accent1"/>
+          </a:lnRef>
+          <a:fillRef idx="3">
+            <a:schemeClr val="accent1"/>
+          </a:fillRef>
+          <a:effectRef idx="2">
+            <a:schemeClr val="accent1"/>
+          </a:effectRef>
+          <a:fontRef idx="minor">
+            <a:schemeClr val="lt1"/>
+          </a:fontRef>
+        </p:style>
+        <p:txBody>
+          <a:bodyPr rtlCol="0" anchor="ctr"/>
+          <a:lstStyle/>
+          <a:p/>
+        </p:txBody>
+      </p:sp>
+      <p:sp>
+        <p:nvSpPr>
+          <p:cNvPr id="30" name="TarjetaTxt 9"/>
+          <p:cNvSpPr txBox="1"/>
+          <p:nvPr/>
+        </p:nvSpPr>
+        <p:spPr>
+          <a:xfrm>
+            <a:off x="3403854" y="4777740"/>
+            <a:ext cx="2526030" cy="788670"/>
+          </a:xfrm>
+          <a:prstGeom prst="rect">
+            <a:avLst/>
+          </a:prstGeom>
+          <a:noFill/>
+        </p:spPr>
+        <p:txBody>
+          <a:bodyPr wrap="square" anchor="t" lIns="45720" rIns="45720" tIns="27432" bIns="27432">
+            <a:normAutofit/>
+          </a:bodyPr>
+          <a:lstStyle/>
+          <a:p>
+            <a:pPr algn="l"/>
+            <a:r>
+              <a:rPr sz="1100" b="1">
+                <a:solidFill>
+                  <a:srgbClr val="157355"/>
+                </a:solidFill>
+                <a:latin typeface="Bricolage Grotesque"/>
+              </a:rPr>
+              <a:t>marco</a:t>
+            </a:r>
+          </a:p>
+          <a:p>
+            <a:pPr algn="l"/>
+            <a:r>
+              <a:rPr sz="1000">
+                <a:solidFill>
+                  <a:srgbClr val="20242E"/>
+                </a:solidFill>
+                <a:latin typeface="Inter"/>
+              </a:rPr>
+              <a:t>Estoy aquí porque …</a:t>
+            </a:r>
+          </a:p>
+        </p:txBody>
+      </p:sp>
+      <p:sp>
+        <p:nvSpPr>
+          <p:cNvPr id="31" name="Tarjeta 10"/>
+          <p:cNvSpPr/>
+          <p:nvPr/>
+        </p:nvSpPr>
+        <p:spPr>
+          <a:xfrm>
+            <a:off x="6167628" y="4722876"/>
+            <a:ext cx="2708910" cy="898398"/>
+          </a:xfrm>
+          <a:prstGeom prst="roundRect">
+            <a:avLst>
+              <a:gd name="adj" fmla="val 6000"/>
+            </a:avLst>
+          </a:prstGeom>
+          <a:solidFill>
+            <a:srgbClr val="FFFFFF"/>
+          </a:solidFill>
+          <a:ln w="12700">
+            <a:solidFill>
+              <a:srgbClr val="E4E3DE"/>
+            </a:solidFill>
+          </a:ln>
+          <a:effectLst/>
+        </p:spPr>
+        <p:style>
+          <a:lnRef idx="1">
+            <a:schemeClr val="accent1"/>
+          </a:lnRef>
+          <a:fillRef idx="3">
+            <a:schemeClr val="accent1"/>
+          </a:fillRef>
+          <a:effectRef idx="2">
+            <a:schemeClr val="accent1"/>
+          </a:effectRef>
+          <a:fontRef idx="minor">
+            <a:schemeClr val="lt1"/>
+          </a:fontRef>
+        </p:style>
+        <p:txBody>
+          <a:bodyPr rtlCol="0" anchor="ctr"/>
+          <a:lstStyle/>
+          <a:p/>
+        </p:txBody>
+      </p:sp>
+      <p:sp>
+        <p:nvSpPr>
+          <p:cNvPr id="32" name="TarjetaTxt 10"/>
+          <p:cNvSpPr txBox="1"/>
+          <p:nvPr/>
+        </p:nvSpPr>
+        <p:spPr>
+          <a:xfrm>
+            <a:off x="6259068" y="4777740"/>
+            <a:ext cx="2526030" cy="788670"/>
+          </a:xfrm>
+          <a:prstGeom prst="rect">
+            <a:avLst/>
+          </a:prstGeom>
+          <a:noFill/>
+        </p:spPr>
+        <p:txBody>
+          <a:bodyPr wrap="square" anchor="t" lIns="45720" rIns="45720" tIns="27432" bIns="27432">
+            <a:normAutofit/>
+          </a:bodyPr>
+          <a:lstStyle/>
+          <a:p>
+            <a:pPr algn="l"/>
+            <a:r>
+              <a:rPr sz="1100" b="1">
+                <a:solidFill>
+                  <a:srgbClr val="157355"/>
+                </a:solidFill>
+                <a:latin typeface="Bricolage Grotesque"/>
+              </a:rPr>
+              <a:t>marco</a:t>
+            </a:r>
+          </a:p>
+          <a:p>
+            <a:pPr algn="l"/>
+            <a:r>
+              <a:rPr sz="1000">
+                <a:solidFill>
+                  <a:srgbClr val="20242E"/>
+                </a:solidFill>
+                <a:latin typeface="Inter"/>
+              </a:rPr>
+              <a:t>A … personas les encanta …</a:t>
+            </a:r>
+          </a:p>
+        </p:txBody>
+      </p:sp>
+      <p:sp>
+        <p:nvSpPr>
+          <p:cNvPr id="33" name="Tarjeta 11"/>
+          <p:cNvSpPr/>
+          <p:nvPr/>
+        </p:nvSpPr>
+        <p:spPr>
+          <a:xfrm>
+            <a:off x="9022842" y="4722876"/>
+            <a:ext cx="2708910" cy="898398"/>
+          </a:xfrm>
+          <a:prstGeom prst="roundRect">
+            <a:avLst>
+              <a:gd name="adj" fmla="val 6000"/>
+            </a:avLst>
+          </a:prstGeom>
+          <a:solidFill>
+            <a:srgbClr val="FFFFFF"/>
+          </a:solidFill>
+          <a:ln w="12700">
+            <a:solidFill>
+              <a:srgbClr val="E4E3DE"/>
+            </a:solidFill>
+          </a:ln>
+          <a:effectLst/>
+        </p:spPr>
+        <p:style>
+          <a:lnRef idx="1">
+            <a:schemeClr val="accent1"/>
+          </a:lnRef>
+          <a:fillRef idx="3">
+            <a:schemeClr val="accent1"/>
+          </a:fillRef>
+          <a:effectRef idx="2">
+            <a:schemeClr val="accent1"/>
+          </a:effectRef>
+          <a:fontRef idx="minor">
+            <a:schemeClr val="lt1"/>
+          </a:fontRef>
+        </p:style>
+        <p:txBody>
+          <a:bodyPr rtlCol="0" anchor="ctr"/>
+          <a:lstStyle/>
+          <a:p/>
+        </p:txBody>
+      </p:sp>
+      <p:sp>
+        <p:nvSpPr>
+          <p:cNvPr id="34" name="TarjetaTxt 11"/>
+          <p:cNvSpPr txBox="1"/>
+          <p:nvPr/>
+        </p:nvSpPr>
+        <p:spPr>
+          <a:xfrm>
+            <a:off x="9114282" y="4777740"/>
+            <a:ext cx="2526030" cy="788670"/>
+          </a:xfrm>
+          <a:prstGeom prst="rect">
+            <a:avLst/>
+          </a:prstGeom>
+          <a:noFill/>
+        </p:spPr>
+        <p:txBody>
+          <a:bodyPr wrap="square" anchor="t" lIns="45720" rIns="45720" tIns="27432" bIns="27432">
+            <a:normAutofit/>
+          </a:bodyPr>
+          <a:lstStyle/>
+          <a:p>
+            <a:pPr algn="l"/>
+            <a:r>
+              <a:rPr sz="1100" b="1">
+                <a:solidFill>
+                  <a:srgbClr val="157355"/>
+                </a:solidFill>
+                <a:latin typeface="Bricolage Grotesque"/>
+              </a:rPr>
+              <a:t>marco</a:t>
+            </a:r>
+          </a:p>
+          <a:p>
+            <a:pPr algn="l"/>
+            <a:r>
+              <a:rPr sz="1000">
+                <a:solidFill>
+                  <a:srgbClr val="20242E"/>
+                </a:solidFill>
+                <a:latin typeface="Inter"/>
+              </a:rPr>
+              <a:t>A nadie le gusta …</a:t>
+            </a:r>
+          </a:p>
+        </p:txBody>
+      </p:sp>
+      <p:sp>
+        <p:nvSpPr>
+          <p:cNvPr id="35" name="Tarjeta 12"/>
+          <p:cNvSpPr/>
+          <p:nvPr/>
+        </p:nvSpPr>
+        <p:spPr>
+          <a:xfrm>
+            <a:off x="457200" y="5749290"/>
+            <a:ext cx="2708910" cy="898398"/>
+          </a:xfrm>
+          <a:prstGeom prst="roundRect">
+            <a:avLst>
+              <a:gd name="adj" fmla="val 6000"/>
+            </a:avLst>
+          </a:prstGeom>
+          <a:solidFill>
+            <a:srgbClr val="FFFFFF"/>
+          </a:solidFill>
+          <a:ln w="12700">
+            <a:solidFill>
+              <a:srgbClr val="E4E3DE"/>
+            </a:solidFill>
+          </a:ln>
+          <a:effectLst/>
+        </p:spPr>
+        <p:style>
+          <a:lnRef idx="1">
+            <a:schemeClr val="accent1"/>
+          </a:lnRef>
+          <a:fillRef idx="3">
+            <a:schemeClr val="accent1"/>
+          </a:fillRef>
+          <a:effectRef idx="2">
+            <a:schemeClr val="accent1"/>
+          </a:effectRef>
+          <a:fontRef idx="minor">
+            <a:schemeClr val="lt1"/>
+          </a:fontRef>
+        </p:style>
+        <p:txBody>
+          <a:bodyPr rtlCol="0" anchor="ctr"/>
+          <a:lstStyle/>
+          <a:p/>
+        </p:txBody>
+      </p:sp>
+      <p:sp>
+        <p:nvSpPr>
+          <p:cNvPr id="36" name="TarjetaTxt 12"/>
+          <p:cNvSpPr txBox="1"/>
+          <p:nvPr/>
+        </p:nvSpPr>
+        <p:spPr>
+          <a:xfrm>
+            <a:off x="548640" y="5804154"/>
+            <a:ext cx="2526030" cy="788670"/>
+          </a:xfrm>
+          <a:prstGeom prst="rect">
+            <a:avLst/>
+          </a:prstGeom>
+          <a:noFill/>
+        </p:spPr>
+        <p:txBody>
+          <a:bodyPr wrap="square" anchor="t" lIns="45720" rIns="45720" tIns="27432" bIns="27432">
+            <a:normAutofit/>
+          </a:bodyPr>
+          <a:lstStyle/>
+          <a:p>
+            <a:pPr algn="l"/>
+            <a:r>
+              <a:rPr sz="1100" b="1">
+                <a:solidFill>
+                  <a:srgbClr val="157355"/>
+                </a:solidFill>
+                <a:latin typeface="Bricolage Grotesque"/>
+              </a:rPr>
+              <a:t>marco</a:t>
+            </a:r>
+          </a:p>
+          <a:p>
+            <a:pPr algn="l"/>
+            <a:r>
+              <a:rPr sz="1000">
+                <a:solidFill>
+                  <a:srgbClr val="20242E"/>
+                </a:solidFill>
+                <a:latin typeface="Inter"/>
+              </a:rPr>
+              <a:t>Casi todos …</a:t>
+            </a:r>
+          </a:p>
+        </p:txBody>
+      </p:sp>
+    </p:spTree>
+  </p:cSld>
+  <p:clrMapOvr>
+    <a:masterClrMapping/>
+  </p:clrMapOvr>
+</p:sld>
+</file>
+
+<file path=ppt/slides/slide23.xml><?xml version="1.0" encoding="utf-8"?>
+<p:sld xmlns:a="http://schemas.openxmlformats.org/drawingml/2006/main" xmlns:p="http://schemas.openxmlformats.org/presentationml/2006/main" xmlns:r="http://schemas.openxmlformats.org/officeDocument/2006/relationships">
+  <p:cSld>
+    <p:spTree>
+      <p:nvGrpSpPr>
+        <p:cNvPr id="1" name=""/>
+        <p:cNvGrpSpPr/>
+        <p:nvPr/>
+      </p:nvGrpSpPr>
+      <p:grpSpPr/>
+      <p:sp>
+        <p:nvSpPr>
+          <p:cNvPr id="2" name="Fondo"/>
+          <p:cNvSpPr/>
+          <p:nvPr/>
+        </p:nvSpPr>
+        <p:spPr>
+          <a:xfrm>
+            <a:off x="0" y="0"/>
+            <a:ext cx="12191695" cy="6858000"/>
+          </a:xfrm>
+          <a:prstGeom prst="rect">
+            <a:avLst/>
+          </a:prstGeom>
+          <a:solidFill>
+            <a:srgbClr val="FCFBF8"/>
+          </a:solidFill>
+          <a:ln>
+            <a:noFill/>
+          </a:ln>
+          <a:effectLst/>
+        </p:spPr>
+        <p:style>
+          <a:lnRef idx="1">
+            <a:schemeClr val="accent1"/>
+          </a:lnRef>
+          <a:fillRef idx="3">
+            <a:schemeClr val="accent1"/>
+          </a:fillRef>
+          <a:effectRef idx="2">
+            <a:schemeClr val="accent1"/>
+          </a:effectRef>
+          <a:fontRef idx="minor">
+            <a:schemeClr val="lt1"/>
+          </a:fontRef>
+        </p:style>
+        <p:txBody>
+          <a:bodyPr rtlCol="0" anchor="ctr"/>
+          <a:lstStyle/>
+          <a:p/>
+        </p:txBody>
+      </p:sp>
+      <p:sp>
+        <p:nvSpPr>
+          <p:cNvPr id="3" name="Cabecera"/>
+          <p:cNvSpPr/>
+          <p:nvPr/>
+        </p:nvSpPr>
+        <p:spPr>
+          <a:xfrm>
+            <a:off x="0" y="0"/>
+            <a:ext cx="12191695" cy="1078992"/>
+          </a:xfrm>
+          <a:prstGeom prst="rect">
+            <a:avLst/>
+          </a:prstGeom>
+          <a:solidFill>
+            <a:srgbClr val="1E9E74"/>
+          </a:solidFill>
+          <a:ln>
+            <a:noFill/>
+          </a:ln>
+          <a:effectLst/>
+        </p:spPr>
+        <p:style>
+          <a:lnRef idx="1">
+            <a:schemeClr val="accent1"/>
+          </a:lnRef>
+          <a:fillRef idx="3">
+            <a:schemeClr val="accent1"/>
+          </a:fillRef>
+          <a:effectRef idx="2">
+            <a:schemeClr val="accent1"/>
+          </a:effectRef>
+          <a:fontRef idx="minor">
+            <a:schemeClr val="lt1"/>
+          </a:fontRef>
+        </p:style>
+        <p:txBody>
+          <a:bodyPr rtlCol="0" anchor="ctr"/>
+          <a:lstStyle/>
+          <a:p/>
+        </p:txBody>
+      </p:sp>
+      <p:sp>
+        <p:nvSpPr>
+          <p:cNvPr id="4" name="Chip"/>
+          <p:cNvSpPr/>
+          <p:nvPr/>
+        </p:nvSpPr>
+        <p:spPr>
+          <a:xfrm>
+            <a:off x="457200" y="182880"/>
+            <a:ext cx="3017520" cy="292608"/>
+          </a:xfrm>
+          <a:prstGeom prst="roundRect">
+            <a:avLst>
+              <a:gd name="adj" fmla="val 50000"/>
+            </a:avLst>
+          </a:prstGeom>
+          <a:solidFill>
+            <a:srgbClr val="FFFFFF"/>
+          </a:solidFill>
+          <a:ln>
+            <a:noFill/>
+          </a:ln>
+          <a:effectLst/>
+        </p:spPr>
+        <p:style>
+          <a:lnRef idx="1">
+            <a:schemeClr val="accent1"/>
+          </a:lnRef>
+          <a:fillRef idx="3">
+            <a:schemeClr val="accent1"/>
+          </a:fillRef>
+          <a:effectRef idx="2">
+            <a:schemeClr val="accent1"/>
+          </a:effectRef>
+          <a:fontRef idx="minor">
+            <a:schemeClr val="lt1"/>
+          </a:fontRef>
+        </p:style>
+        <p:txBody>
+          <a:bodyPr rtlCol="0" anchor="ctr"/>
+          <a:lstStyle/>
+          <a:p/>
+        </p:txBody>
+      </p:sp>
+      <p:sp>
+        <p:nvSpPr>
+          <p:cNvPr id="5" name="ChipTxt"/>
+          <p:cNvSpPr txBox="1"/>
+          <p:nvPr/>
+        </p:nvSpPr>
+        <p:spPr>
+          <a:xfrm>
+            <a:off x="457200" y="173736"/>
+            <a:ext cx="3017520" cy="310896"/>
+          </a:xfrm>
+          <a:prstGeom prst="rect">
+            <a:avLst/>
+          </a:prstGeom>
+          <a:noFill/>
+        </p:spPr>
+        <p:txBody>
+          <a:bodyPr wrap="square" anchor="ctr" lIns="45720" rIns="45720" tIns="27432" bIns="27432">
+            <a:normAutofit/>
+          </a:bodyPr>
+          <a:lstStyle/>
+          <a:p>
+            <a:pPr algn="ctr"/>
+            <a:r>
+              <a:rPr sz="950" b="1">
+                <a:solidFill>
+                  <a:srgbClr val="157355"/>
+                </a:solidFill>
+                <a:latin typeface="Inter"/>
+              </a:rPr>
+              <a:t>RETO 3 · MEDIAFORMAT</a:t>
+            </a:r>
+          </a:p>
+        </p:txBody>
+      </p:sp>
+      <p:sp>
+        <p:nvSpPr>
+          <p:cNvPr id="6" name="Titulo"/>
+          <p:cNvSpPr txBox="1"/>
+          <p:nvPr/>
+        </p:nvSpPr>
+        <p:spPr>
+          <a:xfrm>
+            <a:off x="457200" y="502920"/>
+            <a:ext cx="8412480" cy="475488"/>
+          </a:xfrm>
+          <a:prstGeom prst="rect">
+            <a:avLst/>
+          </a:prstGeom>
+          <a:noFill/>
+        </p:spPr>
+        <p:txBody>
+          <a:bodyPr wrap="square" anchor="t" lIns="45720" rIns="45720" tIns="27432" bIns="27432">
+            <a:normAutofit/>
+          </a:bodyPr>
+          <a:lstStyle/>
+          <a:p>
+            <a:pPr algn="l"/>
+            <a:r>
+              <a:rPr sz="2700" b="1">
+                <a:solidFill>
+                  <a:srgbClr val="FFFFFF"/>
+                </a:solidFill>
+                <a:latin typeface="Bricolage Grotesque"/>
+              </a:rPr>
+              <a:t>Radio Valencia: la llamada</a:t>
+            </a:r>
+          </a:p>
+        </p:txBody>
+      </p:sp>
+      <p:sp>
+        <p:nvSpPr>
+          <p:cNvPr id="7" name="Badges"/>
+          <p:cNvSpPr txBox="1"/>
+          <p:nvPr/>
+        </p:nvSpPr>
+        <p:spPr>
+          <a:xfrm>
+            <a:off x="9052560" y="256032"/>
+            <a:ext cx="2651760" cy="640080"/>
+          </a:xfrm>
+          <a:prstGeom prst="rect">
+            <a:avLst/>
+          </a:prstGeom>
+          <a:noFill/>
+        </p:spPr>
+        <p:txBody>
+          <a:bodyPr wrap="square" anchor="t" lIns="45720" rIns="45720" tIns="27432" bIns="27432">
+            <a:normAutofit/>
+          </a:bodyPr>
+          <a:lstStyle/>
+          <a:p>
+            <a:pPr algn="r"/>
+            <a:r>
+              <a:rPr sz="1000">
+                <a:solidFill>
+                  <a:srgbClr val="E4F4EE"/>
+                </a:solidFill>
+                <a:latin typeface="Inter"/>
+              </a:rPr>
+              <a:t>🏫 Toda la clase</a:t>
+            </a:r>
+          </a:p>
+          <a:p>
+            <a:pPr algn="r"/>
+            <a:r>
+              <a:rPr sz="1000">
+                <a:solidFill>
+                  <a:srgbClr val="E4F4EE"/>
+                </a:solidFill>
+                <a:latin typeface="Inter"/>
+              </a:rPr>
+              <a:t>± 15 min · ★★★</a:t>
+            </a:r>
+          </a:p>
+        </p:txBody>
+      </p:sp>
+      <p:sp>
+        <p:nvSpPr>
+          <p:cNvPr id="8" name="Gancho"/>
+          <p:cNvSpPr txBox="1"/>
+          <p:nvPr/>
+        </p:nvSpPr>
+        <p:spPr>
+          <a:xfrm>
+            <a:off x="457200" y="1225296"/>
+            <a:ext cx="11274552" cy="566928"/>
+          </a:xfrm>
+          <a:prstGeom prst="rect">
+            <a:avLst/>
+          </a:prstGeom>
+          <a:noFill/>
+        </p:spPr>
+        <p:txBody>
+          <a:bodyPr wrap="square" anchor="t" lIns="45720" rIns="45720" tIns="27432" bIns="27432">
+            <a:normAutofit/>
+          </a:bodyPr>
+          <a:lstStyle/>
+          <a:p>
+            <a:pPr algn="l"/>
+            <a:r>
+              <a:rPr sz="1600" b="1">
+                <a:solidFill>
+                  <a:srgbClr val="157355"/>
+                </a:solidFill>
+                <a:latin typeface="Bricolage Grotesque"/>
+              </a:rPr>
+              <a:t>Estás en directo. Pides una canción y dices por qué.</a:t>
+            </a:r>
+          </a:p>
+          <a:p>
+            <a:pPr algn="l"/>
+            <a:r>
+              <a:rPr sz="1100" i="1">
+                <a:solidFill>
+                  <a:srgbClr val="6A6E78"/>
+                </a:solidFill>
+                <a:latin typeface="Inter"/>
+              </a:rPr>
+              <a:t>Je bent live in de uitzending. Je vraagt een nummer aan en zegt waarom.</a:t>
+            </a:r>
+          </a:p>
+        </p:txBody>
+      </p:sp>
+      <p:sp>
+        <p:nvSpPr>
+          <p:cNvPr id="9" name="ReglaCaja"/>
+          <p:cNvSpPr/>
+          <p:nvPr/>
+        </p:nvSpPr>
+        <p:spPr>
+          <a:xfrm>
+            <a:off x="457200" y="1847088"/>
+            <a:ext cx="11274552" cy="658368"/>
+          </a:xfrm>
+          <a:prstGeom prst="roundRect">
+            <a:avLst>
+              <a:gd name="adj" fmla="val 5000"/>
+            </a:avLst>
+          </a:prstGeom>
+          <a:solidFill>
+            <a:srgbClr val="FBF3D6"/>
+          </a:solidFill>
+          <a:ln>
+            <a:noFill/>
+          </a:ln>
+          <a:effectLst/>
+        </p:spPr>
+        <p:style>
+          <a:lnRef idx="1">
+            <a:schemeClr val="accent1"/>
+          </a:lnRef>
+          <a:fillRef idx="3">
+            <a:schemeClr val="accent1"/>
+          </a:fillRef>
+          <a:effectRef idx="2">
+            <a:schemeClr val="accent1"/>
+          </a:effectRef>
+          <a:fontRef idx="minor">
+            <a:schemeClr val="lt1"/>
+          </a:fontRef>
+        </p:style>
+        <p:txBody>
+          <a:bodyPr rtlCol="0" anchor="ctr"/>
+          <a:lstStyle/>
+          <a:p/>
+        </p:txBody>
+      </p:sp>
+      <p:sp>
+        <p:nvSpPr>
+          <p:cNvPr id="10" name="ReglaTxt"/>
+          <p:cNvSpPr txBox="1"/>
+          <p:nvPr/>
+        </p:nvSpPr>
+        <p:spPr>
+          <a:xfrm>
+            <a:off x="603504" y="1883664"/>
+            <a:ext cx="10972800" cy="585216"/>
+          </a:xfrm>
+          <a:prstGeom prst="rect">
+            <a:avLst/>
+          </a:prstGeom>
+          <a:noFill/>
+        </p:spPr>
+        <p:txBody>
+          <a:bodyPr wrap="square" anchor="t" lIns="45720" rIns="45720" tIns="27432" bIns="27432">
+            <a:normAutofit/>
+          </a:bodyPr>
+          <a:lstStyle/>
+          <a:p>
+            <a:pPr algn="l"/>
+            <a:r>
+              <a:rPr sz="850" b="1">
+                <a:solidFill>
+                  <a:srgbClr val="B7860B"/>
+                </a:solidFill>
+                <a:latin typeface="Inter"/>
+              </a:rPr>
+              <a:t>LA REGLA DEL RETO</a:t>
+            </a:r>
+          </a:p>
+          <a:p>
+            <a:pPr algn="l"/>
+            <a:r>
+              <a:rPr sz="1100">
+                <a:solidFill>
+                  <a:srgbClr val="20242E"/>
+                </a:solidFill>
+                <a:latin typeface="Inter"/>
+              </a:rPr>
+              <a:t>De presentator reageert altijd met también, tampoco, a mí sí of a mí no — en nooit twee keer dezelfde in één uitzending.</a:t>
+            </a:r>
+          </a:p>
+        </p:txBody>
+      </p:sp>
+      <p:sp>
+        <p:nvSpPr>
+          <p:cNvPr id="11" name="Tarjeta 0"/>
+          <p:cNvSpPr/>
+          <p:nvPr/>
+        </p:nvSpPr>
+        <p:spPr>
+          <a:xfrm>
+            <a:off x="457200" y="2670048"/>
+            <a:ext cx="2708910" cy="898398"/>
+          </a:xfrm>
+          <a:prstGeom prst="roundRect">
+            <a:avLst>
+              <a:gd name="adj" fmla="val 6000"/>
+            </a:avLst>
+          </a:prstGeom>
+          <a:solidFill>
+            <a:srgbClr val="FFFFFF"/>
+          </a:solidFill>
+          <a:ln w="12700">
+            <a:solidFill>
+              <a:srgbClr val="E4E3DE"/>
+            </a:solidFill>
+          </a:ln>
+          <a:effectLst/>
+        </p:spPr>
+        <p:style>
+          <a:lnRef idx="1">
+            <a:schemeClr val="accent1"/>
+          </a:lnRef>
+          <a:fillRef idx="3">
+            <a:schemeClr val="accent1"/>
+          </a:fillRef>
+          <a:effectRef idx="2">
+            <a:schemeClr val="accent1"/>
+          </a:effectRef>
+          <a:fontRef idx="minor">
+            <a:schemeClr val="lt1"/>
+          </a:fontRef>
+        </p:style>
+        <p:txBody>
+          <a:bodyPr rtlCol="0" anchor="ctr"/>
+          <a:lstStyle/>
+          <a:p/>
+        </p:txBody>
+      </p:sp>
+      <p:sp>
+        <p:nvSpPr>
+          <p:cNvPr id="12" name="TarjetaTxt 0"/>
+          <p:cNvSpPr txBox="1"/>
+          <p:nvPr/>
+        </p:nvSpPr>
+        <p:spPr>
+          <a:xfrm>
+            <a:off x="548640" y="2724912"/>
+            <a:ext cx="2526030" cy="788670"/>
+          </a:xfrm>
+          <a:prstGeom prst="rect">
+            <a:avLst/>
+          </a:prstGeom>
+          <a:noFill/>
+        </p:spPr>
+        <p:txBody>
+          <a:bodyPr wrap="square" anchor="t" lIns="45720" rIns="45720" tIns="27432" bIns="27432">
+            <a:normAutofit/>
+          </a:bodyPr>
+          <a:lstStyle/>
+          <a:p>
+            <a:pPr algn="l"/>
+            <a:r>
+              <a:rPr sz="1100" b="1">
+                <a:solidFill>
+                  <a:srgbClr val="157355"/>
+                </a:solidFill>
+                <a:latin typeface="Bricolage Grotesque"/>
+              </a:rPr>
+              <a:t>Tú llamas</a:t>
+            </a:r>
+          </a:p>
+          <a:p>
+            <a:pPr algn="l"/>
+            <a:r>
+              <a:rPr sz="1000">
+                <a:solidFill>
+                  <a:srgbClr val="20242E"/>
+                </a:solidFill>
+                <a:latin typeface="Inter"/>
+              </a:rPr>
+              <a:t>Hola, buenas tardes. Llamo desde …</a:t>
+            </a:r>
+          </a:p>
+        </p:txBody>
+      </p:sp>
+      <p:sp>
+        <p:nvSpPr>
+          <p:cNvPr id="13" name="Tarjeta 1"/>
+          <p:cNvSpPr/>
+          <p:nvPr/>
+        </p:nvSpPr>
+        <p:spPr>
+          <a:xfrm>
+            <a:off x="3312414" y="2670048"/>
+            <a:ext cx="2708910" cy="898398"/>
+          </a:xfrm>
+          <a:prstGeom prst="roundRect">
+            <a:avLst>
+              <a:gd name="adj" fmla="val 6000"/>
+            </a:avLst>
+          </a:prstGeom>
+          <a:solidFill>
+            <a:srgbClr val="FFFFFF"/>
+          </a:solidFill>
+          <a:ln w="12700">
+            <a:solidFill>
+              <a:srgbClr val="E4E3DE"/>
+            </a:solidFill>
+          </a:ln>
+          <a:effectLst/>
+        </p:spPr>
+        <p:style>
+          <a:lnRef idx="1">
+            <a:schemeClr val="accent1"/>
+          </a:lnRef>
+          <a:fillRef idx="3">
+            <a:schemeClr val="accent1"/>
+          </a:fillRef>
+          <a:effectRef idx="2">
+            <a:schemeClr val="accent1"/>
+          </a:effectRef>
+          <a:fontRef idx="minor">
+            <a:schemeClr val="lt1"/>
+          </a:fontRef>
+        </p:style>
+        <p:txBody>
+          <a:bodyPr rtlCol="0" anchor="ctr"/>
+          <a:lstStyle/>
+          <a:p/>
+        </p:txBody>
+      </p:sp>
+      <p:sp>
+        <p:nvSpPr>
+          <p:cNvPr id="14" name="TarjetaTxt 1"/>
+          <p:cNvSpPr txBox="1"/>
+          <p:nvPr/>
+        </p:nvSpPr>
+        <p:spPr>
+          <a:xfrm>
+            <a:off x="3403854" y="2724912"/>
+            <a:ext cx="2526030" cy="788670"/>
+          </a:xfrm>
+          <a:prstGeom prst="rect">
+            <a:avLst/>
+          </a:prstGeom>
+          <a:noFill/>
+        </p:spPr>
+        <p:txBody>
+          <a:bodyPr wrap="square" anchor="t" lIns="45720" rIns="45720" tIns="27432" bIns="27432">
+            <a:normAutofit/>
+          </a:bodyPr>
+          <a:lstStyle/>
+          <a:p>
+            <a:pPr algn="l"/>
+            <a:r>
+              <a:rPr sz="1100" b="1">
+                <a:solidFill>
+                  <a:srgbClr val="157355"/>
+                </a:solidFill>
+                <a:latin typeface="Bricolage Grotesque"/>
+              </a:rPr>
+              <a:t>Tú llamas</a:t>
+            </a:r>
+          </a:p>
+          <a:p>
+            <a:pPr algn="l"/>
+            <a:r>
+              <a:rPr sz="1000">
+                <a:solidFill>
+                  <a:srgbClr val="20242E"/>
+                </a:solidFill>
+                <a:latin typeface="Inter"/>
+              </a:rPr>
+              <a:t>Quiero pedir … porque me encanta …</a:t>
+            </a:r>
+          </a:p>
+        </p:txBody>
+      </p:sp>
+      <p:sp>
+        <p:nvSpPr>
+          <p:cNvPr id="15" name="Tarjeta 2"/>
+          <p:cNvSpPr/>
+          <p:nvPr/>
+        </p:nvSpPr>
+        <p:spPr>
+          <a:xfrm>
+            <a:off x="6167628" y="2670048"/>
+            <a:ext cx="2708910" cy="898398"/>
+          </a:xfrm>
+          <a:prstGeom prst="roundRect">
+            <a:avLst>
+              <a:gd name="adj" fmla="val 6000"/>
+            </a:avLst>
+          </a:prstGeom>
+          <a:solidFill>
+            <a:srgbClr val="FFFFFF"/>
+          </a:solidFill>
+          <a:ln w="12700">
+            <a:solidFill>
+              <a:srgbClr val="E4E3DE"/>
+            </a:solidFill>
+          </a:ln>
+          <a:effectLst/>
+        </p:spPr>
+        <p:style>
+          <a:lnRef idx="1">
+            <a:schemeClr val="accent1"/>
+          </a:lnRef>
+          <a:fillRef idx="3">
+            <a:schemeClr val="accent1"/>
+          </a:fillRef>
+          <a:effectRef idx="2">
+            <a:schemeClr val="accent1"/>
+          </a:effectRef>
+          <a:fontRef idx="minor">
+            <a:schemeClr val="lt1"/>
+          </a:fontRef>
+        </p:style>
+        <p:txBody>
+          <a:bodyPr rtlCol="0" anchor="ctr"/>
+          <a:lstStyle/>
+          <a:p/>
+        </p:txBody>
+      </p:sp>
+      <p:sp>
+        <p:nvSpPr>
+          <p:cNvPr id="16" name="TarjetaTxt 2"/>
+          <p:cNvSpPr txBox="1"/>
+          <p:nvPr/>
+        </p:nvSpPr>
+        <p:spPr>
+          <a:xfrm>
+            <a:off x="6259068" y="2724912"/>
+            <a:ext cx="2526030" cy="788670"/>
+          </a:xfrm>
+          <a:prstGeom prst="rect">
+            <a:avLst/>
+          </a:prstGeom>
+          <a:noFill/>
+        </p:spPr>
+        <p:txBody>
+          <a:bodyPr wrap="square" anchor="t" lIns="45720" rIns="45720" tIns="27432" bIns="27432">
+            <a:normAutofit/>
+          </a:bodyPr>
+          <a:lstStyle/>
+          <a:p>
+            <a:pPr algn="l"/>
+            <a:r>
+              <a:rPr sz="1100" b="1">
+                <a:solidFill>
+                  <a:srgbClr val="157355"/>
+                </a:solidFill>
+                <a:latin typeface="Bricolage Grotesque"/>
+              </a:rPr>
+              <a:t>Tú llamas</a:t>
+            </a:r>
+          </a:p>
+          <a:p>
+            <a:pPr algn="l"/>
+            <a:r>
+              <a:rPr sz="1000">
+                <a:solidFill>
+                  <a:srgbClr val="20242E"/>
+                </a:solidFill>
+                <a:latin typeface="Inter"/>
+              </a:rPr>
+              <a:t>Es para mi … , que hoy cumple años.</a:t>
+            </a:r>
+          </a:p>
+        </p:txBody>
+      </p:sp>
+      <p:sp>
+        <p:nvSpPr>
+          <p:cNvPr id="17" name="Tarjeta 3"/>
+          <p:cNvSpPr/>
+          <p:nvPr/>
+        </p:nvSpPr>
+        <p:spPr>
+          <a:xfrm>
+            <a:off x="9022842" y="2670048"/>
+            <a:ext cx="2708910" cy="898398"/>
+          </a:xfrm>
+          <a:prstGeom prst="roundRect">
+            <a:avLst>
+              <a:gd name="adj" fmla="val 6000"/>
+            </a:avLst>
+          </a:prstGeom>
+          <a:solidFill>
+            <a:srgbClr val="FFFFFF"/>
+          </a:solidFill>
+          <a:ln w="12700">
+            <a:solidFill>
+              <a:srgbClr val="E4E3DE"/>
+            </a:solidFill>
+          </a:ln>
+          <a:effectLst/>
+        </p:spPr>
+        <p:style>
+          <a:lnRef idx="1">
+            <a:schemeClr val="accent1"/>
+          </a:lnRef>
+          <a:fillRef idx="3">
+            <a:schemeClr val="accent1"/>
+          </a:fillRef>
+          <a:effectRef idx="2">
+            <a:schemeClr val="accent1"/>
+          </a:effectRef>
+          <a:fontRef idx="minor">
+            <a:schemeClr val="lt1"/>
+          </a:fontRef>
+        </p:style>
+        <p:txBody>
+          <a:bodyPr rtlCol="0" anchor="ctr"/>
+          <a:lstStyle/>
+          <a:p/>
+        </p:txBody>
+      </p:sp>
+      <p:sp>
+        <p:nvSpPr>
+          <p:cNvPr id="18" name="TarjetaTxt 3"/>
+          <p:cNvSpPr txBox="1"/>
+          <p:nvPr/>
+        </p:nvSpPr>
+        <p:spPr>
+          <a:xfrm>
+            <a:off x="9114282" y="2724912"/>
+            <a:ext cx="2526030" cy="788670"/>
+          </a:xfrm>
+          <a:prstGeom prst="rect">
+            <a:avLst/>
+          </a:prstGeom>
+          <a:noFill/>
+        </p:spPr>
+        <p:txBody>
+          <a:bodyPr wrap="square" anchor="t" lIns="45720" rIns="45720" tIns="27432" bIns="27432">
+            <a:normAutofit/>
+          </a:bodyPr>
+          <a:lstStyle/>
+          <a:p>
+            <a:pPr algn="l"/>
+            <a:r>
+              <a:rPr sz="1100" b="1">
+                <a:solidFill>
+                  <a:srgbClr val="157355"/>
+                </a:solidFill>
+                <a:latin typeface="Bricolage Grotesque"/>
+              </a:rPr>
+              <a:t>El presentador</a:t>
+            </a:r>
+          </a:p>
+          <a:p>
+            <a:pPr algn="l"/>
+            <a:r>
+              <a:rPr sz="1000">
+                <a:solidFill>
+                  <a:srgbClr val="20242E"/>
+                </a:solidFill>
+                <a:latin typeface="Inter"/>
+              </a:rPr>
+              <a:t>¡A mí también me encanta!</a:t>
+            </a:r>
+          </a:p>
+        </p:txBody>
+      </p:sp>
+      <p:sp>
+        <p:nvSpPr>
+          <p:cNvPr id="19" name="Tarjeta 4"/>
+          <p:cNvSpPr/>
+          <p:nvPr/>
+        </p:nvSpPr>
+        <p:spPr>
+          <a:xfrm>
+            <a:off x="457200" y="3696462"/>
+            <a:ext cx="2708910" cy="898398"/>
+          </a:xfrm>
+          <a:prstGeom prst="roundRect">
+            <a:avLst>
+              <a:gd name="adj" fmla="val 6000"/>
+            </a:avLst>
+          </a:prstGeom>
+          <a:solidFill>
+            <a:srgbClr val="FFFFFF"/>
+          </a:solidFill>
+          <a:ln w="12700">
+            <a:solidFill>
+              <a:srgbClr val="E4E3DE"/>
+            </a:solidFill>
+          </a:ln>
+          <a:effectLst/>
+        </p:spPr>
+        <p:style>
+          <a:lnRef idx="1">
+            <a:schemeClr val="accent1"/>
+          </a:lnRef>
+          <a:fillRef idx="3">
+            <a:schemeClr val="accent1"/>
+          </a:fillRef>
+          <a:effectRef idx="2">
+            <a:schemeClr val="accent1"/>
+          </a:effectRef>
+          <a:fontRef idx="minor">
+            <a:schemeClr val="lt1"/>
+          </a:fontRef>
+        </p:style>
+        <p:txBody>
+          <a:bodyPr rtlCol="0" anchor="ctr"/>
+          <a:lstStyle/>
+          <a:p/>
+        </p:txBody>
+      </p:sp>
+      <p:sp>
+        <p:nvSpPr>
+          <p:cNvPr id="20" name="TarjetaTxt 4"/>
+          <p:cNvSpPr txBox="1"/>
+          <p:nvPr/>
+        </p:nvSpPr>
+        <p:spPr>
+          <a:xfrm>
+            <a:off x="548640" y="3751326"/>
+            <a:ext cx="2526030" cy="788670"/>
+          </a:xfrm>
+          <a:prstGeom prst="rect">
+            <a:avLst/>
+          </a:prstGeom>
+          <a:noFill/>
+        </p:spPr>
+        <p:txBody>
+          <a:bodyPr wrap="square" anchor="t" lIns="45720" rIns="45720" tIns="27432" bIns="27432">
+            <a:normAutofit/>
+          </a:bodyPr>
+          <a:lstStyle/>
+          <a:p>
+            <a:pPr algn="l"/>
+            <a:r>
+              <a:rPr sz="1100" b="1">
+                <a:solidFill>
+                  <a:srgbClr val="157355"/>
+                </a:solidFill>
+                <a:latin typeface="Bricolage Grotesque"/>
+              </a:rPr>
+              <a:t>El presentador</a:t>
+            </a:r>
+          </a:p>
+          <a:p>
+            <a:pPr algn="l"/>
+            <a:r>
+              <a:rPr sz="1000">
+                <a:solidFill>
+                  <a:srgbClr val="20242E"/>
+                </a:solidFill>
+                <a:latin typeface="Inter"/>
+              </a:rPr>
+              <a:t>Pues a mí no, pero la ponemos.</a:t>
+            </a:r>
+          </a:p>
+        </p:txBody>
+      </p:sp>
+      <p:sp>
+        <p:nvSpPr>
+          <p:cNvPr id="21" name="Tarjeta 5"/>
+          <p:cNvSpPr/>
+          <p:nvPr/>
+        </p:nvSpPr>
+        <p:spPr>
+          <a:xfrm>
+            <a:off x="3312414" y="3696462"/>
+            <a:ext cx="2708910" cy="898398"/>
+          </a:xfrm>
+          <a:prstGeom prst="roundRect">
+            <a:avLst>
+              <a:gd name="adj" fmla="val 6000"/>
+            </a:avLst>
+          </a:prstGeom>
+          <a:solidFill>
+            <a:srgbClr val="FFFFFF"/>
+          </a:solidFill>
+          <a:ln w="12700">
+            <a:solidFill>
+              <a:srgbClr val="E4E3DE"/>
+            </a:solidFill>
+          </a:ln>
+          <a:effectLst/>
+        </p:spPr>
+        <p:style>
+          <a:lnRef idx="1">
+            <a:schemeClr val="accent1"/>
+          </a:lnRef>
+          <a:fillRef idx="3">
+            <a:schemeClr val="accent1"/>
+          </a:fillRef>
+          <a:effectRef idx="2">
+            <a:schemeClr val="accent1"/>
+          </a:effectRef>
+          <a:fontRef idx="minor">
+            <a:schemeClr val="lt1"/>
+          </a:fontRef>
+        </p:style>
+        <p:txBody>
+          <a:bodyPr rtlCol="0" anchor="ctr"/>
+          <a:lstStyle/>
+          <a:p/>
+        </p:txBody>
+      </p:sp>
+      <p:sp>
+        <p:nvSpPr>
+          <p:cNvPr id="22" name="TarjetaTxt 5"/>
+          <p:cNvSpPr txBox="1"/>
+          <p:nvPr/>
+        </p:nvSpPr>
+        <p:spPr>
+          <a:xfrm>
+            <a:off x="3403854" y="3751326"/>
+            <a:ext cx="2526030" cy="788670"/>
+          </a:xfrm>
+          <a:prstGeom prst="rect">
+            <a:avLst/>
+          </a:prstGeom>
+          <a:noFill/>
+        </p:spPr>
+        <p:txBody>
+          <a:bodyPr wrap="square" anchor="t" lIns="45720" rIns="45720" tIns="27432" bIns="27432">
+            <a:normAutofit/>
+          </a:bodyPr>
+          <a:lstStyle/>
+          <a:p>
+            <a:pPr algn="l"/>
+            <a:r>
+              <a:rPr sz="1100" b="1">
+                <a:solidFill>
+                  <a:srgbClr val="157355"/>
+                </a:solidFill>
+                <a:latin typeface="Bricolage Grotesque"/>
+              </a:rPr>
+              <a:t>El presentador</a:t>
+            </a:r>
+          </a:p>
+          <a:p>
+            <a:pPr algn="l"/>
+            <a:r>
+              <a:rPr sz="1000">
+                <a:solidFill>
+                  <a:srgbClr val="20242E"/>
+                </a:solidFill>
+                <a:latin typeface="Inter"/>
+              </a:rPr>
+              <a:t>A mí tampoco me gusta mucho, la verdad.</a:t>
+            </a:r>
+          </a:p>
+        </p:txBody>
+      </p:sp>
+      <p:sp>
+        <p:nvSpPr>
+          <p:cNvPr id="23" name="Tarjeta 6"/>
+          <p:cNvSpPr/>
+          <p:nvPr/>
+        </p:nvSpPr>
+        <p:spPr>
+          <a:xfrm>
+            <a:off x="6167628" y="3696462"/>
+            <a:ext cx="2708910" cy="898398"/>
+          </a:xfrm>
+          <a:prstGeom prst="roundRect">
+            <a:avLst>
+              <a:gd name="adj" fmla="val 6000"/>
+            </a:avLst>
+          </a:prstGeom>
+          <a:solidFill>
+            <a:srgbClr val="FFFFFF"/>
+          </a:solidFill>
+          <a:ln w="12700">
+            <a:solidFill>
+              <a:srgbClr val="E4E3DE"/>
+            </a:solidFill>
+          </a:ln>
+          <a:effectLst/>
+        </p:spPr>
+        <p:style>
+          <a:lnRef idx="1">
+            <a:schemeClr val="accent1"/>
+          </a:lnRef>
+          <a:fillRef idx="3">
+            <a:schemeClr val="accent1"/>
+          </a:fillRef>
+          <a:effectRef idx="2">
+            <a:schemeClr val="accent1"/>
+          </a:effectRef>
+          <a:fontRef idx="minor">
+            <a:schemeClr val="lt1"/>
+          </a:fontRef>
+        </p:style>
+        <p:txBody>
+          <a:bodyPr rtlCol="0" anchor="ctr"/>
+          <a:lstStyle/>
+          <a:p/>
+        </p:txBody>
+      </p:sp>
+      <p:sp>
+        <p:nvSpPr>
+          <p:cNvPr id="24" name="TarjetaTxt 6"/>
+          <p:cNvSpPr txBox="1"/>
+          <p:nvPr/>
+        </p:nvSpPr>
+        <p:spPr>
+          <a:xfrm>
+            <a:off x="6259068" y="3751326"/>
+            <a:ext cx="2526030" cy="788670"/>
+          </a:xfrm>
+          <a:prstGeom prst="rect">
+            <a:avLst/>
+          </a:prstGeom>
+          <a:noFill/>
+        </p:spPr>
+        <p:txBody>
+          <a:bodyPr wrap="square" anchor="t" lIns="45720" rIns="45720" tIns="27432" bIns="27432">
+            <a:normAutofit/>
+          </a:bodyPr>
+          <a:lstStyle/>
+          <a:p>
+            <a:pPr algn="l"/>
+            <a:r>
+              <a:rPr sz="1100" b="1">
+                <a:solidFill>
+                  <a:srgbClr val="157355"/>
+                </a:solidFill>
+                <a:latin typeface="Bricolage Grotesque"/>
+              </a:rPr>
+              <a:t>El presentador</a:t>
+            </a:r>
+          </a:p>
+          <a:p>
+            <a:pPr algn="l"/>
+            <a:r>
+              <a:rPr sz="1000">
+                <a:solidFill>
+                  <a:srgbClr val="20242E"/>
+                </a:solidFill>
+                <a:latin typeface="Inter"/>
+              </a:rPr>
+              <a:t>¿Ah sí? A mí sí, y mucho.</a:t>
+            </a:r>
+          </a:p>
+        </p:txBody>
+      </p:sp>
+      <p:sp>
+        <p:nvSpPr>
+          <p:cNvPr id="25" name="Tarjeta 7"/>
+          <p:cNvSpPr/>
+          <p:nvPr/>
+        </p:nvSpPr>
+        <p:spPr>
+          <a:xfrm>
+            <a:off x="9022842" y="3696462"/>
+            <a:ext cx="2708910" cy="898398"/>
+          </a:xfrm>
+          <a:prstGeom prst="roundRect">
+            <a:avLst>
+              <a:gd name="adj" fmla="val 6000"/>
+            </a:avLst>
+          </a:prstGeom>
+          <a:solidFill>
+            <a:srgbClr val="FFFFFF"/>
+          </a:solidFill>
+          <a:ln w="12700">
+            <a:solidFill>
+              <a:srgbClr val="E4E3DE"/>
+            </a:solidFill>
+          </a:ln>
+          <a:effectLst/>
+        </p:spPr>
+        <p:style>
+          <a:lnRef idx="1">
+            <a:schemeClr val="accent1"/>
+          </a:lnRef>
+          <a:fillRef idx="3">
+            <a:schemeClr val="accent1"/>
+          </a:fillRef>
+          <a:effectRef idx="2">
+            <a:schemeClr val="accent1"/>
+          </a:effectRef>
+          <a:fontRef idx="minor">
+            <a:schemeClr val="lt1"/>
+          </a:fontRef>
+        </p:style>
+        <p:txBody>
+          <a:bodyPr rtlCol="0" anchor="ctr"/>
+          <a:lstStyle/>
+          <a:p/>
+        </p:txBody>
+      </p:sp>
+      <p:sp>
+        <p:nvSpPr>
+          <p:cNvPr id="26" name="TarjetaTxt 7"/>
+          <p:cNvSpPr txBox="1"/>
+          <p:nvPr/>
+        </p:nvSpPr>
+        <p:spPr>
+          <a:xfrm>
+            <a:off x="9114282" y="3751326"/>
+            <a:ext cx="2526030" cy="788670"/>
+          </a:xfrm>
+          <a:prstGeom prst="rect">
+            <a:avLst/>
+          </a:prstGeom>
+          <a:noFill/>
+        </p:spPr>
+        <p:txBody>
+          <a:bodyPr wrap="square" anchor="t" lIns="45720" rIns="45720" tIns="27432" bIns="27432">
+            <a:normAutofit/>
+          </a:bodyPr>
+          <a:lstStyle/>
+          <a:p>
+            <a:pPr algn="l"/>
+            <a:r>
+              <a:rPr sz="1100" b="1">
+                <a:solidFill>
+                  <a:srgbClr val="157355"/>
+                </a:solidFill>
+                <a:latin typeface="Bricolage Grotesque"/>
+              </a:rPr>
+              <a:t>canción</a:t>
+            </a:r>
+          </a:p>
+          <a:p>
+            <a:pPr algn="l"/>
+            <a:r>
+              <a:rPr sz="1000">
+                <a:solidFill>
+                  <a:srgbClr val="20242E"/>
+                </a:solidFill>
+                <a:latin typeface="Inter"/>
+              </a:rPr>
+              <a:t>una de Rosalía</a:t>
+            </a:r>
+          </a:p>
+        </p:txBody>
+      </p:sp>
+      <p:sp>
+        <p:nvSpPr>
+          <p:cNvPr id="27" name="Tarjeta 8"/>
+          <p:cNvSpPr/>
+          <p:nvPr/>
+        </p:nvSpPr>
+        <p:spPr>
+          <a:xfrm>
+            <a:off x="457200" y="4722876"/>
+            <a:ext cx="2708910" cy="898398"/>
+          </a:xfrm>
+          <a:prstGeom prst="roundRect">
+            <a:avLst>
+              <a:gd name="adj" fmla="val 6000"/>
+            </a:avLst>
+          </a:prstGeom>
+          <a:solidFill>
+            <a:srgbClr val="FFFFFF"/>
+          </a:solidFill>
+          <a:ln w="12700">
+            <a:solidFill>
+              <a:srgbClr val="E4E3DE"/>
+            </a:solidFill>
+          </a:ln>
+          <a:effectLst/>
+        </p:spPr>
+        <p:style>
+          <a:lnRef idx="1">
+            <a:schemeClr val="accent1"/>
+          </a:lnRef>
+          <a:fillRef idx="3">
+            <a:schemeClr val="accent1"/>
+          </a:fillRef>
+          <a:effectRef idx="2">
+            <a:schemeClr val="accent1"/>
+          </a:effectRef>
+          <a:fontRef idx="minor">
+            <a:schemeClr val="lt1"/>
+          </a:fontRef>
+        </p:style>
+        <p:txBody>
+          <a:bodyPr rtlCol="0" anchor="ctr"/>
+          <a:lstStyle/>
+          <a:p/>
+        </p:txBody>
+      </p:sp>
+      <p:sp>
+        <p:nvSpPr>
+          <p:cNvPr id="28" name="TarjetaTxt 8"/>
+          <p:cNvSpPr txBox="1"/>
+          <p:nvPr/>
+        </p:nvSpPr>
+        <p:spPr>
+          <a:xfrm>
+            <a:off x="548640" y="4777740"/>
+            <a:ext cx="2526030" cy="788670"/>
+          </a:xfrm>
+          <a:prstGeom prst="rect">
+            <a:avLst/>
+          </a:prstGeom>
+          <a:noFill/>
+        </p:spPr>
+        <p:txBody>
+          <a:bodyPr wrap="square" anchor="t" lIns="45720" rIns="45720" tIns="27432" bIns="27432">
+            <a:normAutofit/>
+          </a:bodyPr>
+          <a:lstStyle/>
+          <a:p>
+            <a:pPr algn="l"/>
+            <a:r>
+              <a:rPr sz="1100" b="1">
+                <a:solidFill>
+                  <a:srgbClr val="157355"/>
+                </a:solidFill>
+                <a:latin typeface="Bricolage Grotesque"/>
+              </a:rPr>
+              <a:t>canción</a:t>
+            </a:r>
+          </a:p>
+          <a:p>
+            <a:pPr algn="l"/>
+            <a:r>
+              <a:rPr sz="1000">
+                <a:solidFill>
+                  <a:srgbClr val="20242E"/>
+                </a:solidFill>
+                <a:latin typeface="Inter"/>
+              </a:rPr>
+              <a:t>algo de flamenco</a:t>
+            </a:r>
+          </a:p>
+        </p:txBody>
+      </p:sp>
+      <p:sp>
+        <p:nvSpPr>
+          <p:cNvPr id="29" name="Tarjeta 9"/>
+          <p:cNvSpPr/>
+          <p:nvPr/>
+        </p:nvSpPr>
+        <p:spPr>
+          <a:xfrm>
+            <a:off x="3312414" y="4722876"/>
+            <a:ext cx="2708910" cy="898398"/>
+          </a:xfrm>
+          <a:prstGeom prst="roundRect">
+            <a:avLst>
+              <a:gd name="adj" fmla="val 6000"/>
+            </a:avLst>
+          </a:prstGeom>
+          <a:solidFill>
+            <a:srgbClr val="FFFFFF"/>
+          </a:solidFill>
+          <a:ln w="12700">
+            <a:solidFill>
+              <a:srgbClr val="E4E3DE"/>
+            </a:solidFill>
+          </a:ln>
+          <a:effectLst/>
+        </p:spPr>
+        <p:style>
+          <a:lnRef idx="1">
+            <a:schemeClr val="accent1"/>
+          </a:lnRef>
+          <a:fillRef idx="3">
+            <a:schemeClr val="accent1"/>
+          </a:fillRef>
+          <a:effectRef idx="2">
+            <a:schemeClr val="accent1"/>
+          </a:effectRef>
+          <a:fontRef idx="minor">
+            <a:schemeClr val="lt1"/>
+          </a:fontRef>
+        </p:style>
+        <p:txBody>
+          <a:bodyPr rtlCol="0" anchor="ctr"/>
+          <a:lstStyle/>
+          <a:p/>
+        </p:txBody>
+      </p:sp>
+      <p:sp>
+        <p:nvSpPr>
+          <p:cNvPr id="30" name="TarjetaTxt 9"/>
+          <p:cNvSpPr txBox="1"/>
+          <p:nvPr/>
+        </p:nvSpPr>
+        <p:spPr>
+          <a:xfrm>
+            <a:off x="3403854" y="4777740"/>
+            <a:ext cx="2526030" cy="788670"/>
+          </a:xfrm>
+          <a:prstGeom prst="rect">
+            <a:avLst/>
+          </a:prstGeom>
+          <a:noFill/>
+        </p:spPr>
+        <p:txBody>
+          <a:bodyPr wrap="square" anchor="t" lIns="45720" rIns="45720" tIns="27432" bIns="27432">
+            <a:normAutofit/>
+          </a:bodyPr>
+          <a:lstStyle/>
+          <a:p>
+            <a:pPr algn="l"/>
+            <a:r>
+              <a:rPr sz="1100" b="1">
+                <a:solidFill>
+                  <a:srgbClr val="157355"/>
+                </a:solidFill>
+                <a:latin typeface="Bricolage Grotesque"/>
+              </a:rPr>
+              <a:t>canción</a:t>
+            </a:r>
+          </a:p>
+          <a:p>
+            <a:pPr algn="l"/>
+            <a:r>
+              <a:rPr sz="1000">
+                <a:solidFill>
+                  <a:srgbClr val="20242E"/>
+                </a:solidFill>
+                <a:latin typeface="Inter"/>
+              </a:rPr>
+              <a:t>reguetón del verano</a:t>
+            </a:r>
+          </a:p>
+        </p:txBody>
+      </p:sp>
+      <p:sp>
+        <p:nvSpPr>
+          <p:cNvPr id="31" name="Tarjeta 10"/>
+          <p:cNvSpPr/>
+          <p:nvPr/>
+        </p:nvSpPr>
+        <p:spPr>
+          <a:xfrm>
+            <a:off x="6167628" y="4722876"/>
+            <a:ext cx="2708910" cy="898398"/>
+          </a:xfrm>
+          <a:prstGeom prst="roundRect">
+            <a:avLst>
+              <a:gd name="adj" fmla="val 6000"/>
+            </a:avLst>
+          </a:prstGeom>
+          <a:solidFill>
+            <a:srgbClr val="FFFFFF"/>
+          </a:solidFill>
+          <a:ln w="12700">
+            <a:solidFill>
+              <a:srgbClr val="E4E3DE"/>
+            </a:solidFill>
+          </a:ln>
+          <a:effectLst/>
+        </p:spPr>
+        <p:style>
+          <a:lnRef idx="1">
+            <a:schemeClr val="accent1"/>
+          </a:lnRef>
+          <a:fillRef idx="3">
+            <a:schemeClr val="accent1"/>
+          </a:fillRef>
+          <a:effectRef idx="2">
+            <a:schemeClr val="accent1"/>
+          </a:effectRef>
+          <a:fontRef idx="minor">
+            <a:schemeClr val="lt1"/>
+          </a:fontRef>
+        </p:style>
+        <p:txBody>
+          <a:bodyPr rtlCol="0" anchor="ctr"/>
+          <a:lstStyle/>
+          <a:p/>
+        </p:txBody>
+      </p:sp>
+      <p:sp>
+        <p:nvSpPr>
+          <p:cNvPr id="32" name="TarjetaTxt 10"/>
+          <p:cNvSpPr txBox="1"/>
+          <p:nvPr/>
+        </p:nvSpPr>
+        <p:spPr>
+          <a:xfrm>
+            <a:off x="6259068" y="4777740"/>
+            <a:ext cx="2526030" cy="788670"/>
+          </a:xfrm>
+          <a:prstGeom prst="rect">
+            <a:avLst/>
+          </a:prstGeom>
+          <a:noFill/>
+        </p:spPr>
+        <p:txBody>
+          <a:bodyPr wrap="square" anchor="t" lIns="45720" rIns="45720" tIns="27432" bIns="27432">
+            <a:normAutofit/>
+          </a:bodyPr>
+          <a:lstStyle/>
+          <a:p>
+            <a:pPr algn="l"/>
+            <a:r>
+              <a:rPr sz="1100" b="1">
+                <a:solidFill>
+                  <a:srgbClr val="157355"/>
+                </a:solidFill>
+                <a:latin typeface="Bricolage Grotesque"/>
+              </a:rPr>
+              <a:t>canción</a:t>
+            </a:r>
+          </a:p>
+          <a:p>
+            <a:pPr algn="l"/>
+            <a:r>
+              <a:rPr sz="1000">
+                <a:solidFill>
+                  <a:srgbClr val="20242E"/>
+                </a:solidFill>
+                <a:latin typeface="Inter"/>
+              </a:rPr>
+              <a:t>una canción tranquila</a:t>
+            </a:r>
+          </a:p>
+        </p:txBody>
+      </p:sp>
+      <p:sp>
+        <p:nvSpPr>
+          <p:cNvPr id="33" name="Tarjeta 11"/>
+          <p:cNvSpPr/>
+          <p:nvPr/>
+        </p:nvSpPr>
+        <p:spPr>
+          <a:xfrm>
+            <a:off x="9022842" y="4722876"/>
+            <a:ext cx="2708910" cy="898398"/>
+          </a:xfrm>
+          <a:prstGeom prst="roundRect">
+            <a:avLst>
+              <a:gd name="adj" fmla="val 6000"/>
+            </a:avLst>
+          </a:prstGeom>
+          <a:solidFill>
+            <a:srgbClr val="FFFFFF"/>
+          </a:solidFill>
+          <a:ln w="12700">
+            <a:solidFill>
+              <a:srgbClr val="E4E3DE"/>
+            </a:solidFill>
+          </a:ln>
+          <a:effectLst/>
+        </p:spPr>
+        <p:style>
+          <a:lnRef idx="1">
+            <a:schemeClr val="accent1"/>
+          </a:lnRef>
+          <a:fillRef idx="3">
+            <a:schemeClr val="accent1"/>
+          </a:fillRef>
+          <a:effectRef idx="2">
+            <a:schemeClr val="accent1"/>
+          </a:effectRef>
+          <a:fontRef idx="minor">
+            <a:schemeClr val="lt1"/>
+          </a:fontRef>
+        </p:style>
+        <p:txBody>
+          <a:bodyPr rtlCol="0" anchor="ctr"/>
+          <a:lstStyle/>
+          <a:p/>
+        </p:txBody>
+      </p:sp>
+      <p:sp>
+        <p:nvSpPr>
+          <p:cNvPr id="34" name="TarjetaTxt 11"/>
+          <p:cNvSpPr txBox="1"/>
+          <p:nvPr/>
+        </p:nvSpPr>
+        <p:spPr>
+          <a:xfrm>
+            <a:off x="9114282" y="4777740"/>
+            <a:ext cx="2526030" cy="788670"/>
+          </a:xfrm>
+          <a:prstGeom prst="rect">
+            <a:avLst/>
+          </a:prstGeom>
+          <a:noFill/>
+        </p:spPr>
+        <p:txBody>
+          <a:bodyPr wrap="square" anchor="t" lIns="45720" rIns="45720" tIns="27432" bIns="27432">
+            <a:normAutofit/>
+          </a:bodyPr>
+          <a:lstStyle/>
+          <a:p>
+            <a:pPr algn="l"/>
+            <a:r>
+              <a:rPr sz="1100" b="1">
+                <a:solidFill>
+                  <a:srgbClr val="157355"/>
+                </a:solidFill>
+                <a:latin typeface="Bricolage Grotesque"/>
+              </a:rPr>
+              <a:t>canción</a:t>
+            </a:r>
+          </a:p>
+          <a:p>
+            <a:pPr algn="l"/>
+            <a:r>
+              <a:rPr sz="1000">
+                <a:solidFill>
+                  <a:srgbClr val="20242E"/>
+                </a:solidFill>
+                <a:latin typeface="Inter"/>
+              </a:rPr>
+              <a:t>la de la película</a:t>
+            </a:r>
+          </a:p>
+        </p:txBody>
+      </p:sp>
+      <p:sp>
+        <p:nvSpPr>
+          <p:cNvPr id="35" name="Tarjeta 12"/>
+          <p:cNvSpPr/>
+          <p:nvPr/>
+        </p:nvSpPr>
+        <p:spPr>
+          <a:xfrm>
+            <a:off x="457200" y="5749290"/>
+            <a:ext cx="2708910" cy="898398"/>
+          </a:xfrm>
+          <a:prstGeom prst="roundRect">
+            <a:avLst>
+              <a:gd name="adj" fmla="val 6000"/>
+            </a:avLst>
+          </a:prstGeom>
+          <a:solidFill>
+            <a:srgbClr val="FFFFFF"/>
+          </a:solidFill>
+          <a:ln w="12700">
+            <a:solidFill>
+              <a:srgbClr val="E4E3DE"/>
+            </a:solidFill>
+          </a:ln>
+          <a:effectLst/>
+        </p:spPr>
+        <p:style>
+          <a:lnRef idx="1">
+            <a:schemeClr val="accent1"/>
+          </a:lnRef>
+          <a:fillRef idx="3">
+            <a:schemeClr val="accent1"/>
+          </a:fillRef>
+          <a:effectRef idx="2">
+            <a:schemeClr val="accent1"/>
+          </a:effectRef>
+          <a:fontRef idx="minor">
+            <a:schemeClr val="lt1"/>
+          </a:fontRef>
+        </p:style>
+        <p:txBody>
+          <a:bodyPr rtlCol="0" anchor="ctr"/>
+          <a:lstStyle/>
+          <a:p/>
+        </p:txBody>
+      </p:sp>
+      <p:sp>
+        <p:nvSpPr>
+          <p:cNvPr id="36" name="TarjetaTxt 12"/>
+          <p:cNvSpPr txBox="1"/>
+          <p:nvPr/>
+        </p:nvSpPr>
+        <p:spPr>
+          <a:xfrm>
+            <a:off x="548640" y="5804154"/>
+            <a:ext cx="2526030" cy="788670"/>
+          </a:xfrm>
+          <a:prstGeom prst="rect">
+            <a:avLst/>
+          </a:prstGeom>
+          <a:noFill/>
+        </p:spPr>
+        <p:txBody>
+          <a:bodyPr wrap="square" anchor="t" lIns="45720" rIns="45720" tIns="27432" bIns="27432">
+            <a:normAutofit/>
+          </a:bodyPr>
+          <a:lstStyle/>
+          <a:p>
+            <a:pPr algn="l"/>
+            <a:r>
+              <a:rPr sz="1100" b="1">
+                <a:solidFill>
+                  <a:srgbClr val="157355"/>
+                </a:solidFill>
+                <a:latin typeface="Bricolage Grotesque"/>
+              </a:rPr>
+              <a:t>canción</a:t>
+            </a:r>
+          </a:p>
+          <a:p>
+            <a:pPr algn="l"/>
+            <a:r>
+              <a:rPr sz="1000">
+                <a:solidFill>
+                  <a:srgbClr val="20242E"/>
+                </a:solidFill>
+                <a:latin typeface="Inter"/>
+              </a:rPr>
+              <a:t>algo para bailar</a:t>
+            </a:r>
+          </a:p>
+        </p:txBody>
+      </p:sp>
+    </p:spTree>
+  </p:cSld>
+  <p:clrMapOvr>
+    <a:masterClrMapping/>
+  </p:clrMapOvr>
+</p:sld>
+</file>
+
+<file path=ppt/slides/slide24.xml><?xml version="1.0" encoding="utf-8"?>
+<p:sld xmlns:a="http://schemas.openxmlformats.org/drawingml/2006/main" xmlns:p="http://schemas.openxmlformats.org/presentationml/2006/main" xmlns:r="http://schemas.openxmlformats.org/officeDocument/2006/relationships">
+  <p:cSld>
+    <p:spTree>
+      <p:nvGrpSpPr>
+        <p:cNvPr id="1" name=""/>
+        <p:cNvGrpSpPr/>
+        <p:nvPr/>
+      </p:nvGrpSpPr>
+      <p:grpSpPr/>
+      <p:sp>
+        <p:nvSpPr>
+          <p:cNvPr id="2" name="Fondo"/>
+          <p:cNvSpPr/>
+          <p:nvPr/>
+        </p:nvSpPr>
+        <p:spPr>
+          <a:xfrm>
+            <a:off x="0" y="0"/>
+            <a:ext cx="12191695" cy="6858000"/>
+          </a:xfrm>
+          <a:prstGeom prst="rect">
+            <a:avLst/>
+          </a:prstGeom>
+          <a:solidFill>
+            <a:srgbClr val="FCFBF8"/>
+          </a:solidFill>
+          <a:ln>
+            <a:noFill/>
+          </a:ln>
+          <a:effectLst/>
+        </p:spPr>
+        <p:style>
+          <a:lnRef idx="1">
+            <a:schemeClr val="accent1"/>
+          </a:lnRef>
+          <a:fillRef idx="3">
+            <a:schemeClr val="accent1"/>
+          </a:fillRef>
+          <a:effectRef idx="2">
+            <a:schemeClr val="accent1"/>
+          </a:effectRef>
+          <a:fontRef idx="minor">
+            <a:schemeClr val="lt1"/>
+          </a:fontRef>
+        </p:style>
+        <p:txBody>
+          <a:bodyPr rtlCol="0" anchor="ctr"/>
+          <a:lstStyle/>
+          <a:p/>
+        </p:txBody>
+      </p:sp>
+      <p:sp>
+        <p:nvSpPr>
+          <p:cNvPr id="3" name="Cabecera"/>
+          <p:cNvSpPr/>
+          <p:nvPr/>
+        </p:nvSpPr>
+        <p:spPr>
+          <a:xfrm>
+            <a:off x="0" y="0"/>
+            <a:ext cx="12191695" cy="1078992"/>
+          </a:xfrm>
+          <a:prstGeom prst="rect">
+            <a:avLst/>
+          </a:prstGeom>
+          <a:solidFill>
+            <a:srgbClr val="1E9E74"/>
+          </a:solidFill>
+          <a:ln>
+            <a:noFill/>
+          </a:ln>
+          <a:effectLst/>
+        </p:spPr>
+        <p:style>
+          <a:lnRef idx="1">
+            <a:schemeClr val="accent1"/>
+          </a:lnRef>
+          <a:fillRef idx="3">
+            <a:schemeClr val="accent1"/>
+          </a:fillRef>
+          <a:effectRef idx="2">
+            <a:schemeClr val="accent1"/>
+          </a:effectRef>
+          <a:fontRef idx="minor">
+            <a:schemeClr val="lt1"/>
+          </a:fontRef>
+        </p:style>
+        <p:txBody>
+          <a:bodyPr rtlCol="0" anchor="ctr"/>
+          <a:lstStyle/>
+          <a:p/>
+        </p:txBody>
+      </p:sp>
+      <p:sp>
+        <p:nvSpPr>
+          <p:cNvPr id="4" name="Chip"/>
+          <p:cNvSpPr/>
+          <p:nvPr/>
+        </p:nvSpPr>
+        <p:spPr>
+          <a:xfrm>
+            <a:off x="457200" y="182880"/>
+            <a:ext cx="3017520" cy="292608"/>
+          </a:xfrm>
+          <a:prstGeom prst="roundRect">
+            <a:avLst>
+              <a:gd name="adj" fmla="val 50000"/>
+            </a:avLst>
+          </a:prstGeom>
+          <a:solidFill>
+            <a:srgbClr val="FFFFFF"/>
+          </a:solidFill>
+          <a:ln>
+            <a:noFill/>
+          </a:ln>
+          <a:effectLst/>
+        </p:spPr>
+        <p:style>
+          <a:lnRef idx="1">
+            <a:schemeClr val="accent1"/>
+          </a:lnRef>
+          <a:fillRef idx="3">
+            <a:schemeClr val="accent1"/>
+          </a:fillRef>
+          <a:effectRef idx="2">
+            <a:schemeClr val="accent1"/>
+          </a:effectRef>
+          <a:fontRef idx="minor">
+            <a:schemeClr val="lt1"/>
+          </a:fontRef>
+        </p:style>
+        <p:txBody>
+          <a:bodyPr rtlCol="0" anchor="ctr"/>
+          <a:lstStyle/>
+          <a:p/>
+        </p:txBody>
+      </p:sp>
+      <p:sp>
+        <p:nvSpPr>
+          <p:cNvPr id="5" name="ChipTxt"/>
+          <p:cNvSpPr txBox="1"/>
+          <p:nvPr/>
+        </p:nvSpPr>
+        <p:spPr>
+          <a:xfrm>
+            <a:off x="457200" y="173736"/>
+            <a:ext cx="3017520" cy="310896"/>
+          </a:xfrm>
+          <a:prstGeom prst="rect">
+            <a:avLst/>
+          </a:prstGeom>
+          <a:noFill/>
+        </p:spPr>
+        <p:txBody>
+          <a:bodyPr wrap="square" anchor="ctr" lIns="45720" rIns="45720" tIns="27432" bIns="27432">
+            <a:normAutofit/>
+          </a:bodyPr>
+          <a:lstStyle/>
+          <a:p>
+            <a:pPr algn="ctr"/>
+            <a:r>
+              <a:rPr sz="950" b="1">
+                <a:solidFill>
+                  <a:srgbClr val="157355"/>
+                </a:solidFill>
+                <a:latin typeface="Inter"/>
+              </a:rPr>
+              <a:t>RETO 8 · PUZZEL &amp; ESCAPE</a:t>
+            </a:r>
+          </a:p>
+        </p:txBody>
+      </p:sp>
+      <p:sp>
+        <p:nvSpPr>
+          <p:cNvPr id="6" name="Titulo"/>
+          <p:cNvSpPr txBox="1"/>
+          <p:nvPr/>
+        </p:nvSpPr>
+        <p:spPr>
+          <a:xfrm>
+            <a:off x="457200" y="502920"/>
+            <a:ext cx="8412480" cy="475488"/>
+          </a:xfrm>
+          <a:prstGeom prst="rect">
+            <a:avLst/>
+          </a:prstGeom>
+          <a:noFill/>
+        </p:spPr>
+        <p:txBody>
+          <a:bodyPr wrap="square" anchor="t" lIns="45720" rIns="45720" tIns="27432" bIns="27432">
+            <a:normAutofit/>
+          </a:bodyPr>
+          <a:lstStyle/>
+          <a:p>
+            <a:pPr algn="l"/>
+            <a:r>
+              <a:rPr sz="2700" b="1">
+                <a:solidFill>
+                  <a:srgbClr val="FFFFFF"/>
+                </a:solidFill>
+                <a:latin typeface="Bricolage Grotesque"/>
+              </a:rPr>
+              <a:t>Cadena rota</a:t>
+            </a:r>
+          </a:p>
+        </p:txBody>
+      </p:sp>
+      <p:sp>
+        <p:nvSpPr>
+          <p:cNvPr id="7" name="Badges"/>
+          <p:cNvSpPr txBox="1"/>
+          <p:nvPr/>
+        </p:nvSpPr>
+        <p:spPr>
+          <a:xfrm>
+            <a:off x="9052560" y="256032"/>
+            <a:ext cx="2651760" cy="640080"/>
+          </a:xfrm>
+          <a:prstGeom prst="rect">
+            <a:avLst/>
+          </a:prstGeom>
+          <a:noFill/>
+        </p:spPr>
+        <p:txBody>
+          <a:bodyPr wrap="square" anchor="t" lIns="45720" rIns="45720" tIns="27432" bIns="27432">
+            <a:normAutofit/>
+          </a:bodyPr>
+          <a:lstStyle/>
+          <a:p>
+            <a:pPr algn="r"/>
+            <a:r>
+              <a:rPr sz="1000">
+                <a:solidFill>
+                  <a:srgbClr val="E4F4EE"/>
+                </a:solidFill>
+                <a:latin typeface="Inter"/>
+              </a:rPr>
+              <a:t>🏫 Toda la clase</a:t>
+            </a:r>
+          </a:p>
+          <a:p>
+            <a:pPr algn="r"/>
+            <a:r>
+              <a:rPr sz="1000">
+                <a:solidFill>
+                  <a:srgbClr val="E4F4EE"/>
+                </a:solidFill>
+                <a:latin typeface="Inter"/>
+              </a:rPr>
+              <a:t>± 10 min · ★★★</a:t>
+            </a:r>
+          </a:p>
+        </p:txBody>
+      </p:sp>
+      <p:sp>
+        <p:nvSpPr>
+          <p:cNvPr id="8" name="Gancho"/>
+          <p:cNvSpPr txBox="1"/>
+          <p:nvPr/>
+        </p:nvSpPr>
+        <p:spPr>
+          <a:xfrm>
+            <a:off x="457200" y="1225296"/>
+            <a:ext cx="11274552" cy="566928"/>
+          </a:xfrm>
+          <a:prstGeom prst="rect">
+            <a:avLst/>
+          </a:prstGeom>
+          <a:noFill/>
+        </p:spPr>
+        <p:txBody>
+          <a:bodyPr wrap="square" anchor="t" lIns="45720" rIns="45720" tIns="27432" bIns="27432">
+            <a:normAutofit/>
+          </a:bodyPr>
+          <a:lstStyle/>
+          <a:p>
+            <a:pPr algn="l"/>
+            <a:r>
+              <a:rPr sz="1600" b="1">
+                <a:solidFill>
+                  <a:srgbClr val="157355"/>
+                </a:solidFill>
+                <a:latin typeface="Bricolage Grotesque"/>
+              </a:rPr>
+              <a:t>La cadena da la vuelta a la clase. Si se rompe, vuelve a empezar.</a:t>
+            </a:r>
+          </a:p>
+          <a:p>
+            <a:pPr algn="l"/>
+            <a:r>
+              <a:rPr sz="1100" i="1">
+                <a:solidFill>
+                  <a:srgbClr val="6A6E78"/>
+                </a:solidFill>
+                <a:latin typeface="Inter"/>
+              </a:rPr>
+              <a:t>De ketting gaat de klas rond. Breekt hij, dan begin je opnieuw.</a:t>
+            </a:r>
+          </a:p>
+        </p:txBody>
+      </p:sp>
+      <p:sp>
+        <p:nvSpPr>
+          <p:cNvPr id="9" name="ReglaCaja"/>
+          <p:cNvSpPr/>
+          <p:nvPr/>
+        </p:nvSpPr>
+        <p:spPr>
+          <a:xfrm>
+            <a:off x="457200" y="1847088"/>
+            <a:ext cx="11274552" cy="658368"/>
+          </a:xfrm>
+          <a:prstGeom prst="roundRect">
+            <a:avLst>
+              <a:gd name="adj" fmla="val 5000"/>
+            </a:avLst>
+          </a:prstGeom>
+          <a:solidFill>
+            <a:srgbClr val="FBF3D6"/>
+          </a:solidFill>
+          <a:ln>
+            <a:noFill/>
+          </a:ln>
+          <a:effectLst/>
+        </p:spPr>
+        <p:style>
+          <a:lnRef idx="1">
+            <a:schemeClr val="accent1"/>
+          </a:lnRef>
+          <a:fillRef idx="3">
+            <a:schemeClr val="accent1"/>
+          </a:fillRef>
+          <a:effectRef idx="2">
+            <a:schemeClr val="accent1"/>
+          </a:effectRef>
+          <a:fontRef idx="minor">
+            <a:schemeClr val="lt1"/>
+          </a:fontRef>
+        </p:style>
+        <p:txBody>
+          <a:bodyPr rtlCol="0" anchor="ctr"/>
+          <a:lstStyle/>
+          <a:p/>
+        </p:txBody>
+      </p:sp>
+      <p:sp>
+        <p:nvSpPr>
+          <p:cNvPr id="10" name="ReglaTxt"/>
+          <p:cNvSpPr txBox="1"/>
+          <p:nvPr/>
+        </p:nvSpPr>
+        <p:spPr>
+          <a:xfrm>
+            <a:off x="603504" y="1883664"/>
+            <a:ext cx="10972800" cy="585216"/>
+          </a:xfrm>
+          <a:prstGeom prst="rect">
+            <a:avLst/>
+          </a:prstGeom>
+          <a:noFill/>
+        </p:spPr>
+        <p:txBody>
+          <a:bodyPr wrap="square" anchor="t" lIns="45720" rIns="45720" tIns="27432" bIns="27432">
+            <a:normAutofit/>
+          </a:bodyPr>
+          <a:lstStyle/>
+          <a:p>
+            <a:pPr algn="l"/>
+            <a:r>
+              <a:rPr sz="850" b="1">
+                <a:solidFill>
+                  <a:srgbClr val="B7860B"/>
+                </a:solidFill>
+                <a:latin typeface="Inter"/>
+              </a:rPr>
+              <a:t>LA REGLA DEL RETO</a:t>
+            </a:r>
+          </a:p>
+          <a:p>
+            <a:pPr algn="l"/>
+            <a:r>
+              <a:rPr sz="1100">
+                <a:solidFill>
+                  <a:srgbClr val="20242E"/>
+                </a:solidFill>
+                <a:latin typeface="Inter"/>
+              </a:rPr>
+              <a:t>Een reactie die al gebruikt is, breekt de ketting — ook als ze klopt. De klas moet dus bijhouden wat al voorbijkwam.</a:t>
+            </a:r>
+          </a:p>
+        </p:txBody>
+      </p:sp>
+      <p:sp>
+        <p:nvSpPr>
+          <p:cNvPr id="11" name="Tarjeta 0"/>
+          <p:cNvSpPr/>
+          <p:nvPr/>
+        </p:nvSpPr>
+        <p:spPr>
+          <a:xfrm>
+            <a:off x="457200" y="2670048"/>
+            <a:ext cx="2708910" cy="1170432"/>
+          </a:xfrm>
+          <a:prstGeom prst="roundRect">
+            <a:avLst>
+              <a:gd name="adj" fmla="val 6000"/>
+            </a:avLst>
+          </a:prstGeom>
+          <a:solidFill>
+            <a:srgbClr val="FFFFFF"/>
+          </a:solidFill>
+          <a:ln w="12700">
+            <a:solidFill>
+              <a:srgbClr val="E4E3DE"/>
+            </a:solidFill>
+          </a:ln>
+          <a:effectLst/>
+        </p:spPr>
+        <p:style>
+          <a:lnRef idx="1">
+            <a:schemeClr val="accent1"/>
+          </a:lnRef>
+          <a:fillRef idx="3">
+            <a:schemeClr val="accent1"/>
+          </a:fillRef>
+          <a:effectRef idx="2">
+            <a:schemeClr val="accent1"/>
+          </a:effectRef>
+          <a:fontRef idx="minor">
+            <a:schemeClr val="lt1"/>
+          </a:fontRef>
+        </p:style>
+        <p:txBody>
+          <a:bodyPr rtlCol="0" anchor="ctr"/>
+          <a:lstStyle/>
+          <a:p/>
+        </p:txBody>
+      </p:sp>
+      <p:sp>
+        <p:nvSpPr>
+          <p:cNvPr id="12" name="TarjetaTxt 0"/>
+          <p:cNvSpPr txBox="1"/>
+          <p:nvPr/>
+        </p:nvSpPr>
+        <p:spPr>
+          <a:xfrm>
+            <a:off x="548640" y="2724912"/>
+            <a:ext cx="2526030" cy="1060704"/>
+          </a:xfrm>
+          <a:prstGeom prst="rect">
+            <a:avLst/>
+          </a:prstGeom>
+          <a:noFill/>
+        </p:spPr>
+        <p:txBody>
+          <a:bodyPr wrap="square" anchor="t" lIns="45720" rIns="45720" tIns="27432" bIns="27432">
+            <a:normAutofit/>
+          </a:bodyPr>
+          <a:lstStyle/>
+          <a:p>
+            <a:pPr algn="l"/>
+            <a:r>
+              <a:rPr sz="1100" b="1">
+                <a:solidFill>
+                  <a:srgbClr val="157355"/>
+                </a:solidFill>
+                <a:latin typeface="Bricolage Grotesque"/>
+              </a:rPr>
+              <a:t>Arranque</a:t>
+            </a:r>
+          </a:p>
+          <a:p>
+            <a:pPr algn="l"/>
+            <a:r>
+              <a:rPr sz="1000">
+                <a:solidFill>
+                  <a:srgbClr val="20242E"/>
+                </a:solidFill>
+                <a:latin typeface="Inter"/>
+              </a:rPr>
+              <a:t>Me gusta la playa.</a:t>
+            </a:r>
+          </a:p>
+        </p:txBody>
+      </p:sp>
+      <p:sp>
+        <p:nvSpPr>
+          <p:cNvPr id="13" name="Tarjeta 1"/>
+          <p:cNvSpPr/>
+          <p:nvPr/>
+        </p:nvSpPr>
+        <p:spPr>
+          <a:xfrm>
+            <a:off x="3312414" y="2670048"/>
+            <a:ext cx="2708910" cy="1170432"/>
+          </a:xfrm>
+          <a:prstGeom prst="roundRect">
+            <a:avLst>
+              <a:gd name="adj" fmla="val 6000"/>
+            </a:avLst>
+          </a:prstGeom>
+          <a:solidFill>
+            <a:srgbClr val="FFFFFF"/>
+          </a:solidFill>
+          <a:ln w="12700">
+            <a:solidFill>
+              <a:srgbClr val="E4E3DE"/>
+            </a:solidFill>
+          </a:ln>
+          <a:effectLst/>
+        </p:spPr>
+        <p:style>
+          <a:lnRef idx="1">
+            <a:schemeClr val="accent1"/>
+          </a:lnRef>
+          <a:fillRef idx="3">
+            <a:schemeClr val="accent1"/>
+          </a:fillRef>
+          <a:effectRef idx="2">
+            <a:schemeClr val="accent1"/>
+          </a:effectRef>
+          <a:fontRef idx="minor">
+            <a:schemeClr val="lt1"/>
+          </a:fontRef>
+        </p:style>
+        <p:txBody>
+          <a:bodyPr rtlCol="0" anchor="ctr"/>
+          <a:lstStyle/>
+          <a:p/>
+        </p:txBody>
+      </p:sp>
+      <p:sp>
+        <p:nvSpPr>
+          <p:cNvPr id="14" name="TarjetaTxt 1"/>
+          <p:cNvSpPr txBox="1"/>
+          <p:nvPr/>
+        </p:nvSpPr>
+        <p:spPr>
+          <a:xfrm>
+            <a:off x="3403854" y="2724912"/>
+            <a:ext cx="2526030" cy="1060704"/>
+          </a:xfrm>
+          <a:prstGeom prst="rect">
+            <a:avLst/>
+          </a:prstGeom>
+          <a:noFill/>
+        </p:spPr>
+        <p:txBody>
+          <a:bodyPr wrap="square" anchor="t" lIns="45720" rIns="45720" tIns="27432" bIns="27432">
+            <a:normAutofit/>
+          </a:bodyPr>
+          <a:lstStyle/>
+          <a:p>
+            <a:pPr algn="l"/>
+            <a:r>
+              <a:rPr sz="1100" b="1">
+                <a:solidFill>
+                  <a:srgbClr val="157355"/>
+                </a:solidFill>
+                <a:latin typeface="Bricolage Grotesque"/>
+              </a:rPr>
+              <a:t>Arranque</a:t>
+            </a:r>
+          </a:p>
+          <a:p>
+            <a:pPr algn="l"/>
+            <a:r>
+              <a:rPr sz="1000">
+                <a:solidFill>
+                  <a:srgbClr val="20242E"/>
+                </a:solidFill>
+                <a:latin typeface="Inter"/>
+              </a:rPr>
+              <a:t>No me gusta madrugar.</a:t>
+            </a:r>
+          </a:p>
+        </p:txBody>
+      </p:sp>
+      <p:sp>
+        <p:nvSpPr>
+          <p:cNvPr id="15" name="Tarjeta 2"/>
+          <p:cNvSpPr/>
+          <p:nvPr/>
+        </p:nvSpPr>
+        <p:spPr>
+          <a:xfrm>
+            <a:off x="6167628" y="2670048"/>
+            <a:ext cx="2708910" cy="1170432"/>
+          </a:xfrm>
+          <a:prstGeom prst="roundRect">
+            <a:avLst>
+              <a:gd name="adj" fmla="val 6000"/>
+            </a:avLst>
+          </a:prstGeom>
+          <a:solidFill>
+            <a:srgbClr val="FFFFFF"/>
+          </a:solidFill>
+          <a:ln w="12700">
+            <a:solidFill>
+              <a:srgbClr val="E4E3DE"/>
+            </a:solidFill>
+          </a:ln>
+          <a:effectLst/>
+        </p:spPr>
+        <p:style>
+          <a:lnRef idx="1">
+            <a:schemeClr val="accent1"/>
+          </a:lnRef>
+          <a:fillRef idx="3">
+            <a:schemeClr val="accent1"/>
+          </a:fillRef>
+          <a:effectRef idx="2">
+            <a:schemeClr val="accent1"/>
+          </a:effectRef>
+          <a:fontRef idx="minor">
+            <a:schemeClr val="lt1"/>
+          </a:fontRef>
+        </p:style>
+        <p:txBody>
+          <a:bodyPr rtlCol="0" anchor="ctr"/>
+          <a:lstStyle/>
+          <a:p/>
+        </p:txBody>
+      </p:sp>
+      <p:sp>
+        <p:nvSpPr>
+          <p:cNvPr id="16" name="TarjetaTxt 2"/>
+          <p:cNvSpPr txBox="1"/>
+          <p:nvPr/>
+        </p:nvSpPr>
+        <p:spPr>
+          <a:xfrm>
+            <a:off x="6259068" y="2724912"/>
+            <a:ext cx="2526030" cy="1060704"/>
+          </a:xfrm>
+          <a:prstGeom prst="rect">
+            <a:avLst/>
+          </a:prstGeom>
+          <a:noFill/>
+        </p:spPr>
+        <p:txBody>
+          <a:bodyPr wrap="square" anchor="t" lIns="45720" rIns="45720" tIns="27432" bIns="27432">
+            <a:normAutofit/>
+          </a:bodyPr>
+          <a:lstStyle/>
+          <a:p>
+            <a:pPr algn="l"/>
+            <a:r>
+              <a:rPr sz="1100" b="1">
+                <a:solidFill>
+                  <a:srgbClr val="157355"/>
+                </a:solidFill>
+                <a:latin typeface="Bricolage Grotesque"/>
+              </a:rPr>
+              <a:t>Arranque</a:t>
+            </a:r>
+          </a:p>
+          <a:p>
+            <a:pPr algn="l"/>
+            <a:r>
+              <a:rPr sz="1000">
+                <a:solidFill>
+                  <a:srgbClr val="20242E"/>
+                </a:solidFill>
+                <a:latin typeface="Inter"/>
+              </a:rPr>
+              <a:t>Me encantan los viajes.</a:t>
+            </a:r>
+          </a:p>
+        </p:txBody>
+      </p:sp>
+      <p:sp>
+        <p:nvSpPr>
+          <p:cNvPr id="17" name="Tarjeta 3"/>
+          <p:cNvSpPr/>
+          <p:nvPr/>
+        </p:nvSpPr>
+        <p:spPr>
+          <a:xfrm>
+            <a:off x="9022842" y="2670048"/>
+            <a:ext cx="2708910" cy="1170432"/>
+          </a:xfrm>
+          <a:prstGeom prst="roundRect">
+            <a:avLst>
+              <a:gd name="adj" fmla="val 6000"/>
+            </a:avLst>
+          </a:prstGeom>
+          <a:solidFill>
+            <a:srgbClr val="FFFFFF"/>
+          </a:solidFill>
+          <a:ln w="12700">
+            <a:solidFill>
+              <a:srgbClr val="E4E3DE"/>
+            </a:solidFill>
+          </a:ln>
+          <a:effectLst/>
+        </p:spPr>
+        <p:style>
+          <a:lnRef idx="1">
+            <a:schemeClr val="accent1"/>
+          </a:lnRef>
+          <a:fillRef idx="3">
+            <a:schemeClr val="accent1"/>
+          </a:fillRef>
+          <a:effectRef idx="2">
+            <a:schemeClr val="accent1"/>
+          </a:effectRef>
+          <a:fontRef idx="minor">
+            <a:schemeClr val="lt1"/>
+          </a:fontRef>
+        </p:style>
+        <p:txBody>
+          <a:bodyPr rtlCol="0" anchor="ctr"/>
+          <a:lstStyle/>
+          <a:p/>
+        </p:txBody>
+      </p:sp>
+      <p:sp>
+        <p:nvSpPr>
+          <p:cNvPr id="18" name="TarjetaTxt 3"/>
+          <p:cNvSpPr txBox="1"/>
+          <p:nvPr/>
+        </p:nvSpPr>
+        <p:spPr>
+          <a:xfrm>
+            <a:off x="9114282" y="2724912"/>
+            <a:ext cx="2526030" cy="1060704"/>
+          </a:xfrm>
+          <a:prstGeom prst="rect">
+            <a:avLst/>
+          </a:prstGeom>
+          <a:noFill/>
+        </p:spPr>
+        <p:txBody>
+          <a:bodyPr wrap="square" anchor="t" lIns="45720" rIns="45720" tIns="27432" bIns="27432">
+            <a:normAutofit/>
+          </a:bodyPr>
+          <a:lstStyle/>
+          <a:p>
+            <a:pPr algn="l"/>
+            <a:r>
+              <a:rPr sz="1100" b="1">
+                <a:solidFill>
+                  <a:srgbClr val="157355"/>
+                </a:solidFill>
+                <a:latin typeface="Bricolage Grotesque"/>
+              </a:rPr>
+              <a:t>Arranque</a:t>
+            </a:r>
+          </a:p>
+          <a:p>
+            <a:pPr algn="l"/>
+            <a:r>
+              <a:rPr sz="1000">
+                <a:solidFill>
+                  <a:srgbClr val="20242E"/>
+                </a:solidFill>
+                <a:latin typeface="Inter"/>
+              </a:rPr>
+              <a:t>No me gustan los lunes.</a:t>
+            </a:r>
+          </a:p>
+        </p:txBody>
+      </p:sp>
+      <p:sp>
+        <p:nvSpPr>
+          <p:cNvPr id="19" name="Tarjeta 4"/>
+          <p:cNvSpPr/>
+          <p:nvPr/>
+        </p:nvSpPr>
+        <p:spPr>
+          <a:xfrm>
+            <a:off x="457200" y="3968496"/>
+            <a:ext cx="2708910" cy="1170432"/>
+          </a:xfrm>
+          <a:prstGeom prst="roundRect">
+            <a:avLst>
+              <a:gd name="adj" fmla="val 6000"/>
+            </a:avLst>
+          </a:prstGeom>
+          <a:solidFill>
+            <a:srgbClr val="FFFFFF"/>
+          </a:solidFill>
+          <a:ln w="12700">
+            <a:solidFill>
+              <a:srgbClr val="E4E3DE"/>
+            </a:solidFill>
+          </a:ln>
+          <a:effectLst/>
+        </p:spPr>
+        <p:style>
+          <a:lnRef idx="1">
+            <a:schemeClr val="accent1"/>
+          </a:lnRef>
+          <a:fillRef idx="3">
+            <a:schemeClr val="accent1"/>
+          </a:fillRef>
+          <a:effectRef idx="2">
+            <a:schemeClr val="accent1"/>
+          </a:effectRef>
+          <a:fontRef idx="minor">
+            <a:schemeClr val="lt1"/>
+          </a:fontRef>
+        </p:style>
+        <p:txBody>
+          <a:bodyPr rtlCol="0" anchor="ctr"/>
+          <a:lstStyle/>
+          <a:p/>
+        </p:txBody>
+      </p:sp>
+      <p:sp>
+        <p:nvSpPr>
+          <p:cNvPr id="20" name="TarjetaTxt 4"/>
+          <p:cNvSpPr txBox="1"/>
+          <p:nvPr/>
+        </p:nvSpPr>
+        <p:spPr>
+          <a:xfrm>
+            <a:off x="548640" y="4023360"/>
+            <a:ext cx="2526030" cy="859536"/>
+          </a:xfrm>
+          <a:prstGeom prst="rect">
+            <a:avLst/>
+          </a:prstGeom>
+          <a:noFill/>
+        </p:spPr>
+        <p:txBody>
+          <a:bodyPr wrap="square" anchor="t" lIns="45720" rIns="45720" tIns="27432" bIns="27432">
+            <a:normAutofit/>
+          </a:bodyPr>
+          <a:lstStyle/>
+          <a:p>
+            <a:pPr algn="l"/>
+            <a:r>
+              <a:rPr sz="1100" b="1">
+                <a:solidFill>
+                  <a:srgbClr val="157355"/>
+                </a:solidFill>
+                <a:latin typeface="Bricolage Grotesque"/>
+              </a:rPr>
+              <a:t>reacción</a:t>
+            </a:r>
+          </a:p>
+          <a:p>
+            <a:pPr algn="l"/>
+            <a:r>
+              <a:rPr sz="1000">
+                <a:solidFill>
+                  <a:srgbClr val="20242E"/>
+                </a:solidFill>
+                <a:latin typeface="Inter"/>
+              </a:rPr>
+              <a:t>A mí también.</a:t>
+            </a:r>
+          </a:p>
+        </p:txBody>
+      </p:sp>
+      <p:sp>
+        <p:nvSpPr>
+          <p:cNvPr id="21" name="Onthul 4"/>
+          <p:cNvSpPr/>
+          <p:nvPr/>
+        </p:nvSpPr>
+        <p:spPr>
+          <a:xfrm>
+            <a:off x="548640" y="4846320"/>
+            <a:ext cx="2526030" cy="237744"/>
+          </a:xfrm>
+          <a:prstGeom prst="roundRect">
+            <a:avLst>
+              <a:gd name="adj" fmla="val 20000"/>
+            </a:avLst>
+          </a:prstGeom>
+          <a:solidFill>
+            <a:srgbClr val="E4F4EE"/>
+          </a:solidFill>
+          <a:ln>
+            <a:noFill/>
+          </a:ln>
+          <a:effectLst/>
+        </p:spPr>
+        <p:style>
+          <a:lnRef idx="1">
+            <a:schemeClr val="accent1"/>
+          </a:lnRef>
+          <a:fillRef idx="3">
+            <a:schemeClr val="accent1"/>
+          </a:fillRef>
+          <a:effectRef idx="2">
+            <a:schemeClr val="accent1"/>
+          </a:effectRef>
+          <a:fontRef idx="minor">
+            <a:schemeClr val="lt1"/>
+          </a:fontRef>
+        </p:style>
+        <p:txBody>
+          <a:bodyPr rtlCol="0" anchor="ctr"/>
+          <a:lstStyle/>
+          <a:p/>
+        </p:txBody>
+      </p:sp>
+      <p:sp>
+        <p:nvSpPr>
+          <p:cNvPr id="22" name="OnthulTxt 4"/>
+          <p:cNvSpPr txBox="1"/>
+          <p:nvPr/>
+        </p:nvSpPr>
+        <p:spPr>
+          <a:xfrm>
+            <a:off x="566928" y="4846320"/>
+            <a:ext cx="2489454" cy="237744"/>
+          </a:xfrm>
+          <a:prstGeom prst="rect">
+            <a:avLst/>
+          </a:prstGeom>
+          <a:noFill/>
+        </p:spPr>
+        <p:txBody>
+          <a:bodyPr wrap="square" anchor="ctr" lIns="45720" rIns="45720" tIns="27432" bIns="27432">
+            <a:normAutofit/>
+          </a:bodyPr>
+          <a:lstStyle/>
+          <a:p>
+            <a:pPr algn="l"/>
+            <a:r>
+              <a:rPr sz="850" b="1">
+                <a:solidFill>
+                  <a:srgbClr val="157355"/>
+                </a:solidFill>
+                <a:latin typeface="Inter"/>
+              </a:rPr>
+              <a:t>usada ✗</a:t>
+            </a:r>
+          </a:p>
+        </p:txBody>
+      </p:sp>
+      <p:sp>
+        <p:nvSpPr>
+          <p:cNvPr id="23" name="Tarjeta 5"/>
+          <p:cNvSpPr/>
+          <p:nvPr/>
+        </p:nvSpPr>
+        <p:spPr>
+          <a:xfrm>
+            <a:off x="3312414" y="3968496"/>
+            <a:ext cx="2708910" cy="1170432"/>
+          </a:xfrm>
+          <a:prstGeom prst="roundRect">
+            <a:avLst>
+              <a:gd name="adj" fmla="val 6000"/>
+            </a:avLst>
+          </a:prstGeom>
+          <a:solidFill>
+            <a:srgbClr val="FFFFFF"/>
+          </a:solidFill>
+          <a:ln w="12700">
+            <a:solidFill>
+              <a:srgbClr val="E4E3DE"/>
+            </a:solidFill>
+          </a:ln>
+          <a:effectLst/>
+        </p:spPr>
+        <p:style>
+          <a:lnRef idx="1">
+            <a:schemeClr val="accent1"/>
+          </a:lnRef>
+          <a:fillRef idx="3">
+            <a:schemeClr val="accent1"/>
+          </a:fillRef>
+          <a:effectRef idx="2">
+            <a:schemeClr val="accent1"/>
+          </a:effectRef>
+          <a:fontRef idx="minor">
+            <a:schemeClr val="lt1"/>
+          </a:fontRef>
+        </p:style>
+        <p:txBody>
+          <a:bodyPr rtlCol="0" anchor="ctr"/>
+          <a:lstStyle/>
+          <a:p/>
+        </p:txBody>
+      </p:sp>
+      <p:sp>
+        <p:nvSpPr>
+          <p:cNvPr id="24" name="TarjetaTxt 5"/>
+          <p:cNvSpPr txBox="1"/>
+          <p:nvPr/>
+        </p:nvSpPr>
+        <p:spPr>
+          <a:xfrm>
+            <a:off x="3403854" y="4023360"/>
+            <a:ext cx="2526030" cy="859536"/>
+          </a:xfrm>
+          <a:prstGeom prst="rect">
+            <a:avLst/>
+          </a:prstGeom>
+          <a:noFill/>
+        </p:spPr>
+        <p:txBody>
+          <a:bodyPr wrap="square" anchor="t" lIns="45720" rIns="45720" tIns="27432" bIns="27432">
+            <a:normAutofit/>
+          </a:bodyPr>
+          <a:lstStyle/>
+          <a:p>
+            <a:pPr algn="l"/>
+            <a:r>
+              <a:rPr sz="1100" b="1">
+                <a:solidFill>
+                  <a:srgbClr val="157355"/>
+                </a:solidFill>
+                <a:latin typeface="Bricolage Grotesque"/>
+              </a:rPr>
+              <a:t>reacción</a:t>
+            </a:r>
+          </a:p>
+          <a:p>
+            <a:pPr algn="l"/>
+            <a:r>
+              <a:rPr sz="1000">
+                <a:solidFill>
+                  <a:srgbClr val="20242E"/>
+                </a:solidFill>
+                <a:latin typeface="Inter"/>
+              </a:rPr>
+              <a:t>A mí tampoco.</a:t>
+            </a:r>
+          </a:p>
+        </p:txBody>
+      </p:sp>
+      <p:sp>
+        <p:nvSpPr>
+          <p:cNvPr id="25" name="Onthul 5"/>
+          <p:cNvSpPr/>
+          <p:nvPr/>
+        </p:nvSpPr>
+        <p:spPr>
+          <a:xfrm>
+            <a:off x="3403854" y="4846320"/>
+            <a:ext cx="2526030" cy="237744"/>
+          </a:xfrm>
+          <a:prstGeom prst="roundRect">
+            <a:avLst>
+              <a:gd name="adj" fmla="val 20000"/>
+            </a:avLst>
+          </a:prstGeom>
+          <a:solidFill>
+            <a:srgbClr val="E4F4EE"/>
+          </a:solidFill>
+          <a:ln>
+            <a:noFill/>
+          </a:ln>
+          <a:effectLst/>
+        </p:spPr>
+        <p:style>
+          <a:lnRef idx="1">
+            <a:schemeClr val="accent1"/>
+          </a:lnRef>
+          <a:fillRef idx="3">
+            <a:schemeClr val="accent1"/>
+          </a:fillRef>
+          <a:effectRef idx="2">
+            <a:schemeClr val="accent1"/>
+          </a:effectRef>
+          <a:fontRef idx="minor">
+            <a:schemeClr val="lt1"/>
+          </a:fontRef>
+        </p:style>
+        <p:txBody>
+          <a:bodyPr rtlCol="0" anchor="ctr"/>
+          <a:lstStyle/>
+          <a:p/>
+        </p:txBody>
+      </p:sp>
+      <p:sp>
+        <p:nvSpPr>
+          <p:cNvPr id="26" name="OnthulTxt 5"/>
+          <p:cNvSpPr txBox="1"/>
+          <p:nvPr/>
+        </p:nvSpPr>
+        <p:spPr>
+          <a:xfrm>
+            <a:off x="3422142" y="4846320"/>
+            <a:ext cx="2489454" cy="237744"/>
+          </a:xfrm>
+          <a:prstGeom prst="rect">
+            <a:avLst/>
+          </a:prstGeom>
+          <a:noFill/>
+        </p:spPr>
+        <p:txBody>
+          <a:bodyPr wrap="square" anchor="ctr" lIns="45720" rIns="45720" tIns="27432" bIns="27432">
+            <a:normAutofit/>
+          </a:bodyPr>
+          <a:lstStyle/>
+          <a:p>
+            <a:pPr algn="l"/>
+            <a:r>
+              <a:rPr sz="850" b="1">
+                <a:solidFill>
+                  <a:srgbClr val="157355"/>
+                </a:solidFill>
+                <a:latin typeface="Inter"/>
+              </a:rPr>
+              <a:t>usada ✗</a:t>
+            </a:r>
+          </a:p>
+        </p:txBody>
+      </p:sp>
+      <p:sp>
+        <p:nvSpPr>
+          <p:cNvPr id="27" name="Tarjeta 6"/>
+          <p:cNvSpPr/>
+          <p:nvPr/>
+        </p:nvSpPr>
+        <p:spPr>
+          <a:xfrm>
+            <a:off x="6167628" y="3968496"/>
+            <a:ext cx="2708910" cy="1170432"/>
+          </a:xfrm>
+          <a:prstGeom prst="roundRect">
+            <a:avLst>
+              <a:gd name="adj" fmla="val 6000"/>
+            </a:avLst>
+          </a:prstGeom>
+          <a:solidFill>
+            <a:srgbClr val="FFFFFF"/>
+          </a:solidFill>
+          <a:ln w="12700">
+            <a:solidFill>
+              <a:srgbClr val="E4E3DE"/>
+            </a:solidFill>
+          </a:ln>
+          <a:effectLst/>
+        </p:spPr>
+        <p:style>
+          <a:lnRef idx="1">
+            <a:schemeClr val="accent1"/>
+          </a:lnRef>
+          <a:fillRef idx="3">
+            <a:schemeClr val="accent1"/>
+          </a:fillRef>
+          <a:effectRef idx="2">
+            <a:schemeClr val="accent1"/>
+          </a:effectRef>
+          <a:fontRef idx="minor">
+            <a:schemeClr val="lt1"/>
+          </a:fontRef>
+        </p:style>
+        <p:txBody>
+          <a:bodyPr rtlCol="0" anchor="ctr"/>
+          <a:lstStyle/>
+          <a:p/>
+        </p:txBody>
+      </p:sp>
+      <p:sp>
+        <p:nvSpPr>
+          <p:cNvPr id="28" name="TarjetaTxt 6"/>
+          <p:cNvSpPr txBox="1"/>
+          <p:nvPr/>
+        </p:nvSpPr>
+        <p:spPr>
+          <a:xfrm>
+            <a:off x="6259068" y="4023360"/>
+            <a:ext cx="2526030" cy="859536"/>
+          </a:xfrm>
+          <a:prstGeom prst="rect">
+            <a:avLst/>
+          </a:prstGeom>
+          <a:noFill/>
+        </p:spPr>
+        <p:txBody>
+          <a:bodyPr wrap="square" anchor="t" lIns="45720" rIns="45720" tIns="27432" bIns="27432">
+            <a:normAutofit/>
+          </a:bodyPr>
+          <a:lstStyle/>
+          <a:p>
+            <a:pPr algn="l"/>
+            <a:r>
+              <a:rPr sz="1100" b="1">
+                <a:solidFill>
+                  <a:srgbClr val="157355"/>
+                </a:solidFill>
+                <a:latin typeface="Bricolage Grotesque"/>
+              </a:rPr>
+              <a:t>reacción</a:t>
+            </a:r>
+          </a:p>
+          <a:p>
+            <a:pPr algn="l"/>
+            <a:r>
+              <a:rPr sz="1000">
+                <a:solidFill>
+                  <a:srgbClr val="20242E"/>
+                </a:solidFill>
+                <a:latin typeface="Inter"/>
+              </a:rPr>
+              <a:t>A mí sí.</a:t>
+            </a:r>
+          </a:p>
+        </p:txBody>
+      </p:sp>
+      <p:sp>
+        <p:nvSpPr>
+          <p:cNvPr id="29" name="Onthul 6"/>
+          <p:cNvSpPr/>
+          <p:nvPr/>
+        </p:nvSpPr>
+        <p:spPr>
+          <a:xfrm>
+            <a:off x="6259068" y="4846320"/>
+            <a:ext cx="2526030" cy="237744"/>
+          </a:xfrm>
+          <a:prstGeom prst="roundRect">
+            <a:avLst>
+              <a:gd name="adj" fmla="val 20000"/>
+            </a:avLst>
+          </a:prstGeom>
+          <a:solidFill>
+            <a:srgbClr val="E4F4EE"/>
+          </a:solidFill>
+          <a:ln>
+            <a:noFill/>
+          </a:ln>
+          <a:effectLst/>
+        </p:spPr>
+        <p:style>
+          <a:lnRef idx="1">
+            <a:schemeClr val="accent1"/>
+          </a:lnRef>
+          <a:fillRef idx="3">
+            <a:schemeClr val="accent1"/>
+          </a:fillRef>
+          <a:effectRef idx="2">
+            <a:schemeClr val="accent1"/>
+          </a:effectRef>
+          <a:fontRef idx="minor">
+            <a:schemeClr val="lt1"/>
+          </a:fontRef>
+        </p:style>
+        <p:txBody>
+          <a:bodyPr rtlCol="0" anchor="ctr"/>
+          <a:lstStyle/>
+          <a:p/>
+        </p:txBody>
+      </p:sp>
+      <p:sp>
+        <p:nvSpPr>
+          <p:cNvPr id="30" name="OnthulTxt 6"/>
+          <p:cNvSpPr txBox="1"/>
+          <p:nvPr/>
+        </p:nvSpPr>
+        <p:spPr>
+          <a:xfrm>
+            <a:off x="6277356" y="4846320"/>
+            <a:ext cx="2489454" cy="237744"/>
+          </a:xfrm>
+          <a:prstGeom prst="rect">
+            <a:avLst/>
+          </a:prstGeom>
+          <a:noFill/>
+        </p:spPr>
+        <p:txBody>
+          <a:bodyPr wrap="square" anchor="ctr" lIns="45720" rIns="45720" tIns="27432" bIns="27432">
+            <a:normAutofit/>
+          </a:bodyPr>
+          <a:lstStyle/>
+          <a:p>
+            <a:pPr algn="l"/>
+            <a:r>
+              <a:rPr sz="850" b="1">
+                <a:solidFill>
+                  <a:srgbClr val="157355"/>
+                </a:solidFill>
+                <a:latin typeface="Inter"/>
+              </a:rPr>
+              <a:t>usada ✗</a:t>
+            </a:r>
+          </a:p>
+        </p:txBody>
+      </p:sp>
+      <p:sp>
+        <p:nvSpPr>
+          <p:cNvPr id="31" name="Tarjeta 7"/>
+          <p:cNvSpPr/>
+          <p:nvPr/>
+        </p:nvSpPr>
+        <p:spPr>
+          <a:xfrm>
+            <a:off x="9022842" y="3968496"/>
+            <a:ext cx="2708910" cy="1170432"/>
+          </a:xfrm>
+          <a:prstGeom prst="roundRect">
+            <a:avLst>
+              <a:gd name="adj" fmla="val 6000"/>
+            </a:avLst>
+          </a:prstGeom>
+          <a:solidFill>
+            <a:srgbClr val="FFFFFF"/>
+          </a:solidFill>
+          <a:ln w="12700">
+            <a:solidFill>
+              <a:srgbClr val="E4E3DE"/>
+            </a:solidFill>
+          </a:ln>
+          <a:effectLst/>
+        </p:spPr>
+        <p:style>
+          <a:lnRef idx="1">
+            <a:schemeClr val="accent1"/>
+          </a:lnRef>
+          <a:fillRef idx="3">
+            <a:schemeClr val="accent1"/>
+          </a:fillRef>
+          <a:effectRef idx="2">
+            <a:schemeClr val="accent1"/>
+          </a:effectRef>
+          <a:fontRef idx="minor">
+            <a:schemeClr val="lt1"/>
+          </a:fontRef>
+        </p:style>
+        <p:txBody>
+          <a:bodyPr rtlCol="0" anchor="ctr"/>
+          <a:lstStyle/>
+          <a:p/>
+        </p:txBody>
+      </p:sp>
+      <p:sp>
+        <p:nvSpPr>
+          <p:cNvPr id="32" name="TarjetaTxt 7"/>
+          <p:cNvSpPr txBox="1"/>
+          <p:nvPr/>
+        </p:nvSpPr>
+        <p:spPr>
+          <a:xfrm>
+            <a:off x="9114282" y="4023360"/>
+            <a:ext cx="2526030" cy="859536"/>
+          </a:xfrm>
+          <a:prstGeom prst="rect">
+            <a:avLst/>
+          </a:prstGeom>
+          <a:noFill/>
+        </p:spPr>
+        <p:txBody>
+          <a:bodyPr wrap="square" anchor="t" lIns="45720" rIns="45720" tIns="27432" bIns="27432">
+            <a:normAutofit/>
+          </a:bodyPr>
+          <a:lstStyle/>
+          <a:p>
+            <a:pPr algn="l"/>
+            <a:r>
+              <a:rPr sz="1100" b="1">
+                <a:solidFill>
+                  <a:srgbClr val="157355"/>
+                </a:solidFill>
+                <a:latin typeface="Bricolage Grotesque"/>
+              </a:rPr>
+              <a:t>reacción</a:t>
+            </a:r>
+          </a:p>
+          <a:p>
+            <a:pPr algn="l"/>
+            <a:r>
+              <a:rPr sz="1000">
+                <a:solidFill>
+                  <a:srgbClr val="20242E"/>
+                </a:solidFill>
+                <a:latin typeface="Inter"/>
+              </a:rPr>
+              <a:t>A mí no.</a:t>
+            </a:r>
+          </a:p>
+        </p:txBody>
+      </p:sp>
+      <p:sp>
+        <p:nvSpPr>
+          <p:cNvPr id="33" name="Onthul 7"/>
+          <p:cNvSpPr/>
+          <p:nvPr/>
+        </p:nvSpPr>
+        <p:spPr>
+          <a:xfrm>
+            <a:off x="9114282" y="4846320"/>
+            <a:ext cx="2526030" cy="237744"/>
+          </a:xfrm>
+          <a:prstGeom prst="roundRect">
+            <a:avLst>
+              <a:gd name="adj" fmla="val 20000"/>
+            </a:avLst>
+          </a:prstGeom>
+          <a:solidFill>
+            <a:srgbClr val="E4F4EE"/>
+          </a:solidFill>
+          <a:ln>
+            <a:noFill/>
+          </a:ln>
+          <a:effectLst/>
+        </p:spPr>
+        <p:style>
+          <a:lnRef idx="1">
+            <a:schemeClr val="accent1"/>
+          </a:lnRef>
+          <a:fillRef idx="3">
+            <a:schemeClr val="accent1"/>
+          </a:fillRef>
+          <a:effectRef idx="2">
+            <a:schemeClr val="accent1"/>
+          </a:effectRef>
+          <a:fontRef idx="minor">
+            <a:schemeClr val="lt1"/>
+          </a:fontRef>
+        </p:style>
+        <p:txBody>
+          <a:bodyPr rtlCol="0" anchor="ctr"/>
+          <a:lstStyle/>
+          <a:p/>
+        </p:txBody>
+      </p:sp>
+      <p:sp>
+        <p:nvSpPr>
+          <p:cNvPr id="34" name="OnthulTxt 7"/>
+          <p:cNvSpPr txBox="1"/>
+          <p:nvPr/>
+        </p:nvSpPr>
+        <p:spPr>
+          <a:xfrm>
+            <a:off x="9132570" y="4846320"/>
+            <a:ext cx="2489454" cy="237744"/>
+          </a:xfrm>
+          <a:prstGeom prst="rect">
+            <a:avLst/>
+          </a:prstGeom>
+          <a:noFill/>
+        </p:spPr>
+        <p:txBody>
+          <a:bodyPr wrap="square" anchor="ctr" lIns="45720" rIns="45720" tIns="27432" bIns="27432">
+            <a:normAutofit/>
+          </a:bodyPr>
+          <a:lstStyle/>
+          <a:p>
+            <a:pPr algn="l"/>
+            <a:r>
+              <a:rPr sz="850" b="1">
+                <a:solidFill>
+                  <a:srgbClr val="157355"/>
+                </a:solidFill>
+                <a:latin typeface="Inter"/>
+              </a:rPr>
+              <a:t>usada ✗</a:t>
+            </a:r>
+          </a:p>
+        </p:txBody>
+      </p:sp>
+      <p:sp>
+        <p:nvSpPr>
+          <p:cNvPr id="35" name="Tarjeta 8"/>
+          <p:cNvSpPr/>
+          <p:nvPr/>
+        </p:nvSpPr>
+        <p:spPr>
+          <a:xfrm>
+            <a:off x="457200" y="5266944"/>
+            <a:ext cx="2708910" cy="1170432"/>
+          </a:xfrm>
+          <a:prstGeom prst="roundRect">
+            <a:avLst>
+              <a:gd name="adj" fmla="val 6000"/>
+            </a:avLst>
+          </a:prstGeom>
+          <a:solidFill>
+            <a:srgbClr val="FFFFFF"/>
+          </a:solidFill>
+          <a:ln w="12700">
+            <a:solidFill>
+              <a:srgbClr val="E4E3DE"/>
+            </a:solidFill>
+          </a:ln>
+          <a:effectLst/>
+        </p:spPr>
+        <p:style>
+          <a:lnRef idx="1">
+            <a:schemeClr val="accent1"/>
+          </a:lnRef>
+          <a:fillRef idx="3">
+            <a:schemeClr val="accent1"/>
+          </a:fillRef>
+          <a:effectRef idx="2">
+            <a:schemeClr val="accent1"/>
+          </a:effectRef>
+          <a:fontRef idx="minor">
+            <a:schemeClr val="lt1"/>
+          </a:fontRef>
+        </p:style>
+        <p:txBody>
+          <a:bodyPr rtlCol="0" anchor="ctr"/>
+          <a:lstStyle/>
+          <a:p/>
+        </p:txBody>
+      </p:sp>
+      <p:sp>
+        <p:nvSpPr>
+          <p:cNvPr id="36" name="TarjetaTxt 8"/>
+          <p:cNvSpPr txBox="1"/>
+          <p:nvPr/>
+        </p:nvSpPr>
+        <p:spPr>
+          <a:xfrm>
+            <a:off x="548640" y="5321808"/>
+            <a:ext cx="2526030" cy="859536"/>
+          </a:xfrm>
+          <a:prstGeom prst="rect">
+            <a:avLst/>
+          </a:prstGeom>
+          <a:noFill/>
+        </p:spPr>
+        <p:txBody>
+          <a:bodyPr wrap="square" anchor="t" lIns="45720" rIns="45720" tIns="27432" bIns="27432">
+            <a:normAutofit/>
+          </a:bodyPr>
+          <a:lstStyle/>
+          <a:p>
+            <a:pPr algn="l"/>
+            <a:r>
+              <a:rPr sz="1100" b="1">
+                <a:solidFill>
+                  <a:srgbClr val="157355"/>
+                </a:solidFill>
+                <a:latin typeface="Bricolage Grotesque"/>
+              </a:rPr>
+              <a:t>reacción</a:t>
+            </a:r>
+          </a:p>
+          <a:p>
+            <a:pPr algn="l"/>
+            <a:r>
+              <a:rPr sz="1000">
+                <a:solidFill>
+                  <a:srgbClr val="20242E"/>
+                </a:solidFill>
+                <a:latin typeface="Inter"/>
+              </a:rPr>
+              <a:t>Yo igual.</a:t>
+            </a:r>
+          </a:p>
+        </p:txBody>
+      </p:sp>
+      <p:sp>
+        <p:nvSpPr>
+          <p:cNvPr id="37" name="Onthul 8"/>
+          <p:cNvSpPr/>
+          <p:nvPr/>
+        </p:nvSpPr>
+        <p:spPr>
+          <a:xfrm>
+            <a:off x="548640" y="6144768"/>
+            <a:ext cx="2526030" cy="237744"/>
+          </a:xfrm>
+          <a:prstGeom prst="roundRect">
+            <a:avLst>
+              <a:gd name="adj" fmla="val 20000"/>
+            </a:avLst>
+          </a:prstGeom>
+          <a:solidFill>
+            <a:srgbClr val="E4F4EE"/>
+          </a:solidFill>
+          <a:ln>
+            <a:noFill/>
+          </a:ln>
+          <a:effectLst/>
+        </p:spPr>
+        <p:style>
+          <a:lnRef idx="1">
+            <a:schemeClr val="accent1"/>
+          </a:lnRef>
+          <a:fillRef idx="3">
+            <a:schemeClr val="accent1"/>
+          </a:fillRef>
+          <a:effectRef idx="2">
+            <a:schemeClr val="accent1"/>
+          </a:effectRef>
+          <a:fontRef idx="minor">
+            <a:schemeClr val="lt1"/>
+          </a:fontRef>
+        </p:style>
+        <p:txBody>
+          <a:bodyPr rtlCol="0" anchor="ctr"/>
+          <a:lstStyle/>
+          <a:p/>
+        </p:txBody>
+      </p:sp>
+      <p:sp>
+        <p:nvSpPr>
+          <p:cNvPr id="38" name="OnthulTxt 8"/>
+          <p:cNvSpPr txBox="1"/>
+          <p:nvPr/>
+        </p:nvSpPr>
+        <p:spPr>
+          <a:xfrm>
+            <a:off x="566928" y="6144768"/>
+            <a:ext cx="2489454" cy="237744"/>
+          </a:xfrm>
+          <a:prstGeom prst="rect">
+            <a:avLst/>
+          </a:prstGeom>
+          <a:noFill/>
+        </p:spPr>
+        <p:txBody>
+          <a:bodyPr wrap="square" anchor="ctr" lIns="45720" rIns="45720" tIns="27432" bIns="27432">
+            <a:normAutofit/>
+          </a:bodyPr>
+          <a:lstStyle/>
+          <a:p>
+            <a:pPr algn="l"/>
+            <a:r>
+              <a:rPr sz="850" b="1">
+                <a:solidFill>
+                  <a:srgbClr val="157355"/>
+                </a:solidFill>
+                <a:latin typeface="Inter"/>
+              </a:rPr>
+              <a:t>usada ✗</a:t>
+            </a:r>
+          </a:p>
+        </p:txBody>
+      </p:sp>
+      <p:sp>
+        <p:nvSpPr>
+          <p:cNvPr id="39" name="Tarjeta 9"/>
+          <p:cNvSpPr/>
+          <p:nvPr/>
+        </p:nvSpPr>
+        <p:spPr>
+          <a:xfrm>
+            <a:off x="3312414" y="5266944"/>
+            <a:ext cx="2708910" cy="1170432"/>
+          </a:xfrm>
+          <a:prstGeom prst="roundRect">
+            <a:avLst>
+              <a:gd name="adj" fmla="val 6000"/>
+            </a:avLst>
+          </a:prstGeom>
+          <a:solidFill>
+            <a:srgbClr val="FFFFFF"/>
+          </a:solidFill>
+          <a:ln w="12700">
+            <a:solidFill>
+              <a:srgbClr val="E4E3DE"/>
+            </a:solidFill>
+          </a:ln>
+          <a:effectLst/>
+        </p:spPr>
+        <p:style>
+          <a:lnRef idx="1">
+            <a:schemeClr val="accent1"/>
+          </a:lnRef>
+          <a:fillRef idx="3">
+            <a:schemeClr val="accent1"/>
+          </a:fillRef>
+          <a:effectRef idx="2">
+            <a:schemeClr val="accent1"/>
+          </a:effectRef>
+          <a:fontRef idx="minor">
+            <a:schemeClr val="lt1"/>
+          </a:fontRef>
+        </p:style>
+        <p:txBody>
+          <a:bodyPr rtlCol="0" anchor="ctr"/>
+          <a:lstStyle/>
+          <a:p/>
+        </p:txBody>
+      </p:sp>
+      <p:sp>
+        <p:nvSpPr>
+          <p:cNvPr id="40" name="TarjetaTxt 9"/>
+          <p:cNvSpPr txBox="1"/>
+          <p:nvPr/>
+        </p:nvSpPr>
+        <p:spPr>
+          <a:xfrm>
+            <a:off x="3403854" y="5321808"/>
+            <a:ext cx="2526030" cy="859536"/>
+          </a:xfrm>
+          <a:prstGeom prst="rect">
+            <a:avLst/>
+          </a:prstGeom>
+          <a:noFill/>
+        </p:spPr>
+        <p:txBody>
+          <a:bodyPr wrap="square" anchor="t" lIns="45720" rIns="45720" tIns="27432" bIns="27432">
+            <a:normAutofit/>
+          </a:bodyPr>
+          <a:lstStyle/>
+          <a:p>
+            <a:pPr algn="l"/>
+            <a:r>
+              <a:rPr sz="1100" b="1">
+                <a:solidFill>
+                  <a:srgbClr val="157355"/>
+                </a:solidFill>
+                <a:latin typeface="Bricolage Grotesque"/>
+              </a:rPr>
+              <a:t>reacción</a:t>
+            </a:r>
+          </a:p>
+          <a:p>
+            <a:pPr algn="l"/>
+            <a:r>
+              <a:rPr sz="1000">
+                <a:solidFill>
+                  <a:srgbClr val="20242E"/>
+                </a:solidFill>
+                <a:latin typeface="Inter"/>
+              </a:rPr>
+              <a:t>Pues yo no.</a:t>
+            </a:r>
+          </a:p>
+        </p:txBody>
+      </p:sp>
+      <p:sp>
+        <p:nvSpPr>
+          <p:cNvPr id="41" name="Onthul 9"/>
+          <p:cNvSpPr/>
+          <p:nvPr/>
+        </p:nvSpPr>
+        <p:spPr>
+          <a:xfrm>
+            <a:off x="3403854" y="6144768"/>
+            <a:ext cx="2526030" cy="237744"/>
+          </a:xfrm>
+          <a:prstGeom prst="roundRect">
+            <a:avLst>
+              <a:gd name="adj" fmla="val 20000"/>
+            </a:avLst>
+          </a:prstGeom>
+          <a:solidFill>
+            <a:srgbClr val="E4F4EE"/>
+          </a:solidFill>
+          <a:ln>
+            <a:noFill/>
+          </a:ln>
+          <a:effectLst/>
+        </p:spPr>
+        <p:style>
+          <a:lnRef idx="1">
+            <a:schemeClr val="accent1"/>
+          </a:lnRef>
+          <a:fillRef idx="3">
+            <a:schemeClr val="accent1"/>
+          </a:fillRef>
+          <a:effectRef idx="2">
+            <a:schemeClr val="accent1"/>
+          </a:effectRef>
+          <a:fontRef idx="minor">
+            <a:schemeClr val="lt1"/>
+          </a:fontRef>
+        </p:style>
+        <p:txBody>
+          <a:bodyPr rtlCol="0" anchor="ctr"/>
+          <a:lstStyle/>
+          <a:p/>
+        </p:txBody>
+      </p:sp>
+      <p:sp>
+        <p:nvSpPr>
+          <p:cNvPr id="42" name="OnthulTxt 9"/>
+          <p:cNvSpPr txBox="1"/>
+          <p:nvPr/>
+        </p:nvSpPr>
+        <p:spPr>
+          <a:xfrm>
+            <a:off x="3422142" y="6144768"/>
+            <a:ext cx="2489454" cy="237744"/>
+          </a:xfrm>
+          <a:prstGeom prst="rect">
+            <a:avLst/>
+          </a:prstGeom>
+          <a:noFill/>
+        </p:spPr>
+        <p:txBody>
+          <a:bodyPr wrap="square" anchor="ctr" lIns="45720" rIns="45720" tIns="27432" bIns="27432">
+            <a:normAutofit/>
+          </a:bodyPr>
+          <a:lstStyle/>
+          <a:p>
+            <a:pPr algn="l"/>
+            <a:r>
+              <a:rPr sz="850" b="1">
+                <a:solidFill>
+                  <a:srgbClr val="157355"/>
+                </a:solidFill>
+                <a:latin typeface="Inter"/>
+              </a:rPr>
+              <a:t>usada ✗</a:t>
+            </a:r>
+          </a:p>
+        </p:txBody>
+      </p:sp>
+      <p:sp>
+        <p:nvSpPr>
+          <p:cNvPr id="43" name="Tarjeta 10"/>
+          <p:cNvSpPr/>
+          <p:nvPr/>
+        </p:nvSpPr>
+        <p:spPr>
+          <a:xfrm>
+            <a:off x="6167628" y="5266944"/>
+            <a:ext cx="2708910" cy="1170432"/>
+          </a:xfrm>
+          <a:prstGeom prst="roundRect">
+            <a:avLst>
+              <a:gd name="adj" fmla="val 6000"/>
+            </a:avLst>
+          </a:prstGeom>
+          <a:solidFill>
+            <a:srgbClr val="FFFFFF"/>
+          </a:solidFill>
+          <a:ln w="12700">
+            <a:solidFill>
+              <a:srgbClr val="E4E3DE"/>
+            </a:solidFill>
+          </a:ln>
+          <a:effectLst/>
+        </p:spPr>
+        <p:style>
+          <a:lnRef idx="1">
+            <a:schemeClr val="accent1"/>
+          </a:lnRef>
+          <a:fillRef idx="3">
+            <a:schemeClr val="accent1"/>
+          </a:fillRef>
+          <a:effectRef idx="2">
+            <a:schemeClr val="accent1"/>
+          </a:effectRef>
+          <a:fontRef idx="minor">
+            <a:schemeClr val="lt1"/>
+          </a:fontRef>
+        </p:style>
+        <p:txBody>
+          <a:bodyPr rtlCol="0" anchor="ctr"/>
+          <a:lstStyle/>
+          <a:p/>
+        </p:txBody>
+      </p:sp>
+      <p:sp>
+        <p:nvSpPr>
+          <p:cNvPr id="44" name="TarjetaTxt 10"/>
+          <p:cNvSpPr txBox="1"/>
+          <p:nvPr/>
+        </p:nvSpPr>
+        <p:spPr>
+          <a:xfrm>
+            <a:off x="6259068" y="5321808"/>
+            <a:ext cx="2526030" cy="859536"/>
+          </a:xfrm>
+          <a:prstGeom prst="rect">
+            <a:avLst/>
+          </a:prstGeom>
+          <a:noFill/>
+        </p:spPr>
+        <p:txBody>
+          <a:bodyPr wrap="square" anchor="t" lIns="45720" rIns="45720" tIns="27432" bIns="27432">
+            <a:normAutofit/>
+          </a:bodyPr>
+          <a:lstStyle/>
+          <a:p>
+            <a:pPr algn="l"/>
+            <a:r>
+              <a:rPr sz="1100" b="1">
+                <a:solidFill>
+                  <a:srgbClr val="157355"/>
+                </a:solidFill>
+                <a:latin typeface="Bricolage Grotesque"/>
+              </a:rPr>
+              <a:t>reacción</a:t>
+            </a:r>
+          </a:p>
+          <a:p>
+            <a:pPr algn="l"/>
+            <a:r>
+              <a:rPr sz="1000">
+                <a:solidFill>
+                  <a:srgbClr val="20242E"/>
+                </a:solidFill>
+                <a:latin typeface="Inter"/>
+              </a:rPr>
+              <a:t>A mí me encanta.</a:t>
+            </a:r>
+          </a:p>
+        </p:txBody>
+      </p:sp>
+      <p:sp>
+        <p:nvSpPr>
+          <p:cNvPr id="45" name="Onthul 10"/>
+          <p:cNvSpPr/>
+          <p:nvPr/>
+        </p:nvSpPr>
+        <p:spPr>
+          <a:xfrm>
+            <a:off x="6259068" y="6144768"/>
+            <a:ext cx="2526030" cy="237744"/>
+          </a:xfrm>
+          <a:prstGeom prst="roundRect">
+            <a:avLst>
+              <a:gd name="adj" fmla="val 20000"/>
+            </a:avLst>
+          </a:prstGeom>
+          <a:solidFill>
+            <a:srgbClr val="E4F4EE"/>
+          </a:solidFill>
+          <a:ln>
+            <a:noFill/>
+          </a:ln>
+          <a:effectLst/>
+        </p:spPr>
+        <p:style>
+          <a:lnRef idx="1">
+            <a:schemeClr val="accent1"/>
+          </a:lnRef>
+          <a:fillRef idx="3">
+            <a:schemeClr val="accent1"/>
+          </a:fillRef>
+          <a:effectRef idx="2">
+            <a:schemeClr val="accent1"/>
+          </a:effectRef>
+          <a:fontRef idx="minor">
+            <a:schemeClr val="lt1"/>
+          </a:fontRef>
+        </p:style>
+        <p:txBody>
+          <a:bodyPr rtlCol="0" anchor="ctr"/>
+          <a:lstStyle/>
+          <a:p/>
+        </p:txBody>
+      </p:sp>
+      <p:sp>
+        <p:nvSpPr>
+          <p:cNvPr id="46" name="OnthulTxt 10"/>
+          <p:cNvSpPr txBox="1"/>
+          <p:nvPr/>
+        </p:nvSpPr>
+        <p:spPr>
+          <a:xfrm>
+            <a:off x="6277356" y="6144768"/>
+            <a:ext cx="2489454" cy="237744"/>
+          </a:xfrm>
+          <a:prstGeom prst="rect">
+            <a:avLst/>
+          </a:prstGeom>
+          <a:noFill/>
+        </p:spPr>
+        <p:txBody>
+          <a:bodyPr wrap="square" anchor="ctr" lIns="45720" rIns="45720" tIns="27432" bIns="27432">
+            <a:normAutofit/>
+          </a:bodyPr>
+          <a:lstStyle/>
+          <a:p>
+            <a:pPr algn="l"/>
+            <a:r>
+              <a:rPr sz="850" b="1">
+                <a:solidFill>
+                  <a:srgbClr val="157355"/>
+                </a:solidFill>
+                <a:latin typeface="Inter"/>
+              </a:rPr>
+              <a:t>usada ✗</a:t>
+            </a:r>
+          </a:p>
+        </p:txBody>
+      </p:sp>
+      <p:sp>
+        <p:nvSpPr>
+          <p:cNvPr id="47" name="Tarjeta 11"/>
+          <p:cNvSpPr/>
+          <p:nvPr/>
+        </p:nvSpPr>
+        <p:spPr>
+          <a:xfrm>
+            <a:off x="9022842" y="5266944"/>
+            <a:ext cx="2708910" cy="1170432"/>
+          </a:xfrm>
+          <a:prstGeom prst="roundRect">
+            <a:avLst>
+              <a:gd name="adj" fmla="val 6000"/>
+            </a:avLst>
+          </a:prstGeom>
+          <a:solidFill>
+            <a:srgbClr val="FFFFFF"/>
+          </a:solidFill>
+          <a:ln w="12700">
+            <a:solidFill>
+              <a:srgbClr val="E4E3DE"/>
+            </a:solidFill>
+          </a:ln>
+          <a:effectLst/>
+        </p:spPr>
+        <p:style>
+          <a:lnRef idx="1">
+            <a:schemeClr val="accent1"/>
+          </a:lnRef>
+          <a:fillRef idx="3">
+            <a:schemeClr val="accent1"/>
+          </a:fillRef>
+          <a:effectRef idx="2">
+            <a:schemeClr val="accent1"/>
+          </a:effectRef>
+          <a:fontRef idx="minor">
+            <a:schemeClr val="lt1"/>
+          </a:fontRef>
+        </p:style>
+        <p:txBody>
+          <a:bodyPr rtlCol="0" anchor="ctr"/>
+          <a:lstStyle/>
+          <a:p/>
+        </p:txBody>
+      </p:sp>
+      <p:sp>
+        <p:nvSpPr>
+          <p:cNvPr id="48" name="TarjetaTxt 11"/>
+          <p:cNvSpPr txBox="1"/>
+          <p:nvPr/>
+        </p:nvSpPr>
+        <p:spPr>
+          <a:xfrm>
+            <a:off x="9114282" y="5321808"/>
+            <a:ext cx="2526030" cy="859536"/>
+          </a:xfrm>
+          <a:prstGeom prst="rect">
+            <a:avLst/>
+          </a:prstGeom>
+          <a:noFill/>
+        </p:spPr>
+        <p:txBody>
+          <a:bodyPr wrap="square" anchor="t" lIns="45720" rIns="45720" tIns="27432" bIns="27432">
+            <a:normAutofit/>
+          </a:bodyPr>
+          <a:lstStyle/>
+          <a:p>
+            <a:pPr algn="l"/>
+            <a:r>
+              <a:rPr sz="1100" b="1">
+                <a:solidFill>
+                  <a:srgbClr val="157355"/>
+                </a:solidFill>
+                <a:latin typeface="Bricolage Grotesque"/>
+              </a:rPr>
+              <a:t>reacción</a:t>
+            </a:r>
+          </a:p>
+          <a:p>
+            <a:pPr algn="l"/>
+            <a:r>
+              <a:rPr sz="1000">
+                <a:solidFill>
+                  <a:srgbClr val="20242E"/>
+                </a:solidFill>
+                <a:latin typeface="Inter"/>
+              </a:rPr>
+              <a:t>A mí no me gusta nada.</a:t>
+            </a:r>
+          </a:p>
+        </p:txBody>
+      </p:sp>
+      <p:sp>
+        <p:nvSpPr>
+          <p:cNvPr id="49" name="Onthul 11"/>
+          <p:cNvSpPr/>
+          <p:nvPr/>
+        </p:nvSpPr>
+        <p:spPr>
+          <a:xfrm>
+            <a:off x="9114282" y="6144768"/>
+            <a:ext cx="2526030" cy="237744"/>
+          </a:xfrm>
+          <a:prstGeom prst="roundRect">
+            <a:avLst>
+              <a:gd name="adj" fmla="val 20000"/>
+            </a:avLst>
+          </a:prstGeom>
+          <a:solidFill>
+            <a:srgbClr val="E4F4EE"/>
+          </a:solidFill>
+          <a:ln>
+            <a:noFill/>
+          </a:ln>
+          <a:effectLst/>
+        </p:spPr>
+        <p:style>
+          <a:lnRef idx="1">
+            <a:schemeClr val="accent1"/>
+          </a:lnRef>
+          <a:fillRef idx="3">
+            <a:schemeClr val="accent1"/>
+          </a:fillRef>
+          <a:effectRef idx="2">
+            <a:schemeClr val="accent1"/>
+          </a:effectRef>
+          <a:fontRef idx="minor">
+            <a:schemeClr val="lt1"/>
+          </a:fontRef>
+        </p:style>
+        <p:txBody>
+          <a:bodyPr rtlCol="0" anchor="ctr"/>
+          <a:lstStyle/>
+          <a:p/>
+        </p:txBody>
+      </p:sp>
+      <p:sp>
+        <p:nvSpPr>
+          <p:cNvPr id="50" name="OnthulTxt 11"/>
+          <p:cNvSpPr txBox="1"/>
+          <p:nvPr/>
+        </p:nvSpPr>
+        <p:spPr>
+          <a:xfrm>
+            <a:off x="9132570" y="6144768"/>
+            <a:ext cx="2489454" cy="237744"/>
+          </a:xfrm>
+          <a:prstGeom prst="rect">
+            <a:avLst/>
+          </a:prstGeom>
+          <a:noFill/>
+        </p:spPr>
+        <p:txBody>
+          <a:bodyPr wrap="square" anchor="ctr" lIns="45720" rIns="45720" tIns="27432" bIns="27432">
+            <a:normAutofit/>
+          </a:bodyPr>
+          <a:lstStyle/>
+          <a:p>
+            <a:pPr algn="l"/>
+            <a:r>
+              <a:rPr sz="850" b="1">
+                <a:solidFill>
+                  <a:srgbClr val="157355"/>
+                </a:solidFill>
+                <a:latin typeface="Inter"/>
+              </a:rPr>
+              <a:t>usada ✗</a:t>
+            </a:r>
+          </a:p>
+        </p:txBody>
+      </p:sp>
+    </p:spTree>
+  </p:cSld>
+  <p:clrMapOvr>
+    <a:masterClrMapping/>
+  </p:clrMapOvr>
+  <p:timing>
+    <p:tnLst>
+      <p:par>
+        <p:cTn id="1" dur="indefinite" restart="never" nodeType="tmRoot">
+          <p:childTnLst>
+            <p:seq concurrent="1" nextAc="seek">
+              <p:cTn id="2" dur="indefinite" nodeType="mainSeq">
+                <p:childTnLst>
+                  <p:par>
+                    <p:cTn id="5" fill="hold">
+                      <p:stCondLst>
+                        <p:cond delay="indefinite"/>
+                      </p:stCondLst>
+                      <p:childTnLst>
+                        <p:par>
+                          <p:cTn id="6" fill="hold">
+                            <p:stCondLst>
+                              <p:cond delay="0"/>
+                            </p:stCondLst>
+                            <p:childTnLst>
+                              <p:par>
+                                <p:cTn id="7" presetID="10" presetClass="entr" presetSubtype="0" fill="hold" grpId="0" nodeType="clickEffect">
+                                  <p:stCondLst>
+                                    <p:cond delay="0"/>
+                                  </p:stCondLst>
+                                  <p:childTnLst>
+                                    <p:set>
+                                      <p:cBhvr>
+                                        <p:cTn id="8" dur="1" fill="hold">
+                                          <p:stCondLst>
+                                            <p:cond delay="0"/>
+                                          </p:stCondLst>
+                                        </p:cTn>
+                                        <p:tgtEl>
+                                          <p:spTgt spid="21"/>
+                                        </p:tgtEl>
+                                        <p:attrNameLst>
+                                          <p:attrName>style.visibility</p:attrName>
+                                        </p:attrNameLst>
+                                      </p:cBhvr>
+                                      <p:to>
+                                        <p:strVal val="visible"/>
+                                      </p:to>
+                                    </p:set>
+                                    <p:animEffect transition="in" filter="fade">
+                                      <p:cBhvr>
+                                        <p:cTn id="9" dur="500"/>
+                                        <p:tgtEl>
+                                          <p:spTgt spid="21"/>
+                                        </p:tgtEl>
+                                      </p:cBhvr>
+                                    </p:animEffect>
+                                  </p:childTnLst>
+                                </p:cTn>
+                              </p:par>
+                            </p:childTnLst>
+                          </p:cTn>
+                        </p:par>
+                      </p:childTnLst>
+                    </p:cTn>
+                  </p:par>
+                  <p:par>
+                    <p:cTn id="10" fill="hold">
+                      <p:stCondLst>
+                        <p:cond delay="indefinite"/>
+                      </p:stCondLst>
+                      <p:childTnLst>
+                        <p:par>
+                          <p:cTn id="11" fill="hold">
+                            <p:stCondLst>
+                              <p:cond delay="0"/>
+                            </p:stCondLst>
+                            <p:childTnLst>
+                              <p:par>
+                                <p:cTn id="12" presetID="10" presetClass="entr" presetSubtype="0" fill="hold" grpId="0" nodeType="clickEffect">
+                                  <p:stCondLst>
+                                    <p:cond delay="0"/>
+                                  </p:stCondLst>
+                                  <p:childTnLst>
+                                    <p:set>
+                                      <p:cBhvr>
+                                        <p:cTn id="13" dur="1" fill="hold">
+                                          <p:stCondLst>
+                                            <p:cond delay="0"/>
+                                          </p:stCondLst>
+                                        </p:cTn>
+                                        <p:tgtEl>
+                                          <p:spTgt spid="22"/>
+                                        </p:tgtEl>
+                                        <p:attrNameLst>
+                                          <p:attrName>style.visibility</p:attrName>
+                                        </p:attrNameLst>
+                                      </p:cBhvr>
+                                      <p:to>
+                                        <p:strVal val="visible"/>
+                                      </p:to>
+                                    </p:set>
+                                    <p:animEffect transition="in" filter="fade">
+                                      <p:cBhvr>
+                                        <p:cTn id="14" dur="500"/>
+                                        <p:tgtEl>
+                                          <p:spTgt spid="22"/>
+                                        </p:tgtEl>
+                                      </p:cBhvr>
+                                    </p:animEffect>
+                                  </p:childTnLst>
+                                </p:cTn>
+                              </p:par>
+                            </p:childTnLst>
+                          </p:cTn>
+                        </p:par>
+                      </p:childTnLst>
+                    </p:cTn>
+                  </p:par>
+                  <p:par>
+                    <p:cTn id="15" fill="hold">
+                      <p:stCondLst>
+                        <p:cond delay="indefinite"/>
+                      </p:stCondLst>
+                      <p:childTnLst>
+                        <p:par>
+                          <p:cTn id="16" fill="hold">
+                            <p:stCondLst>
+                              <p:cond delay="0"/>
+                            </p:stCondLst>
+                            <p:childTnLst>
+                              <p:par>
+                                <p:cTn id="17" presetID="10" presetClass="entr" presetSubtype="0" fill="hold" grpId="0" nodeType="clickEffect">
+                                  <p:stCondLst>
+                                    <p:cond delay="0"/>
+                                  </p:stCondLst>
+                                  <p:childTnLst>
+                                    <p:set>
+                                      <p:cBhvr>
+                                        <p:cTn id="18" dur="1" fill="hold">
+                                          <p:stCondLst>
+                                            <p:cond delay="0"/>
+                                          </p:stCondLst>
+                                        </p:cTn>
+                                        <p:tgtEl>
+                                          <p:spTgt spid="25"/>
+                                        </p:tgtEl>
+                                        <p:attrNameLst>
+                                          <p:attrName>style.visibility</p:attrName>
+                                        </p:attrNameLst>
+                                      </p:cBhvr>
+                                      <p:to>
+                                        <p:strVal val="visible"/>
+                                      </p:to>
+                                    </p:set>
+                                    <p:animEffect transition="in" filter="fade">
+                                      <p:cBhvr>
+                                        <p:cTn id="19" dur="500"/>
+                                        <p:tgtEl>
+                                          <p:spTgt spid="25"/>
+                                        </p:tgtEl>
+                                      </p:cBhvr>
+                                    </p:animEffect>
+                                  </p:childTnLst>
+                                </p:cTn>
+                              </p:par>
+                            </p:childTnLst>
+                          </p:cTn>
+                        </p:par>
+                      </p:childTnLst>
+                    </p:cTn>
+                  </p:par>
+                  <p:par>
+                    <p:cTn id="20" fill="hold">
+                      <p:stCondLst>
+                        <p:cond delay="indefinite"/>
+                      </p:stCondLst>
+                      <p:childTnLst>
+                        <p:par>
+                          <p:cTn id="21" fill="hold">
+                            <p:stCondLst>
+                              <p:cond delay="0"/>
+                            </p:stCondLst>
+                            <p:childTnLst>
+                              <p:par>
+                                <p:cTn id="22" presetID="10" presetClass="entr" presetSubtype="0" fill="hold" grpId="0" nodeType="clickEffect">
+                                  <p:stCondLst>
+                                    <p:cond delay="0"/>
+                                  </p:stCondLst>
+                                  <p:childTnLst>
+                                    <p:set>
+                                      <p:cBhvr>
+                                        <p:cTn id="23" dur="1" fill="hold">
+                                          <p:stCondLst>
+                                            <p:cond delay="0"/>
+                                          </p:stCondLst>
+                                        </p:cTn>
+                                        <p:tgtEl>
+                                          <p:spTgt spid="26"/>
+                                        </p:tgtEl>
+                                        <p:attrNameLst>
+                                          <p:attrName>style.visibility</p:attrName>
+                                        </p:attrNameLst>
+                                      </p:cBhvr>
+                                      <p:to>
+                                        <p:strVal val="visible"/>
+                                      </p:to>
+                                    </p:set>
+                                    <p:animEffect transition="in" filter="fade">
+                                      <p:cBhvr>
+                                        <p:cTn id="24" dur="500"/>
+                                        <p:tgtEl>
+                                          <p:spTgt spid="26"/>
+                                        </p:tgtEl>
+                                      </p:cBhvr>
+                                    </p:animEffect>
+                                  </p:childTnLst>
+                                </p:cTn>
+                              </p:par>
+                            </p:childTnLst>
+                          </p:cTn>
+                        </p:par>
+                      </p:childTnLst>
+                    </p:cTn>
+                  </p:par>
+                  <p:par>
+                    <p:cTn id="25" fill="hold">
+                      <p:stCondLst>
+                        <p:cond delay="indefinite"/>
+                      </p:stCondLst>
+                      <p:childTnLst>
+                        <p:par>
+                          <p:cTn id="26" fill="hold">
+                            <p:stCondLst>
+                              <p:cond delay="0"/>
+                            </p:stCondLst>
+                            <p:childTnLst>
+                              <p:par>
+                                <p:cTn id="27" presetID="10" presetClass="entr" presetSubtype="0" fill="hold" grpId="0" nodeType="clickEffect">
+                                  <p:stCondLst>
+                                    <p:cond delay="0"/>
+                                  </p:stCondLst>
+                                  <p:childTnLst>
+                                    <p:set>
+                                      <p:cBhvr>
+                                        <p:cTn id="28" dur="1" fill="hold">
+                                          <p:stCondLst>
+                                            <p:cond delay="0"/>
+                                          </p:stCondLst>
+                                        </p:cTn>
+                                        <p:tgtEl>
+                                          <p:spTgt spid="29"/>
+                                        </p:tgtEl>
+                                        <p:attrNameLst>
+                                          <p:attrName>style.visibility</p:attrName>
+                                        </p:attrNameLst>
+                                      </p:cBhvr>
+                                      <p:to>
+                                        <p:strVal val="visible"/>
+                                      </p:to>
+                                    </p:set>
+                                    <p:animEffect transition="in" filter="fade">
+                                      <p:cBhvr>
+                                        <p:cTn id="29" dur="500"/>
+                                        <p:tgtEl>
+                                          <p:spTgt spid="29"/>
+                                        </p:tgtEl>
+                                      </p:cBhvr>
+                                    </p:animEffect>
+                                  </p:childTnLst>
+                                </p:cTn>
+                              </p:par>
+                            </p:childTnLst>
+                          </p:cTn>
+                        </p:par>
+                      </p:childTnLst>
+                    </p:cTn>
+                  </p:par>
+                  <p:par>
+                    <p:cTn id="30" fill="hold">
+                      <p:stCondLst>
+                        <p:cond delay="indefinite"/>
+                      </p:stCondLst>
+                      <p:childTnLst>
+                        <p:par>
+                          <p:cTn id="31" fill="hold">
+                            <p:stCondLst>
+                              <p:cond delay="0"/>
+                            </p:stCondLst>
+                            <p:childTnLst>
+                              <p:par>
+                                <p:cTn id="32" presetID="10" presetClass="entr" presetSubtype="0" fill="hold" grpId="0" nodeType="clickEffect">
+                                  <p:stCondLst>
+                                    <p:cond delay="0"/>
+                                  </p:stCondLst>
+                                  <p:childTnLst>
+                                    <p:set>
+                                      <p:cBhvr>
+                                        <p:cTn id="33" dur="1" fill="hold">
+                                          <p:stCondLst>
+                                            <p:cond delay="0"/>
+                                          </p:stCondLst>
+                                        </p:cTn>
+                                        <p:tgtEl>
+                                          <p:spTgt spid="30"/>
+                                        </p:tgtEl>
+                                        <p:attrNameLst>
+                                          <p:attrName>style.visibility</p:attrName>
+                                        </p:attrNameLst>
+                                      </p:cBhvr>
+                                      <p:to>
+                                        <p:strVal val="visible"/>
+                                      </p:to>
+                                    </p:set>
+                                    <p:animEffect transition="in" filter="fade">
+                                      <p:cBhvr>
+                                        <p:cTn id="34" dur="500"/>
+                                        <p:tgtEl>
+                                          <p:spTgt spid="30"/>
+                                        </p:tgtEl>
+                                      </p:cBhvr>
+                                    </p:animEffect>
+                                  </p:childTnLst>
+                                </p:cTn>
+                              </p:par>
+                            </p:childTnLst>
+                          </p:cTn>
+                        </p:par>
+                      </p:childTnLst>
+                    </p:cTn>
+                  </p:par>
+                  <p:par>
+                    <p:cTn id="35" fill="hold">
+                      <p:stCondLst>
+                        <p:cond delay="indefinite"/>
+                      </p:stCondLst>
+                      <p:childTnLst>
+                        <p:par>
+                          <p:cTn id="36" fill="hold">
+                            <p:stCondLst>
+                              <p:cond delay="0"/>
+                            </p:stCondLst>
+                            <p:childTnLst>
+                              <p:par>
+                                <p:cTn id="37" presetID="10" presetClass="entr" presetSubtype="0" fill="hold" grpId="0" nodeType="clickEffect">
+                                  <p:stCondLst>
+                                    <p:cond delay="0"/>
+                                  </p:stCondLst>
+                                  <p:childTnLst>
+                                    <p:set>
+                                      <p:cBhvr>
+                                        <p:cTn id="38" dur="1" fill="hold">
+                                          <p:stCondLst>
+                                            <p:cond delay="0"/>
+                                          </p:stCondLst>
+                                        </p:cTn>
+                                        <p:tgtEl>
+                                          <p:spTgt spid="33"/>
+                                        </p:tgtEl>
+                                        <p:attrNameLst>
+                                          <p:attrName>style.visibility</p:attrName>
+                                        </p:attrNameLst>
+                                      </p:cBhvr>
+                                      <p:to>
+                                        <p:strVal val="visible"/>
+                                      </p:to>
+                                    </p:set>
+                                    <p:animEffect transition="in" filter="fade">
+                                      <p:cBhvr>
+                                        <p:cTn id="39" dur="500"/>
+                                        <p:tgtEl>
+                                          <p:spTgt spid="33"/>
+                                        </p:tgtEl>
+                                      </p:cBhvr>
+                                    </p:animEffect>
+                                  </p:childTnLst>
+                                </p:cTn>
+                              </p:par>
+                            </p:childTnLst>
+                          </p:cTn>
+                        </p:par>
+                      </p:childTnLst>
+                    </p:cTn>
+                  </p:par>
+                  <p:par>
+                    <p:cTn id="40" fill="hold">
+                      <p:stCondLst>
+                        <p:cond delay="indefinite"/>
+                      </p:stCondLst>
+                      <p:childTnLst>
+                        <p:par>
+                          <p:cTn id="41" fill="hold">
+                            <p:stCondLst>
+                              <p:cond delay="0"/>
+                            </p:stCondLst>
+                            <p:childTnLst>
+                              <p:par>
+                                <p:cTn id="42" presetID="10" presetClass="entr" presetSubtype="0" fill="hold" grpId="0" nodeType="clickEffect">
+                                  <p:stCondLst>
+                                    <p:cond delay="0"/>
+                                  </p:stCondLst>
+                                  <p:childTnLst>
+                                    <p:set>
+                                      <p:cBhvr>
+                                        <p:cTn id="43" dur="1" fill="hold">
+                                          <p:stCondLst>
+                                            <p:cond delay="0"/>
+                                          </p:stCondLst>
+                                        </p:cTn>
+                                        <p:tgtEl>
+                                          <p:spTgt spid="34"/>
+                                        </p:tgtEl>
+                                        <p:attrNameLst>
+                                          <p:attrName>style.visibility</p:attrName>
+                                        </p:attrNameLst>
+                                      </p:cBhvr>
+                                      <p:to>
+                                        <p:strVal val="visible"/>
+                                      </p:to>
+                                    </p:set>
+                                    <p:animEffect transition="in" filter="fade">
+                                      <p:cBhvr>
+                                        <p:cTn id="44" dur="500"/>
+                                        <p:tgtEl>
+                                          <p:spTgt spid="34"/>
+                                        </p:tgtEl>
+                                      </p:cBhvr>
+                                    </p:animEffect>
+                                  </p:childTnLst>
+                                </p:cTn>
+                              </p:par>
+                            </p:childTnLst>
+                          </p:cTn>
+                        </p:par>
+                      </p:childTnLst>
+                    </p:cTn>
+                  </p:par>
+                  <p:par>
+                    <p:cTn id="45" fill="hold">
+                      <p:stCondLst>
+                        <p:cond delay="indefinite"/>
+                      </p:stCondLst>
+                      <p:childTnLst>
+                        <p:par>
+                          <p:cTn id="46" fill="hold">
+                            <p:stCondLst>
+                              <p:cond delay="0"/>
+                            </p:stCondLst>
+                            <p:childTnLst>
+                              <p:par>
+                                <p:cTn id="47" presetID="10" presetClass="entr" presetSubtype="0" fill="hold" grpId="0" nodeType="clickEffect">
+                                  <p:stCondLst>
+                                    <p:cond delay="0"/>
+                                  </p:stCondLst>
+                                  <p:childTnLst>
+                                    <p:set>
+                                      <p:cBhvr>
+                                        <p:cTn id="48" dur="1" fill="hold">
+                                          <p:stCondLst>
+                                            <p:cond delay="0"/>
+                                          </p:stCondLst>
+                                        </p:cTn>
+                                        <p:tgtEl>
+                                          <p:spTgt spid="37"/>
+                                        </p:tgtEl>
+                                        <p:attrNameLst>
+                                          <p:attrName>style.visibility</p:attrName>
+                                        </p:attrNameLst>
+                                      </p:cBhvr>
+                                      <p:to>
+                                        <p:strVal val="visible"/>
+                                      </p:to>
+                                    </p:set>
+                                    <p:animEffect transition="in" filter="fade">
+                                      <p:cBhvr>
+                                        <p:cTn id="49" dur="500"/>
+                                        <p:tgtEl>
+                                          <p:spTgt spid="37"/>
+                                        </p:tgtEl>
+                                      </p:cBhvr>
+                                    </p:animEffect>
+                                  </p:childTnLst>
+                                </p:cTn>
+                              </p:par>
+                            </p:childTnLst>
+                          </p:cTn>
+                        </p:par>
+                      </p:childTnLst>
+                    </p:cTn>
+                  </p:par>
+                  <p:par>
+                    <p:cTn id="50" fill="hold">
+                      <p:stCondLst>
+                        <p:cond delay="indefinite"/>
+                      </p:stCondLst>
+                      <p:childTnLst>
+                        <p:par>
+                          <p:cTn id="51" fill="hold">
+                            <p:stCondLst>
+                              <p:cond delay="0"/>
+                            </p:stCondLst>
+                            <p:childTnLst>
+                              <p:par>
+                                <p:cTn id="52" presetID="10" presetClass="entr" presetSubtype="0" fill="hold" grpId="0" nodeType="clickEffect">
+                                  <p:stCondLst>
+                                    <p:cond delay="0"/>
+                                  </p:stCondLst>
+                                  <p:childTnLst>
+                                    <p:set>
+                                      <p:cBhvr>
+                                        <p:cTn id="53" dur="1" fill="hold">
+                                          <p:stCondLst>
+                                            <p:cond delay="0"/>
+                                          </p:stCondLst>
+                                        </p:cTn>
+                                        <p:tgtEl>
+                                          <p:spTgt spid="38"/>
+                                        </p:tgtEl>
+                                        <p:attrNameLst>
+                                          <p:attrName>style.visibility</p:attrName>
+                                        </p:attrNameLst>
+                                      </p:cBhvr>
+                                      <p:to>
+                                        <p:strVal val="visible"/>
+                                      </p:to>
+                                    </p:set>
+                                    <p:animEffect transition="in" filter="fade">
+                                      <p:cBhvr>
+                                        <p:cTn id="54" dur="500"/>
+                                        <p:tgtEl>
+                                          <p:spTgt spid="38"/>
+                                        </p:tgtEl>
+                                      </p:cBhvr>
+                                    </p:animEffect>
+                                  </p:childTnLst>
+                                </p:cTn>
+                              </p:par>
+                            </p:childTnLst>
+                          </p:cTn>
+                        </p:par>
+                      </p:childTnLst>
+                    </p:cTn>
+                  </p:par>
+                  <p:par>
+                    <p:cTn id="55" fill="hold">
+                      <p:stCondLst>
+                        <p:cond delay="indefinite"/>
+                      </p:stCondLst>
+                      <p:childTnLst>
+                        <p:par>
+                          <p:cTn id="56" fill="hold">
+                            <p:stCondLst>
+                              <p:cond delay="0"/>
+                            </p:stCondLst>
+                            <p:childTnLst>
+                              <p:par>
+                                <p:cTn id="57" presetID="10" presetClass="entr" presetSubtype="0" fill="hold" grpId="0" nodeType="clickEffect">
+                                  <p:stCondLst>
+                                    <p:cond delay="0"/>
+                                  </p:stCondLst>
+                                  <p:childTnLst>
+                                    <p:set>
+                                      <p:cBhvr>
+                                        <p:cTn id="58" dur="1" fill="hold">
+                                          <p:stCondLst>
+                                            <p:cond delay="0"/>
+                                          </p:stCondLst>
+                                        </p:cTn>
+                                        <p:tgtEl>
+                                          <p:spTgt spid="41"/>
+                                        </p:tgtEl>
+                                        <p:attrNameLst>
+                                          <p:attrName>style.visibility</p:attrName>
+                                        </p:attrNameLst>
+                                      </p:cBhvr>
+                                      <p:to>
+                                        <p:strVal val="visible"/>
+                                      </p:to>
+                                    </p:set>
+                                    <p:animEffect transition="in" filter="fade">
+                                      <p:cBhvr>
+                                        <p:cTn id="59" dur="500"/>
+                                        <p:tgtEl>
+                                          <p:spTgt spid="41"/>
+                                        </p:tgtEl>
+                                      </p:cBhvr>
+                                    </p:animEffect>
+                                  </p:childTnLst>
+                                </p:cTn>
+                              </p:par>
+                            </p:childTnLst>
+                          </p:cTn>
+                        </p:par>
+                      </p:childTnLst>
+                    </p:cTn>
+                  </p:par>
+                  <p:par>
+                    <p:cTn id="60" fill="hold">
+                      <p:stCondLst>
+                        <p:cond delay="indefinite"/>
+                      </p:stCondLst>
+                      <p:childTnLst>
+                        <p:par>
+                          <p:cTn id="61" fill="hold">
+                            <p:stCondLst>
+                              <p:cond delay="0"/>
+                            </p:stCondLst>
+                            <p:childTnLst>
+                              <p:par>
+                                <p:cTn id="62" presetID="10" presetClass="entr" presetSubtype="0" fill="hold" grpId="0" nodeType="clickEffect">
+                                  <p:stCondLst>
+                                    <p:cond delay="0"/>
+                                  </p:stCondLst>
+                                  <p:childTnLst>
+                                    <p:set>
+                                      <p:cBhvr>
+                                        <p:cTn id="63" dur="1" fill="hold">
+                                          <p:stCondLst>
+                                            <p:cond delay="0"/>
+                                          </p:stCondLst>
+                                        </p:cTn>
+                                        <p:tgtEl>
+                                          <p:spTgt spid="42"/>
+                                        </p:tgtEl>
+                                        <p:attrNameLst>
+                                          <p:attrName>style.visibility</p:attrName>
+                                        </p:attrNameLst>
+                                      </p:cBhvr>
+                                      <p:to>
+                                        <p:strVal val="visible"/>
+                                      </p:to>
+                                    </p:set>
+                                    <p:animEffect transition="in" filter="fade">
+                                      <p:cBhvr>
+                                        <p:cTn id="64" dur="500"/>
+                                        <p:tgtEl>
+                                          <p:spTgt spid="42"/>
+                                        </p:tgtEl>
+                                      </p:cBhvr>
+                                    </p:animEffect>
+                                  </p:childTnLst>
+                                </p:cTn>
+                              </p:par>
+                            </p:childTnLst>
+                          </p:cTn>
+                        </p:par>
+                      </p:childTnLst>
+                    </p:cTn>
+                  </p:par>
+                  <p:par>
+                    <p:cTn id="65" fill="hold">
+                      <p:stCondLst>
+                        <p:cond delay="indefinite"/>
+                      </p:stCondLst>
+                      <p:childTnLst>
+                        <p:par>
+                          <p:cTn id="66" fill="hold">
+                            <p:stCondLst>
+                              <p:cond delay="0"/>
+                            </p:stCondLst>
+                            <p:childTnLst>
+                              <p:par>
+                                <p:cTn id="67" presetID="10" presetClass="entr" presetSubtype="0" fill="hold" grpId="0" nodeType="clickEffect">
+                                  <p:stCondLst>
+                                    <p:cond delay="0"/>
+                                  </p:stCondLst>
+                                  <p:childTnLst>
+                                    <p:set>
+                                      <p:cBhvr>
+                                        <p:cTn id="68" dur="1" fill="hold">
+                                          <p:stCondLst>
+                                            <p:cond delay="0"/>
+                                          </p:stCondLst>
+                                        </p:cTn>
+                                        <p:tgtEl>
+                                          <p:spTgt spid="45"/>
+                                        </p:tgtEl>
+                                        <p:attrNameLst>
+                                          <p:attrName>style.visibility</p:attrName>
+                                        </p:attrNameLst>
+                                      </p:cBhvr>
+                                      <p:to>
+                                        <p:strVal val="visible"/>
+                                      </p:to>
+                                    </p:set>
+                                    <p:animEffect transition="in" filter="fade">
+                                      <p:cBhvr>
+                                        <p:cTn id="69" dur="500"/>
+                                        <p:tgtEl>
+                                          <p:spTgt spid="45"/>
+                                        </p:tgtEl>
+                                      </p:cBhvr>
+                                    </p:animEffect>
+                                  </p:childTnLst>
+                                </p:cTn>
+                              </p:par>
+                            </p:childTnLst>
+                          </p:cTn>
+                        </p:par>
+                      </p:childTnLst>
+                    </p:cTn>
+                  </p:par>
+                  <p:par>
+                    <p:cTn id="70" fill="hold">
+                      <p:stCondLst>
+                        <p:cond delay="indefinite"/>
+                      </p:stCondLst>
+                      <p:childTnLst>
+                        <p:par>
+                          <p:cTn id="71" fill="hold">
+                            <p:stCondLst>
+                              <p:cond delay="0"/>
+                            </p:stCondLst>
+                            <p:childTnLst>
+                              <p:par>
+                                <p:cTn id="72" presetID="10" presetClass="entr" presetSubtype="0" fill="hold" grpId="0" nodeType="clickEffect">
+                                  <p:stCondLst>
+                                    <p:cond delay="0"/>
+                                  </p:stCondLst>
+                                  <p:childTnLst>
+                                    <p:set>
+                                      <p:cBhvr>
+                                        <p:cTn id="73" dur="1" fill="hold">
+                                          <p:stCondLst>
+                                            <p:cond delay="0"/>
+                                          </p:stCondLst>
+                                        </p:cTn>
+                                        <p:tgtEl>
+                                          <p:spTgt spid="46"/>
+                                        </p:tgtEl>
+                                        <p:attrNameLst>
+                                          <p:attrName>style.visibility</p:attrName>
+                                        </p:attrNameLst>
+                                      </p:cBhvr>
+                                      <p:to>
+                                        <p:strVal val="visible"/>
+                                      </p:to>
+                                    </p:set>
+                                    <p:animEffect transition="in" filter="fade">
+                                      <p:cBhvr>
+                                        <p:cTn id="74" dur="500"/>
+                                        <p:tgtEl>
+                                          <p:spTgt spid="46"/>
+                                        </p:tgtEl>
+                                      </p:cBhvr>
+                                    </p:animEffect>
+                                  </p:childTnLst>
+                                </p:cTn>
+                              </p:par>
+                            </p:childTnLst>
+                          </p:cTn>
+                        </p:par>
+                      </p:childTnLst>
+                    </p:cTn>
+                  </p:par>
+                  <p:par>
+                    <p:cTn id="75" fill="hold">
+                      <p:stCondLst>
+                        <p:cond delay="indefinite"/>
+                      </p:stCondLst>
+                      <p:childTnLst>
+                        <p:par>
+                          <p:cTn id="76" fill="hold">
+                            <p:stCondLst>
+                              <p:cond delay="0"/>
+                            </p:stCondLst>
+                            <p:childTnLst>
+                              <p:par>
+                                <p:cTn id="77" presetID="10" presetClass="entr" presetSubtype="0" fill="hold" grpId="0" nodeType="clickEffect">
+                                  <p:stCondLst>
+                                    <p:cond delay="0"/>
+                                  </p:stCondLst>
+                                  <p:childTnLst>
+                                    <p:set>
+                                      <p:cBhvr>
+                                        <p:cTn id="78" dur="1" fill="hold">
+                                          <p:stCondLst>
+                                            <p:cond delay="0"/>
+                                          </p:stCondLst>
+                                        </p:cTn>
+                                        <p:tgtEl>
+                                          <p:spTgt spid="49"/>
+                                        </p:tgtEl>
+                                        <p:attrNameLst>
+                                          <p:attrName>style.visibility</p:attrName>
+                                        </p:attrNameLst>
+                                      </p:cBhvr>
+                                      <p:to>
+                                        <p:strVal val="visible"/>
+                                      </p:to>
+                                    </p:set>
+                                    <p:animEffect transition="in" filter="fade">
+                                      <p:cBhvr>
+                                        <p:cTn id="79" dur="500"/>
+                                        <p:tgtEl>
+                                          <p:spTgt spid="49"/>
+                                        </p:tgtEl>
+                                      </p:cBhvr>
+                                    </p:animEffect>
+                                  </p:childTnLst>
+                                </p:cTn>
+                              </p:par>
+                            </p:childTnLst>
+                          </p:cTn>
+                        </p:par>
+                      </p:childTnLst>
+                    </p:cTn>
+                  </p:par>
+                  <p:par>
+                    <p:cTn id="80" fill="hold">
+                      <p:stCondLst>
+                        <p:cond delay="indefinite"/>
+                      </p:stCondLst>
+                      <p:childTnLst>
+                        <p:par>
+                          <p:cTn id="81" fill="hold">
+                            <p:stCondLst>
+                              <p:cond delay="0"/>
+                            </p:stCondLst>
+                            <p:childTnLst>
+                              <p:par>
+                                <p:cTn id="82" presetID="10" presetClass="entr" presetSubtype="0" fill="hold" grpId="0" nodeType="clickEffect">
+                                  <p:stCondLst>
+                                    <p:cond delay="0"/>
+                                  </p:stCondLst>
+                                  <p:childTnLst>
+                                    <p:set>
+                                      <p:cBhvr>
+                                        <p:cTn id="83" dur="1" fill="hold">
+                                          <p:stCondLst>
+                                            <p:cond delay="0"/>
+                                          </p:stCondLst>
+                                        </p:cTn>
+                                        <p:tgtEl>
+                                          <p:spTgt spid="50"/>
+                                        </p:tgtEl>
+                                        <p:attrNameLst>
+                                          <p:attrName>style.visibility</p:attrName>
+                                        </p:attrNameLst>
+                                      </p:cBhvr>
+                                      <p:to>
+                                        <p:strVal val="visible"/>
+                                      </p:to>
+                                    </p:set>
+                                    <p:animEffect transition="in" filter="fade">
+                                      <p:cBhvr>
+                                        <p:cTn id="84" dur="500"/>
+                                        <p:tgtEl>
+                                          <p:spTgt spid="50"/>
+                                        </p:tgtEl>
+                                      </p:cBhvr>
+                                    </p:animEffect>
+                                  </p:childTnLst>
+                                </p:cTn>
+                              </p:par>
+                            </p:childTnLst>
+                          </p:cTn>
+                        </p:par>
+                      </p:childTnLst>
+                    </p:cTn>
+                  </p:par>
+                </p:childTnLst>
+              </p:cTn>
+              <p:prevCondLst>
+                <p:cond evt="onPrev" delay="0">
+                  <p:tgtEl>
+                    <p:sldTgt/>
+                  </p:tgtEl>
+                </p:cond>
+              </p:prevCondLst>
+              <p:nextCondLst>
+                <p:cond evt="onNext" delay="0">
+                  <p:tgtEl>
+                    <p:sldTgt/>
+                  </p:tgtEl>
+                </p:cond>
+              </p:nextCondLst>
+            </p:seq>
+          </p:childTnLst>
+        </p:cTn>
+      </p:par>
+    </p:tnLst>
+  </p:timing>
+</p:sld>
+</file>
+
 <file path=ppt/slides/slide3.xml><?xml version="1.0" encoding="utf-8"?>
 <p:sld xmlns:a="http://schemas.openxmlformats.org/drawingml/2006/main" xmlns:p="http://schemas.openxmlformats.org/presentationml/2006/main" xmlns:r="http://schemas.openxmlformats.org/officeDocument/2006/relationships">
   <p:cSld>
